--- a/materials/class-slide-day3-powerpoint.pptx
+++ b/materials/class-slide-day3-powerpoint.pptx
@@ -5,37 +5,44 @@
     <p:sldMasterId id="2147483648" r:id="rId1"/>
   </p:sldMasterIdLst>
   <p:notesMasterIdLst>
-    <p:notesMasterId r:id="rId30"/>
+    <p:notesMasterId r:id="rId37"/>
   </p:notesMasterIdLst>
   <p:sldIdLst>
     <p:sldId id="257" r:id="rId2"/>
     <p:sldId id="258" r:id="rId3"/>
-    <p:sldId id="262" r:id="rId4"/>
-    <p:sldId id="320" r:id="rId5"/>
-    <p:sldId id="321" r:id="rId6"/>
-    <p:sldId id="322" r:id="rId7"/>
-    <p:sldId id="259" r:id="rId8"/>
-    <p:sldId id="260" r:id="rId9"/>
-    <p:sldId id="261" r:id="rId10"/>
-    <p:sldId id="263" r:id="rId11"/>
-    <p:sldId id="264" r:id="rId12"/>
-    <p:sldId id="265" r:id="rId13"/>
-    <p:sldId id="266" r:id="rId14"/>
-    <p:sldId id="267" r:id="rId15"/>
-    <p:sldId id="268" r:id="rId16"/>
-    <p:sldId id="269" r:id="rId17"/>
-    <p:sldId id="270" r:id="rId18"/>
-    <p:sldId id="271" r:id="rId19"/>
-    <p:sldId id="272" r:id="rId20"/>
-    <p:sldId id="273" r:id="rId21"/>
-    <p:sldId id="274" r:id="rId22"/>
-    <p:sldId id="275" r:id="rId23"/>
-    <p:sldId id="276" r:id="rId24"/>
-    <p:sldId id="277" r:id="rId25"/>
-    <p:sldId id="278" r:id="rId26"/>
-    <p:sldId id="279" r:id="rId27"/>
-    <p:sldId id="280" r:id="rId28"/>
-    <p:sldId id="281" r:id="rId29"/>
+    <p:sldId id="323" r:id="rId4"/>
+    <p:sldId id="324" r:id="rId5"/>
+    <p:sldId id="325" r:id="rId6"/>
+    <p:sldId id="326" r:id="rId7"/>
+    <p:sldId id="328" r:id="rId8"/>
+    <p:sldId id="262" r:id="rId9"/>
+    <p:sldId id="320" r:id="rId10"/>
+    <p:sldId id="321" r:id="rId11"/>
+    <p:sldId id="322" r:id="rId12"/>
+    <p:sldId id="259" r:id="rId13"/>
+    <p:sldId id="260" r:id="rId14"/>
+    <p:sldId id="261" r:id="rId15"/>
+    <p:sldId id="263" r:id="rId16"/>
+    <p:sldId id="264" r:id="rId17"/>
+    <p:sldId id="265" r:id="rId18"/>
+    <p:sldId id="266" r:id="rId19"/>
+    <p:sldId id="267" r:id="rId20"/>
+    <p:sldId id="268" r:id="rId21"/>
+    <p:sldId id="269" r:id="rId22"/>
+    <p:sldId id="270" r:id="rId23"/>
+    <p:sldId id="271" r:id="rId24"/>
+    <p:sldId id="272" r:id="rId25"/>
+    <p:sldId id="273" r:id="rId26"/>
+    <p:sldId id="274" r:id="rId27"/>
+    <p:sldId id="327" r:id="rId28"/>
+    <p:sldId id="275" r:id="rId29"/>
+    <p:sldId id="276" r:id="rId30"/>
+    <p:sldId id="277" r:id="rId31"/>
+    <p:sldId id="278" r:id="rId32"/>
+    <p:sldId id="279" r:id="rId33"/>
+    <p:sldId id="280" r:id="rId34"/>
+    <p:sldId id="281" r:id="rId35"/>
+    <p:sldId id="329" r:id="rId36"/>
   </p:sldIdLst>
   <p:sldSz cx="12192000" cy="6858000"/>
   <p:notesSz cx="6858000" cy="9144000"/>
@@ -134,6 +141,11 @@
       </a:defRPr>
     </a:lvl9pPr>
   </p:defaultTextStyle>
+  <p:extLst>
+    <p:ext uri="{EFAFB233-063F-42B5-8137-9DF3F51BA10A}">
+      <p15:sldGuideLst xmlns:p15="http://schemas.microsoft.com/office/powerpoint/2012/main"/>
+    </p:ext>
+  </p:extLst>
 </p:presentation>
 </file>
 
@@ -219,7 +231,7 @@
           <a:p>
             <a:fld id="{62D350F6-05A1-1543-9840-B4CA4A74AE5F}" type="datetimeFigureOut">
               <a:rPr lang="en-US" smtClean="0"/>
-              <a:t>8/5/26</a:t>
+              <a:t>8/17/26</a:t>
             </a:fld>
             <a:endParaRPr lang="en-US"/>
           </a:p>
@@ -717,7 +729,7 @@
           <a:p>
             <a:fld id="{60BC391E-D1F2-BE44-84EF-AD229C931F22}" type="datetimeFigureOut">
               <a:rPr lang="en-US" smtClean="0"/>
-              <a:t>8/5/26</a:t>
+              <a:t>8/17/26</a:t>
             </a:fld>
             <a:endParaRPr lang="en-US"/>
           </a:p>
@@ -915,7 +927,7 @@
           <a:p>
             <a:fld id="{60BC391E-D1F2-BE44-84EF-AD229C931F22}" type="datetimeFigureOut">
               <a:rPr lang="en-US" smtClean="0"/>
-              <a:t>8/5/26</a:t>
+              <a:t>8/17/26</a:t>
             </a:fld>
             <a:endParaRPr lang="en-US"/>
           </a:p>
@@ -1123,7 +1135,7 @@
           <a:p>
             <a:fld id="{60BC391E-D1F2-BE44-84EF-AD229C931F22}" type="datetimeFigureOut">
               <a:rPr lang="en-US" smtClean="0"/>
-              <a:t>8/5/26</a:t>
+              <a:t>8/17/26</a:t>
             </a:fld>
             <a:endParaRPr lang="en-US"/>
           </a:p>
@@ -1321,7 +1333,7 @@
           <a:p>
             <a:fld id="{60BC391E-D1F2-BE44-84EF-AD229C931F22}" type="datetimeFigureOut">
               <a:rPr lang="en-US" smtClean="0"/>
-              <a:t>8/5/26</a:t>
+              <a:t>8/17/26</a:t>
             </a:fld>
             <a:endParaRPr lang="en-US"/>
           </a:p>
@@ -1596,7 +1608,7 @@
           <a:p>
             <a:fld id="{60BC391E-D1F2-BE44-84EF-AD229C931F22}" type="datetimeFigureOut">
               <a:rPr lang="en-US" smtClean="0"/>
-              <a:t>8/5/26</a:t>
+              <a:t>8/17/26</a:t>
             </a:fld>
             <a:endParaRPr lang="en-US"/>
           </a:p>
@@ -1861,7 +1873,7 @@
           <a:p>
             <a:fld id="{60BC391E-D1F2-BE44-84EF-AD229C931F22}" type="datetimeFigureOut">
               <a:rPr lang="en-US" smtClean="0"/>
-              <a:t>8/5/26</a:t>
+              <a:t>8/17/26</a:t>
             </a:fld>
             <a:endParaRPr lang="en-US"/>
           </a:p>
@@ -2273,7 +2285,7 @@
           <a:p>
             <a:fld id="{60BC391E-D1F2-BE44-84EF-AD229C931F22}" type="datetimeFigureOut">
               <a:rPr lang="en-US" smtClean="0"/>
-              <a:t>8/5/26</a:t>
+              <a:t>8/17/26</a:t>
             </a:fld>
             <a:endParaRPr lang="en-US"/>
           </a:p>
@@ -2414,7 +2426,7 @@
           <a:p>
             <a:fld id="{60BC391E-D1F2-BE44-84EF-AD229C931F22}" type="datetimeFigureOut">
               <a:rPr lang="en-US" smtClean="0"/>
-              <a:t>8/5/26</a:t>
+              <a:t>8/17/26</a:t>
             </a:fld>
             <a:endParaRPr lang="en-US"/>
           </a:p>
@@ -2527,7 +2539,7 @@
           <a:p>
             <a:fld id="{60BC391E-D1F2-BE44-84EF-AD229C931F22}" type="datetimeFigureOut">
               <a:rPr lang="en-US" smtClean="0"/>
-              <a:t>8/5/26</a:t>
+              <a:t>8/17/26</a:t>
             </a:fld>
             <a:endParaRPr lang="en-US"/>
           </a:p>
@@ -2838,7 +2850,7 @@
           <a:p>
             <a:fld id="{60BC391E-D1F2-BE44-84EF-AD229C931F22}" type="datetimeFigureOut">
               <a:rPr lang="en-US" smtClean="0"/>
-              <a:t>8/5/26</a:t>
+              <a:t>8/17/26</a:t>
             </a:fld>
             <a:endParaRPr lang="en-US"/>
           </a:p>
@@ -3126,7 +3138,7 @@
           <a:p>
             <a:fld id="{60BC391E-D1F2-BE44-84EF-AD229C931F22}" type="datetimeFigureOut">
               <a:rPr lang="en-US" smtClean="0"/>
-              <a:t>8/5/26</a:t>
+              <a:t>8/17/26</a:t>
             </a:fld>
             <a:endParaRPr lang="en-US"/>
           </a:p>
@@ -3367,7 +3379,7 @@
           <a:p>
             <a:fld id="{60BC391E-D1F2-BE44-84EF-AD229C931F22}" type="datetimeFigureOut">
               <a:rPr lang="en-US" smtClean="0"/>
-              <a:t>8/5/26</a:t>
+              <a:t>8/17/26</a:t>
             </a:fld>
             <a:endParaRPr lang="en-US"/>
           </a:p>
@@ -3935,6 +3947,1012 @@
   <p:cSld>
     <p:spTree>
       <p:nvGrpSpPr>
+        <p:cNvPr id="1" name=""/>
+        <p:cNvGrpSpPr/>
+        <p:nvPr/>
+      </p:nvGrpSpPr>
+      <p:grpSpPr>
+        <a:xfrm>
+          <a:off x="0" y="0"/>
+          <a:ext cx="0" cy="0"/>
+          <a:chOff x="0" y="0"/>
+          <a:chExt cx="0" cy="0"/>
+        </a:xfrm>
+      </p:grpSpPr>
+      <p:sp>
+        <p:nvSpPr>
+          <p:cNvPr id="2" name="Title 1"/>
+          <p:cNvSpPr>
+            <a:spLocks noGrp="1"/>
+          </p:cNvSpPr>
+          <p:nvPr>
+            <p:ph type="title"/>
+          </p:nvPr>
+        </p:nvSpPr>
+        <p:spPr/>
+        <p:txBody>
+          <a:bodyPr/>
+          <a:lstStyle/>
+          <a:p>
+            <a:r>
+              <a:rPr dirty="0">
+                <a:latin typeface="Aharoni" panose="02010803020104030203" pitchFamily="2" charset="-79"/>
+                <a:cs typeface="Aharoni" panose="02010803020104030203" pitchFamily="2" charset="-79"/>
+              </a:rPr>
+              <a:t>Olympics Data: Complete Solution</a:t>
+            </a:r>
+          </a:p>
+        </p:txBody>
+      </p:sp>
+      <p:pic>
+        <p:nvPicPr>
+          <p:cNvPr id="5" name="Picture 4">
+            <a:extLst>
+              <a:ext uri="{FF2B5EF4-FFF2-40B4-BE49-F238E27FC236}">
+                <a16:creationId xmlns:a16="http://schemas.microsoft.com/office/drawing/2014/main" id="{54E9D52C-1E87-C87C-1E02-662CD56E205C}"/>
+              </a:ext>
+            </a:extLst>
+          </p:cNvPr>
+          <p:cNvPicPr>
+            <a:picLocks noChangeAspect="1"/>
+          </p:cNvPicPr>
+          <p:nvPr/>
+        </p:nvPicPr>
+        <p:blipFill>
+          <a:blip r:embed="rId2"/>
+          <a:stretch>
+            <a:fillRect/>
+          </a:stretch>
+        </p:blipFill>
+        <p:spPr>
+          <a:xfrm>
+            <a:off x="609599" y="1647881"/>
+            <a:ext cx="11169596" cy="4593263"/>
+          </a:xfrm>
+          <a:prstGeom prst="rect">
+            <a:avLst/>
+          </a:prstGeom>
+        </p:spPr>
+      </p:pic>
+      <p:cxnSp>
+        <p:nvCxnSpPr>
+          <p:cNvPr id="8" name="Straight Connector 7">
+            <a:extLst>
+              <a:ext uri="{FF2B5EF4-FFF2-40B4-BE49-F238E27FC236}">
+                <a16:creationId xmlns:a16="http://schemas.microsoft.com/office/drawing/2014/main" id="{C6D56443-A67C-2D59-BBE6-253CD92CDA17}"/>
+              </a:ext>
+            </a:extLst>
+          </p:cNvPr>
+          <p:cNvCxnSpPr/>
+          <p:nvPr/>
+        </p:nvCxnSpPr>
+        <p:spPr>
+          <a:xfrm>
+            <a:off x="609599" y="1261979"/>
+            <a:ext cx="10972800" cy="0"/>
+          </a:xfrm>
+          <a:prstGeom prst="line">
+            <a:avLst/>
+          </a:prstGeom>
+          <a:ln>
+            <a:solidFill>
+              <a:srgbClr val="C00000"/>
+            </a:solidFill>
+          </a:ln>
+        </p:spPr>
+        <p:style>
+          <a:lnRef idx="2">
+            <a:schemeClr val="accent1"/>
+          </a:lnRef>
+          <a:fillRef idx="0">
+            <a:schemeClr val="accent1"/>
+          </a:fillRef>
+          <a:effectRef idx="1">
+            <a:schemeClr val="accent1"/>
+          </a:effectRef>
+          <a:fontRef idx="minor">
+            <a:schemeClr val="tx1"/>
+          </a:fontRef>
+        </p:style>
+      </p:cxnSp>
+    </p:spTree>
+  </p:cSld>
+  <p:clrMapOvr>
+    <a:masterClrMapping/>
+  </p:clrMapOvr>
+</p:sld>
+</file>
+
+<file path=ppt/slides/slide11.xml><?xml version="1.0" encoding="utf-8"?>
+<p:sld xmlns:a="http://schemas.openxmlformats.org/drawingml/2006/main" xmlns:r="http://schemas.openxmlformats.org/officeDocument/2006/relationships" xmlns:p="http://schemas.openxmlformats.org/presentationml/2006/main">
+  <p:cSld>
+    <p:spTree>
+      <p:nvGrpSpPr>
+        <p:cNvPr id="1" name=""/>
+        <p:cNvGrpSpPr/>
+        <p:nvPr/>
+      </p:nvGrpSpPr>
+      <p:grpSpPr>
+        <a:xfrm>
+          <a:off x="0" y="0"/>
+          <a:ext cx="0" cy="0"/>
+          <a:chOff x="0" y="0"/>
+          <a:chExt cx="0" cy="0"/>
+        </a:xfrm>
+      </p:grpSpPr>
+      <p:sp>
+        <p:nvSpPr>
+          <p:cNvPr id="2" name="Title 1"/>
+          <p:cNvSpPr>
+            <a:spLocks noGrp="1"/>
+          </p:cNvSpPr>
+          <p:nvPr>
+            <p:ph type="title"/>
+          </p:nvPr>
+        </p:nvSpPr>
+        <p:spPr/>
+        <p:txBody>
+          <a:bodyPr/>
+          <a:lstStyle/>
+          <a:p>
+            <a:r>
+              <a:rPr dirty="0">
+                <a:latin typeface="Aharoni" panose="02010803020104030203" pitchFamily="2" charset="-79"/>
+                <a:cs typeface="Aharoni" panose="02010803020104030203" pitchFamily="2" charset="-79"/>
+              </a:rPr>
+              <a:t>Olympics Data: Solution, Continued</a:t>
+            </a:r>
+          </a:p>
+        </p:txBody>
+      </p:sp>
+      <p:pic>
+        <p:nvPicPr>
+          <p:cNvPr id="7" name="Picture 6">
+            <a:extLst>
+              <a:ext uri="{FF2B5EF4-FFF2-40B4-BE49-F238E27FC236}">
+                <a16:creationId xmlns:a16="http://schemas.microsoft.com/office/drawing/2014/main" id="{D8517AC1-8972-448E-CFF2-E81A244CC9AB}"/>
+              </a:ext>
+            </a:extLst>
+          </p:cNvPr>
+          <p:cNvPicPr>
+            <a:picLocks noChangeAspect="1"/>
+          </p:cNvPicPr>
+          <p:nvPr/>
+        </p:nvPicPr>
+        <p:blipFill>
+          <a:blip r:embed="rId2"/>
+          <a:stretch>
+            <a:fillRect/>
+          </a:stretch>
+        </p:blipFill>
+        <p:spPr>
+          <a:xfrm>
+            <a:off x="294105" y="1417638"/>
+            <a:ext cx="11470105" cy="5081055"/>
+          </a:xfrm>
+          <a:prstGeom prst="rect">
+            <a:avLst/>
+          </a:prstGeom>
+        </p:spPr>
+      </p:pic>
+      <p:cxnSp>
+        <p:nvCxnSpPr>
+          <p:cNvPr id="8" name="Straight Connector 7">
+            <a:extLst>
+              <a:ext uri="{FF2B5EF4-FFF2-40B4-BE49-F238E27FC236}">
+                <a16:creationId xmlns:a16="http://schemas.microsoft.com/office/drawing/2014/main" id="{C0BEF72F-9D95-E9F8-4514-E24E336C146E}"/>
+              </a:ext>
+            </a:extLst>
+          </p:cNvPr>
+          <p:cNvCxnSpPr/>
+          <p:nvPr/>
+        </p:nvCxnSpPr>
+        <p:spPr>
+          <a:xfrm>
+            <a:off x="609600" y="1229895"/>
+            <a:ext cx="10972800" cy="0"/>
+          </a:xfrm>
+          <a:prstGeom prst="line">
+            <a:avLst/>
+          </a:prstGeom>
+          <a:ln>
+            <a:solidFill>
+              <a:srgbClr val="C00000"/>
+            </a:solidFill>
+          </a:ln>
+        </p:spPr>
+        <p:style>
+          <a:lnRef idx="2">
+            <a:schemeClr val="accent1"/>
+          </a:lnRef>
+          <a:fillRef idx="0">
+            <a:schemeClr val="accent1"/>
+          </a:fillRef>
+          <a:effectRef idx="1">
+            <a:schemeClr val="accent1"/>
+          </a:effectRef>
+          <a:fontRef idx="minor">
+            <a:schemeClr val="tx1"/>
+          </a:fontRef>
+        </p:style>
+      </p:cxnSp>
+    </p:spTree>
+  </p:cSld>
+  <p:clrMapOvr>
+    <a:masterClrMapping/>
+  </p:clrMapOvr>
+</p:sld>
+</file>
+
+<file path=ppt/slides/slide12.xml><?xml version="1.0" encoding="utf-8"?>
+<p:sld xmlns:a="http://schemas.openxmlformats.org/drawingml/2006/main" xmlns:r="http://schemas.openxmlformats.org/officeDocument/2006/relationships" xmlns:p="http://schemas.openxmlformats.org/presentationml/2006/main">
+  <p:cSld>
+    <p:spTree>
+      <p:nvGrpSpPr>
+        <p:cNvPr id="1" name="">
+          <a:extLst>
+            <a:ext uri="{FF2B5EF4-FFF2-40B4-BE49-F238E27FC236}">
+              <a16:creationId xmlns:a16="http://schemas.microsoft.com/office/drawing/2014/main" id="{83C4B354-070D-ECF7-6671-2F9BDACDB5BE}"/>
+            </a:ext>
+          </a:extLst>
+        </p:cNvPr>
+        <p:cNvGrpSpPr/>
+        <p:nvPr/>
+      </p:nvGrpSpPr>
+      <p:grpSpPr>
+        <a:xfrm>
+          <a:off x="0" y="0"/>
+          <a:ext cx="0" cy="0"/>
+          <a:chOff x="0" y="0"/>
+          <a:chExt cx="0" cy="0"/>
+        </a:xfrm>
+      </p:grpSpPr>
+      <p:sp>
+        <p:nvSpPr>
+          <p:cNvPr id="2" name="Title 1">
+            <a:extLst>
+              <a:ext uri="{FF2B5EF4-FFF2-40B4-BE49-F238E27FC236}">
+                <a16:creationId xmlns:a16="http://schemas.microsoft.com/office/drawing/2014/main" id="{31E2887C-B6AA-3BD3-4F50-CFEC1A04AE72}"/>
+              </a:ext>
+            </a:extLst>
+          </p:cNvPr>
+          <p:cNvSpPr>
+            <a:spLocks noGrp="1"/>
+          </p:cNvSpPr>
+          <p:nvPr>
+            <p:ph type="title"/>
+          </p:nvPr>
+        </p:nvSpPr>
+        <p:spPr>
+          <a:xfrm>
+            <a:off x="838200" y="365126"/>
+            <a:ext cx="10515600" cy="947308"/>
+          </a:xfrm>
+        </p:spPr>
+        <p:txBody>
+          <a:bodyPr/>
+          <a:lstStyle/>
+          <a:p>
+            <a:pPr algn="ctr"/>
+            <a:r>
+              <a:rPr lang="en-US" dirty="0">
+                <a:latin typeface="Aharoni" panose="02010803020104030203" pitchFamily="2" charset="-79"/>
+                <a:cs typeface="Aharoni" panose="02010803020104030203" pitchFamily="2" charset="-79"/>
+              </a:rPr>
+              <a:t>Becoming Familiar with Data</a:t>
+            </a:r>
+          </a:p>
+        </p:txBody>
+      </p:sp>
+      <p:pic>
+        <p:nvPicPr>
+          <p:cNvPr id="6" name="Content Placeholder 5">
+            <a:extLst>
+              <a:ext uri="{FF2B5EF4-FFF2-40B4-BE49-F238E27FC236}">
+                <a16:creationId xmlns:a16="http://schemas.microsoft.com/office/drawing/2014/main" id="{2DDE6A83-56B3-B975-427F-E1BD84D7906C}"/>
+              </a:ext>
+            </a:extLst>
+          </p:cNvPr>
+          <p:cNvPicPr>
+            <a:picLocks noGrp="1" noChangeAspect="1"/>
+          </p:cNvPicPr>
+          <p:nvPr>
+            <p:ph idx="1"/>
+          </p:nvPr>
+        </p:nvPicPr>
+        <p:blipFill>
+          <a:blip r:embed="rId2"/>
+          <a:stretch>
+            <a:fillRect/>
+          </a:stretch>
+        </p:blipFill>
+        <p:spPr>
+          <a:xfrm>
+            <a:off x="835571" y="1788434"/>
+            <a:ext cx="10515600" cy="892355"/>
+          </a:xfrm>
+          <a:prstGeom prst="rect">
+            <a:avLst/>
+          </a:prstGeom>
+        </p:spPr>
+      </p:pic>
+      <p:cxnSp>
+        <p:nvCxnSpPr>
+          <p:cNvPr id="5" name="Straight Connector 4">
+            <a:extLst>
+              <a:ext uri="{FF2B5EF4-FFF2-40B4-BE49-F238E27FC236}">
+                <a16:creationId xmlns:a16="http://schemas.microsoft.com/office/drawing/2014/main" id="{9D29858C-2190-683B-4A1E-27AC555C9B2D}"/>
+              </a:ext>
+            </a:extLst>
+          </p:cNvPr>
+          <p:cNvCxnSpPr/>
+          <p:nvPr/>
+        </p:nvCxnSpPr>
+        <p:spPr>
+          <a:xfrm>
+            <a:off x="838200" y="1161826"/>
+            <a:ext cx="10515600" cy="0"/>
+          </a:xfrm>
+          <a:prstGeom prst="line">
+            <a:avLst/>
+          </a:prstGeom>
+          <a:ln>
+            <a:solidFill>
+              <a:srgbClr val="C00000"/>
+            </a:solidFill>
+          </a:ln>
+        </p:spPr>
+        <p:style>
+          <a:lnRef idx="2">
+            <a:schemeClr val="accent1"/>
+          </a:lnRef>
+          <a:fillRef idx="0">
+            <a:schemeClr val="accent1"/>
+          </a:fillRef>
+          <a:effectRef idx="1">
+            <a:schemeClr val="accent1"/>
+          </a:effectRef>
+          <a:fontRef idx="minor">
+            <a:schemeClr val="tx1"/>
+          </a:fontRef>
+        </p:style>
+      </p:cxnSp>
+      <p:pic>
+        <p:nvPicPr>
+          <p:cNvPr id="8" name="Picture 7">
+            <a:extLst>
+              <a:ext uri="{FF2B5EF4-FFF2-40B4-BE49-F238E27FC236}">
+                <a16:creationId xmlns:a16="http://schemas.microsoft.com/office/drawing/2014/main" id="{9DDBAB87-50B3-B338-8981-AFF594215D70}"/>
+              </a:ext>
+            </a:extLst>
+          </p:cNvPr>
+          <p:cNvPicPr>
+            <a:picLocks noChangeAspect="1"/>
+          </p:cNvPicPr>
+          <p:nvPr/>
+        </p:nvPicPr>
+        <p:blipFill>
+          <a:blip r:embed="rId3"/>
+          <a:stretch>
+            <a:fillRect/>
+          </a:stretch>
+        </p:blipFill>
+        <p:spPr>
+          <a:xfrm>
+            <a:off x="835571" y="2795516"/>
+            <a:ext cx="10518229" cy="1746269"/>
+          </a:xfrm>
+          <a:prstGeom prst="rect">
+            <a:avLst/>
+          </a:prstGeom>
+        </p:spPr>
+      </p:pic>
+      <p:pic>
+        <p:nvPicPr>
+          <p:cNvPr id="10" name="Picture 9">
+            <a:extLst>
+              <a:ext uri="{FF2B5EF4-FFF2-40B4-BE49-F238E27FC236}">
+                <a16:creationId xmlns:a16="http://schemas.microsoft.com/office/drawing/2014/main" id="{31E88CA0-9CFD-8BAD-FAA0-498301BA5C85}"/>
+              </a:ext>
+            </a:extLst>
+          </p:cNvPr>
+          <p:cNvPicPr>
+            <a:picLocks noChangeAspect="1"/>
+          </p:cNvPicPr>
+          <p:nvPr/>
+        </p:nvPicPr>
+        <p:blipFill>
+          <a:blip r:embed="rId4"/>
+          <a:stretch>
+            <a:fillRect/>
+          </a:stretch>
+        </p:blipFill>
+        <p:spPr>
+          <a:xfrm>
+            <a:off x="835571" y="4674367"/>
+            <a:ext cx="10515601" cy="821372"/>
+          </a:xfrm>
+          <a:prstGeom prst="rect">
+            <a:avLst/>
+          </a:prstGeom>
+        </p:spPr>
+      </p:pic>
+      <p:sp>
+        <p:nvSpPr>
+          <p:cNvPr id="11" name="TextBox 10">
+            <a:extLst>
+              <a:ext uri="{FF2B5EF4-FFF2-40B4-BE49-F238E27FC236}">
+                <a16:creationId xmlns:a16="http://schemas.microsoft.com/office/drawing/2014/main" id="{24ABDF20-3F03-8B16-6A08-FFAF39B14D39}"/>
+              </a:ext>
+            </a:extLst>
+          </p:cNvPr>
+          <p:cNvSpPr txBox="1"/>
+          <p:nvPr/>
+        </p:nvSpPr>
+        <p:spPr>
+          <a:xfrm>
+            <a:off x="835571" y="1229679"/>
+            <a:ext cx="10515600" cy="461665"/>
+          </a:xfrm>
+          <a:prstGeom prst="rect">
+            <a:avLst/>
+          </a:prstGeom>
+          <a:noFill/>
+        </p:spPr>
+        <p:txBody>
+          <a:bodyPr wrap="square" rtlCol="0">
+            <a:spAutoFit/>
+          </a:bodyPr>
+          <a:lstStyle/>
+          <a:p>
+            <a:pPr marL="342900" indent="-342900">
+              <a:buFont typeface="Arial" panose="020B0604020202020204" pitchFamily="34" charset="0"/>
+              <a:buChar char="•"/>
+            </a:pPr>
+            <a:r>
+              <a:rPr lang="en-US" sz="2400" dirty="0">
+                <a:latin typeface="Times New Roman" panose="02020603050405020304" pitchFamily="18" charset="0"/>
+                <a:cs typeface="Times New Roman" panose="02020603050405020304" pitchFamily="18" charset="0"/>
+              </a:rPr>
+              <a:t>Run the code below. </a:t>
+            </a:r>
+          </a:p>
+        </p:txBody>
+      </p:sp>
+      <p:sp>
+        <p:nvSpPr>
+          <p:cNvPr id="12" name="TextBox 11">
+            <a:extLst>
+              <a:ext uri="{FF2B5EF4-FFF2-40B4-BE49-F238E27FC236}">
+                <a16:creationId xmlns:a16="http://schemas.microsoft.com/office/drawing/2014/main" id="{6338EB38-191C-017D-5A73-56E680DBCE2D}"/>
+              </a:ext>
+            </a:extLst>
+          </p:cNvPr>
+          <p:cNvSpPr txBox="1"/>
+          <p:nvPr/>
+        </p:nvSpPr>
+        <p:spPr>
+          <a:xfrm>
+            <a:off x="835571" y="5628321"/>
+            <a:ext cx="10515600" cy="461665"/>
+          </a:xfrm>
+          <a:prstGeom prst="rect">
+            <a:avLst/>
+          </a:prstGeom>
+          <a:noFill/>
+        </p:spPr>
+        <p:txBody>
+          <a:bodyPr wrap="square" rtlCol="0">
+            <a:spAutoFit/>
+          </a:bodyPr>
+          <a:lstStyle/>
+          <a:p>
+            <a:pPr marL="342900" indent="-342900">
+              <a:buFont typeface="Arial" panose="020B0604020202020204" pitchFamily="34" charset="0"/>
+              <a:buChar char="•"/>
+            </a:pPr>
+            <a:r>
+              <a:rPr lang="en-US" sz="2400" dirty="0">
+                <a:latin typeface="Times New Roman" panose="02020603050405020304" pitchFamily="18" charset="0"/>
+                <a:cs typeface="Times New Roman" panose="02020603050405020304" pitchFamily="18" charset="0"/>
+              </a:rPr>
+              <a:t>What does negative </a:t>
+            </a:r>
+            <a:r>
+              <a:rPr lang="en-US" sz="2400" dirty="0" err="1">
+                <a:latin typeface="Times New Roman" panose="02020603050405020304" pitchFamily="18" charset="0"/>
+                <a:cs typeface="Times New Roman" panose="02020603050405020304" pitchFamily="18" charset="0"/>
+              </a:rPr>
+              <a:t>pid</a:t>
+            </a:r>
+            <a:r>
+              <a:rPr lang="en-US" sz="2400" dirty="0">
+                <a:latin typeface="Times New Roman" panose="02020603050405020304" pitchFamily="18" charset="0"/>
+                <a:cs typeface="Times New Roman" panose="02020603050405020304" pitchFamily="18" charset="0"/>
+              </a:rPr>
+              <a:t> or gender mean? </a:t>
+            </a:r>
+          </a:p>
+        </p:txBody>
+      </p:sp>
+    </p:spTree>
+    <p:extLst>
+      <p:ext uri="{BB962C8B-B14F-4D97-AF65-F5344CB8AC3E}">
+        <p14:creationId xmlns:p14="http://schemas.microsoft.com/office/powerpoint/2010/main" val="2529798733"/>
+      </p:ext>
+    </p:extLst>
+  </p:cSld>
+  <p:clrMapOvr>
+    <a:masterClrMapping/>
+  </p:clrMapOvr>
+</p:sld>
+</file>
+
+<file path=ppt/slides/slide13.xml><?xml version="1.0" encoding="utf-8"?>
+<p:sld xmlns:a="http://schemas.openxmlformats.org/drawingml/2006/main" xmlns:r="http://schemas.openxmlformats.org/officeDocument/2006/relationships" xmlns:p="http://schemas.openxmlformats.org/presentationml/2006/main">
+  <p:cSld>
+    <p:spTree>
+      <p:nvGrpSpPr>
+        <p:cNvPr id="1" name="">
+          <a:extLst>
+            <a:ext uri="{FF2B5EF4-FFF2-40B4-BE49-F238E27FC236}">
+              <a16:creationId xmlns:a16="http://schemas.microsoft.com/office/drawing/2014/main" id="{21FA044D-7AB6-F78E-D712-3639857860A0}"/>
+            </a:ext>
+          </a:extLst>
+        </p:cNvPr>
+        <p:cNvGrpSpPr/>
+        <p:nvPr/>
+      </p:nvGrpSpPr>
+      <p:grpSpPr>
+        <a:xfrm>
+          <a:off x="0" y="0"/>
+          <a:ext cx="0" cy="0"/>
+          <a:chOff x="0" y="0"/>
+          <a:chExt cx="0" cy="0"/>
+        </a:xfrm>
+      </p:grpSpPr>
+      <p:sp>
+        <p:nvSpPr>
+          <p:cNvPr id="2" name="Title 1">
+            <a:extLst>
+              <a:ext uri="{FF2B5EF4-FFF2-40B4-BE49-F238E27FC236}">
+                <a16:creationId xmlns:a16="http://schemas.microsoft.com/office/drawing/2014/main" id="{F43626E1-47CE-CF6F-77E4-070F449C97E2}"/>
+              </a:ext>
+            </a:extLst>
+          </p:cNvPr>
+          <p:cNvSpPr>
+            <a:spLocks noGrp="1"/>
+          </p:cNvSpPr>
+          <p:nvPr>
+            <p:ph type="title"/>
+          </p:nvPr>
+        </p:nvSpPr>
+        <p:spPr>
+          <a:xfrm>
+            <a:off x="838200" y="365126"/>
+            <a:ext cx="10515600" cy="947308"/>
+          </a:xfrm>
+        </p:spPr>
+        <p:txBody>
+          <a:bodyPr>
+            <a:normAutofit/>
+          </a:bodyPr>
+          <a:lstStyle/>
+          <a:p>
+            <a:pPr algn="ctr"/>
+            <a:r>
+              <a:rPr lang="en-US" b="1" dirty="0">
+                <a:latin typeface="Aharoni" panose="02010803020104030203" pitchFamily="2" charset="-79"/>
+                <a:cs typeface="Aharoni" panose="02010803020104030203" pitchFamily="2" charset="-79"/>
+              </a:rPr>
+              <a:t>Fixing Gender</a:t>
+            </a:r>
+            <a:endParaRPr lang="en-US" dirty="0">
+              <a:latin typeface="Aharoni" panose="02010803020104030203" pitchFamily="2" charset="-79"/>
+              <a:cs typeface="Aharoni" panose="02010803020104030203" pitchFamily="2" charset="-79"/>
+            </a:endParaRPr>
+          </a:p>
+        </p:txBody>
+      </p:sp>
+      <p:pic>
+        <p:nvPicPr>
+          <p:cNvPr id="6" name="Content Placeholder 5">
+            <a:extLst>
+              <a:ext uri="{FF2B5EF4-FFF2-40B4-BE49-F238E27FC236}">
+                <a16:creationId xmlns:a16="http://schemas.microsoft.com/office/drawing/2014/main" id="{83C0425C-19B0-88DD-F535-688E683EDED6}"/>
+              </a:ext>
+            </a:extLst>
+          </p:cNvPr>
+          <p:cNvPicPr>
+            <a:picLocks noGrp="1" noChangeAspect="1"/>
+          </p:cNvPicPr>
+          <p:nvPr>
+            <p:ph idx="1"/>
+          </p:nvPr>
+        </p:nvPicPr>
+        <p:blipFill>
+          <a:blip r:embed="rId2"/>
+          <a:stretch>
+            <a:fillRect/>
+          </a:stretch>
+        </p:blipFill>
+        <p:spPr>
+          <a:xfrm>
+            <a:off x="838200" y="1363533"/>
+            <a:ext cx="10515600" cy="2641184"/>
+          </a:xfrm>
+          <a:prstGeom prst="rect">
+            <a:avLst/>
+          </a:prstGeom>
+        </p:spPr>
+      </p:pic>
+      <p:cxnSp>
+        <p:nvCxnSpPr>
+          <p:cNvPr id="5" name="Straight Connector 4">
+            <a:extLst>
+              <a:ext uri="{FF2B5EF4-FFF2-40B4-BE49-F238E27FC236}">
+                <a16:creationId xmlns:a16="http://schemas.microsoft.com/office/drawing/2014/main" id="{8CB031AC-8CA2-DB1E-D2C9-7EB849CA85BA}"/>
+              </a:ext>
+            </a:extLst>
+          </p:cNvPr>
+          <p:cNvCxnSpPr/>
+          <p:nvPr/>
+        </p:nvCxnSpPr>
+        <p:spPr>
+          <a:xfrm>
+            <a:off x="838200" y="1161826"/>
+            <a:ext cx="10515600" cy="0"/>
+          </a:xfrm>
+          <a:prstGeom prst="line">
+            <a:avLst/>
+          </a:prstGeom>
+          <a:ln>
+            <a:solidFill>
+              <a:srgbClr val="C00000"/>
+            </a:solidFill>
+          </a:ln>
+        </p:spPr>
+        <p:style>
+          <a:lnRef idx="2">
+            <a:schemeClr val="accent1"/>
+          </a:lnRef>
+          <a:fillRef idx="0">
+            <a:schemeClr val="accent1"/>
+          </a:fillRef>
+          <a:effectRef idx="1">
+            <a:schemeClr val="accent1"/>
+          </a:effectRef>
+          <a:fontRef idx="minor">
+            <a:schemeClr val="tx1"/>
+          </a:fontRef>
+        </p:style>
+      </p:cxnSp>
+      <p:sp>
+        <p:nvSpPr>
+          <p:cNvPr id="7" name="TextBox 6">
+            <a:extLst>
+              <a:ext uri="{FF2B5EF4-FFF2-40B4-BE49-F238E27FC236}">
+                <a16:creationId xmlns:a16="http://schemas.microsoft.com/office/drawing/2014/main" id="{A99FDCC0-A2F2-72C4-364E-20CFD34AD26C}"/>
+              </a:ext>
+            </a:extLst>
+          </p:cNvPr>
+          <p:cNvSpPr txBox="1"/>
+          <p:nvPr/>
+        </p:nvSpPr>
+        <p:spPr>
+          <a:xfrm>
+            <a:off x="838200" y="4294138"/>
+            <a:ext cx="10398232" cy="1200329"/>
+          </a:xfrm>
+          <a:prstGeom prst="rect">
+            <a:avLst/>
+          </a:prstGeom>
+          <a:noFill/>
+        </p:spPr>
+        <p:txBody>
+          <a:bodyPr wrap="square" rtlCol="0">
+            <a:spAutoFit/>
+          </a:bodyPr>
+          <a:lstStyle/>
+          <a:p>
+            <a:pPr marL="285750" indent="-285750">
+              <a:buFont typeface="Arial" panose="020B0604020202020204" pitchFamily="34" charset="0"/>
+              <a:buChar char="•"/>
+            </a:pPr>
+            <a:r>
+              <a:rPr lang="en-US" sz="2400" dirty="0">
+                <a:latin typeface="Times New Roman" panose="02020603050405020304" pitchFamily="18" charset="0"/>
+                <a:cs typeface="Times New Roman" panose="02020603050405020304" pitchFamily="18" charset="0"/>
+              </a:rPr>
+              <a:t>Note that we used the </a:t>
+            </a:r>
+            <a:r>
+              <a:rPr lang="en-US" sz="2400" dirty="0">
+                <a:latin typeface="Courier New" panose="02070309020205020404" pitchFamily="49" charset="0"/>
+                <a:cs typeface="Courier New" panose="02070309020205020404" pitchFamily="49" charset="0"/>
+              </a:rPr>
+              <a:t>labels</a:t>
+            </a:r>
+            <a:r>
+              <a:rPr lang="en-US" sz="2400" dirty="0">
+                <a:latin typeface="Times New Roman" panose="02020603050405020304" pitchFamily="18" charset="0"/>
+                <a:cs typeface="Times New Roman" panose="02020603050405020304" pitchFamily="18" charset="0"/>
+              </a:rPr>
+              <a:t> argument inside of factor to add labels to the values of </a:t>
+            </a:r>
+            <a:r>
+              <a:rPr lang="en-US" sz="2400" dirty="0">
+                <a:latin typeface="Courier New" panose="02070309020205020404" pitchFamily="49" charset="0"/>
+                <a:cs typeface="Courier New" panose="02070309020205020404" pitchFamily="49" charset="0"/>
+              </a:rPr>
+              <a:t>gender</a:t>
+            </a:r>
+            <a:r>
+              <a:rPr lang="en-US" sz="2400" dirty="0">
+                <a:latin typeface="Times New Roman" panose="02020603050405020304" pitchFamily="18" charset="0"/>
+                <a:cs typeface="Times New Roman" panose="02020603050405020304" pitchFamily="18" charset="0"/>
+              </a:rPr>
+              <a:t>.</a:t>
+            </a:r>
+          </a:p>
+          <a:p>
+            <a:pPr marL="285750" indent="-285750">
+              <a:buFont typeface="Arial" panose="020B0604020202020204" pitchFamily="34" charset="0"/>
+              <a:buChar char="•"/>
+            </a:pPr>
+            <a:endParaRPr lang="en-US" sz="2400" dirty="0">
+              <a:latin typeface="Times New Roman" panose="02020603050405020304" pitchFamily="18" charset="0"/>
+              <a:cs typeface="Times New Roman" panose="02020603050405020304" pitchFamily="18" charset="0"/>
+            </a:endParaRPr>
+          </a:p>
+        </p:txBody>
+      </p:sp>
+    </p:spTree>
+    <p:extLst>
+      <p:ext uri="{BB962C8B-B14F-4D97-AF65-F5344CB8AC3E}">
+        <p14:creationId xmlns:p14="http://schemas.microsoft.com/office/powerpoint/2010/main" val="222546741"/>
+      </p:ext>
+    </p:extLst>
+  </p:cSld>
+  <p:clrMapOvr>
+    <a:masterClrMapping/>
+  </p:clrMapOvr>
+</p:sld>
+</file>
+
+<file path=ppt/slides/slide14.xml><?xml version="1.0" encoding="utf-8"?>
+<p:sld xmlns:a="http://schemas.openxmlformats.org/drawingml/2006/main" xmlns:r="http://schemas.openxmlformats.org/officeDocument/2006/relationships" xmlns:p="http://schemas.openxmlformats.org/presentationml/2006/main">
+  <p:cSld>
+    <p:spTree>
+      <p:nvGrpSpPr>
+        <p:cNvPr id="1" name="">
+          <a:extLst>
+            <a:ext uri="{FF2B5EF4-FFF2-40B4-BE49-F238E27FC236}">
+              <a16:creationId xmlns:a16="http://schemas.microsoft.com/office/drawing/2014/main" id="{D232FFE9-FDEA-B8F8-FA5C-25CD17436E43}"/>
+            </a:ext>
+          </a:extLst>
+        </p:cNvPr>
+        <p:cNvGrpSpPr/>
+        <p:nvPr/>
+      </p:nvGrpSpPr>
+      <p:grpSpPr>
+        <a:xfrm>
+          <a:off x="0" y="0"/>
+          <a:ext cx="0" cy="0"/>
+          <a:chOff x="0" y="0"/>
+          <a:chExt cx="0" cy="0"/>
+        </a:xfrm>
+      </p:grpSpPr>
+      <p:sp>
+        <p:nvSpPr>
+          <p:cNvPr id="2" name="Title 1">
+            <a:extLst>
+              <a:ext uri="{FF2B5EF4-FFF2-40B4-BE49-F238E27FC236}">
+                <a16:creationId xmlns:a16="http://schemas.microsoft.com/office/drawing/2014/main" id="{FDB44ACD-11B6-336B-5B7C-9664E1CB5902}"/>
+              </a:ext>
+            </a:extLst>
+          </p:cNvPr>
+          <p:cNvSpPr>
+            <a:spLocks noGrp="1"/>
+          </p:cNvSpPr>
+          <p:nvPr>
+            <p:ph type="title"/>
+          </p:nvPr>
+        </p:nvSpPr>
+        <p:spPr>
+          <a:xfrm>
+            <a:off x="838200" y="365126"/>
+            <a:ext cx="10515600" cy="947308"/>
+          </a:xfrm>
+        </p:spPr>
+        <p:txBody>
+          <a:bodyPr/>
+          <a:lstStyle/>
+          <a:p>
+            <a:pPr algn="ctr"/>
+            <a:r>
+              <a:rPr lang="en-US" dirty="0">
+                <a:latin typeface="Aharoni" panose="02010803020104030203" pitchFamily="2" charset="-79"/>
+                <a:cs typeface="Aharoni" panose="02010803020104030203" pitchFamily="2" charset="-79"/>
+              </a:rPr>
+              <a:t>Fixing PID</a:t>
+            </a:r>
+          </a:p>
+        </p:txBody>
+      </p:sp>
+      <p:pic>
+        <p:nvPicPr>
+          <p:cNvPr id="6" name="Content Placeholder 5">
+            <a:extLst>
+              <a:ext uri="{FF2B5EF4-FFF2-40B4-BE49-F238E27FC236}">
+                <a16:creationId xmlns:a16="http://schemas.microsoft.com/office/drawing/2014/main" id="{25B8FD1B-1F63-EDB3-002F-813FD94E398A}"/>
+              </a:ext>
+            </a:extLst>
+          </p:cNvPr>
+          <p:cNvPicPr>
+            <a:picLocks noGrp="1" noChangeAspect="1"/>
+          </p:cNvPicPr>
+          <p:nvPr>
+            <p:ph idx="1"/>
+          </p:nvPr>
+        </p:nvPicPr>
+        <p:blipFill>
+          <a:blip r:embed="rId2"/>
+          <a:stretch>
+            <a:fillRect/>
+          </a:stretch>
+        </p:blipFill>
+        <p:spPr>
+          <a:xfrm>
+            <a:off x="838200" y="1312434"/>
+            <a:ext cx="10515600" cy="1141540"/>
+          </a:xfrm>
+          <a:prstGeom prst="rect">
+            <a:avLst/>
+          </a:prstGeom>
+        </p:spPr>
+      </p:pic>
+      <p:cxnSp>
+        <p:nvCxnSpPr>
+          <p:cNvPr id="5" name="Straight Connector 4">
+            <a:extLst>
+              <a:ext uri="{FF2B5EF4-FFF2-40B4-BE49-F238E27FC236}">
+                <a16:creationId xmlns:a16="http://schemas.microsoft.com/office/drawing/2014/main" id="{B0B316DC-201E-07F7-9805-FB5954E944B1}"/>
+              </a:ext>
+            </a:extLst>
+          </p:cNvPr>
+          <p:cNvCxnSpPr/>
+          <p:nvPr/>
+        </p:nvCxnSpPr>
+        <p:spPr>
+          <a:xfrm>
+            <a:off x="838200" y="1161826"/>
+            <a:ext cx="10515600" cy="0"/>
+          </a:xfrm>
+          <a:prstGeom prst="line">
+            <a:avLst/>
+          </a:prstGeom>
+          <a:ln>
+            <a:solidFill>
+              <a:srgbClr val="C00000"/>
+            </a:solidFill>
+          </a:ln>
+        </p:spPr>
+        <p:style>
+          <a:lnRef idx="2">
+            <a:schemeClr val="accent1"/>
+          </a:lnRef>
+          <a:fillRef idx="0">
+            <a:schemeClr val="accent1"/>
+          </a:fillRef>
+          <a:effectRef idx="1">
+            <a:schemeClr val="accent1"/>
+          </a:effectRef>
+          <a:fontRef idx="minor">
+            <a:schemeClr val="tx1"/>
+          </a:fontRef>
+        </p:style>
+      </p:cxnSp>
+      <p:pic>
+        <p:nvPicPr>
+          <p:cNvPr id="8" name="Picture 7">
+            <a:extLst>
+              <a:ext uri="{FF2B5EF4-FFF2-40B4-BE49-F238E27FC236}">
+                <a16:creationId xmlns:a16="http://schemas.microsoft.com/office/drawing/2014/main" id="{510C6F51-CA78-B7C3-20EA-FB5FA879EE4A}"/>
+              </a:ext>
+            </a:extLst>
+          </p:cNvPr>
+          <p:cNvPicPr>
+            <a:picLocks noChangeAspect="1"/>
+          </p:cNvPicPr>
+          <p:nvPr/>
+        </p:nvPicPr>
+        <p:blipFill>
+          <a:blip r:embed="rId3"/>
+          <a:stretch>
+            <a:fillRect/>
+          </a:stretch>
+        </p:blipFill>
+        <p:spPr>
+          <a:xfrm>
+            <a:off x="838199" y="2604580"/>
+            <a:ext cx="10515599" cy="3460661"/>
+          </a:xfrm>
+          <a:prstGeom prst="rect">
+            <a:avLst/>
+          </a:prstGeom>
+        </p:spPr>
+      </p:pic>
+      <p:sp>
+        <p:nvSpPr>
+          <p:cNvPr id="9" name="TextBox 8">
+            <a:extLst>
+              <a:ext uri="{FF2B5EF4-FFF2-40B4-BE49-F238E27FC236}">
+                <a16:creationId xmlns:a16="http://schemas.microsoft.com/office/drawing/2014/main" id="{022BF71E-6F98-BEAD-B448-4D5CA2E77EDF}"/>
+              </a:ext>
+            </a:extLst>
+          </p:cNvPr>
+          <p:cNvSpPr txBox="1"/>
+          <p:nvPr/>
+        </p:nvSpPr>
+        <p:spPr>
+          <a:xfrm>
+            <a:off x="838199" y="6126527"/>
+            <a:ext cx="10985805" cy="707886"/>
+          </a:xfrm>
+          <a:prstGeom prst="rect">
+            <a:avLst/>
+          </a:prstGeom>
+          <a:noFill/>
+        </p:spPr>
+        <p:txBody>
+          <a:bodyPr wrap="square" rtlCol="0">
+            <a:spAutoFit/>
+          </a:bodyPr>
+          <a:lstStyle/>
+          <a:p>
+            <a:pPr marL="285750" indent="-285750">
+              <a:buFont typeface="Arial" panose="020B0604020202020204" pitchFamily="34" charset="0"/>
+              <a:buChar char="•"/>
+            </a:pPr>
+            <a:r>
+              <a:rPr lang="en-US" sz="2000" dirty="0">
+                <a:latin typeface="Times New Roman" panose="02020603050405020304" pitchFamily="18" charset="0"/>
+                <a:cs typeface="Times New Roman" panose="02020603050405020304" pitchFamily="18" charset="0"/>
+              </a:rPr>
+              <a:t>Note that we reshaped the variable to remove “other” by only allowing for values 1-3 in the factor.</a:t>
+            </a:r>
+          </a:p>
+          <a:p>
+            <a:pPr marL="285750" indent="-285750">
+              <a:buFont typeface="Arial" panose="020B0604020202020204" pitchFamily="34" charset="0"/>
+              <a:buChar char="•"/>
+            </a:pPr>
+            <a:endParaRPr lang="en-US" sz="2000" dirty="0">
+              <a:latin typeface="Times New Roman" panose="02020603050405020304" pitchFamily="18" charset="0"/>
+              <a:cs typeface="Times New Roman" panose="02020603050405020304" pitchFamily="18" charset="0"/>
+            </a:endParaRPr>
+          </a:p>
+        </p:txBody>
+      </p:sp>
+    </p:spTree>
+    <p:extLst>
+      <p:ext uri="{BB962C8B-B14F-4D97-AF65-F5344CB8AC3E}">
+        <p14:creationId xmlns:p14="http://schemas.microsoft.com/office/powerpoint/2010/main" val="4184365916"/>
+      </p:ext>
+    </p:extLst>
+  </p:cSld>
+  <p:clrMapOvr>
+    <a:masterClrMapping/>
+  </p:clrMapOvr>
+</p:sld>
+</file>
+
+<file path=ppt/slides/slide15.xml><?xml version="1.0" encoding="utf-8"?>
+<p:sld xmlns:a="http://schemas.openxmlformats.org/drawingml/2006/main" xmlns:r="http://schemas.openxmlformats.org/officeDocument/2006/relationships" xmlns:p="http://schemas.openxmlformats.org/presentationml/2006/main">
+  <p:cSld>
+    <p:spTree>
+      <p:nvGrpSpPr>
         <p:cNvPr id="1" name="">
           <a:extLst>
             <a:ext uri="{FF2B5EF4-FFF2-40B4-BE49-F238E27FC236}">
@@ -4505,7 +5523,7 @@
 </p:sld>
 </file>
 
-<file path=ppt/slides/slide11.xml><?xml version="1.0" encoding="utf-8"?>
+<file path=ppt/slides/slide16.xml><?xml version="1.0" encoding="utf-8"?>
 <p:sld xmlns:a="http://schemas.openxmlformats.org/drawingml/2006/main" xmlns:r="http://schemas.openxmlformats.org/officeDocument/2006/relationships" xmlns:p="http://schemas.openxmlformats.org/presentationml/2006/main">
   <p:cSld>
     <p:spTree>
@@ -5330,7 +6348,7 @@
 </p:sld>
 </file>
 
-<file path=ppt/slides/slide12.xml><?xml version="1.0" encoding="utf-8"?>
+<file path=ppt/slides/slide17.xml><?xml version="1.0" encoding="utf-8"?>
 <p:sld xmlns:a="http://schemas.openxmlformats.org/drawingml/2006/main" xmlns:r="http://schemas.openxmlformats.org/officeDocument/2006/relationships" xmlns:p="http://schemas.openxmlformats.org/presentationml/2006/main">
   <p:cSld>
     <p:spTree>
@@ -5646,7 +6664,7 @@
                 <a:latin typeface="Times New Roman" panose="02020603050405020304" pitchFamily="18" charset="0"/>
                 <a:cs typeface="Times New Roman" panose="02020603050405020304" pitchFamily="18" charset="0"/>
               </a:rPr>
-              <a:t>changes the look of the graph</a:t>
+              <a:t>changes the look of the graph (More on this later)</a:t>
             </a:r>
           </a:p>
           <a:p>
@@ -5924,7 +6942,7 @@
 </p:sld>
 </file>
 
-<file path=ppt/slides/slide13.xml><?xml version="1.0" encoding="utf-8"?>
+<file path=ppt/slides/slide18.xml><?xml version="1.0" encoding="utf-8"?>
 <p:sld xmlns:a="http://schemas.openxmlformats.org/drawingml/2006/main" xmlns:r="http://schemas.openxmlformats.org/officeDocument/2006/relationships" xmlns:p="http://schemas.openxmlformats.org/presentationml/2006/main">
   <p:cSld>
     <p:spTree>
@@ -6111,7 +7129,7 @@
 </p:sld>
 </file>
 
-<file path=ppt/slides/slide14.xml><?xml version="1.0" encoding="utf-8"?>
+<file path=ppt/slides/slide19.xml><?xml version="1.0" encoding="utf-8"?>
 <p:sld xmlns:a="http://schemas.openxmlformats.org/drawingml/2006/main" xmlns:r="http://schemas.openxmlformats.org/officeDocument/2006/relationships" xmlns:p="http://schemas.openxmlformats.org/presentationml/2006/main">
   <p:cSld>
     <p:spTree>
@@ -6374,1180 +7392,6 @@
     <p:extLst>
       <p:ext uri="{BB962C8B-B14F-4D97-AF65-F5344CB8AC3E}">
         <p14:creationId xmlns:p14="http://schemas.microsoft.com/office/powerpoint/2010/main" val="1539307019"/>
-      </p:ext>
-    </p:extLst>
-  </p:cSld>
-  <p:clrMapOvr>
-    <a:masterClrMapping/>
-  </p:clrMapOvr>
-</p:sld>
-</file>
-
-<file path=ppt/slides/slide15.xml><?xml version="1.0" encoding="utf-8"?>
-<p:sld xmlns:a="http://schemas.openxmlformats.org/drawingml/2006/main" xmlns:r="http://schemas.openxmlformats.org/officeDocument/2006/relationships" xmlns:p="http://schemas.openxmlformats.org/presentationml/2006/main">
-  <p:cSld>
-    <p:spTree>
-      <p:nvGrpSpPr>
-        <p:cNvPr id="1" name="">
-          <a:extLst>
-            <a:ext uri="{FF2B5EF4-FFF2-40B4-BE49-F238E27FC236}">
-              <a16:creationId xmlns:a16="http://schemas.microsoft.com/office/drawing/2014/main" id="{F287173A-2521-81AE-ECFB-A762D03469A6}"/>
-            </a:ext>
-          </a:extLst>
-        </p:cNvPr>
-        <p:cNvGrpSpPr/>
-        <p:nvPr/>
-      </p:nvGrpSpPr>
-      <p:grpSpPr>
-        <a:xfrm>
-          <a:off x="0" y="0"/>
-          <a:ext cx="0" cy="0"/>
-          <a:chOff x="0" y="0"/>
-          <a:chExt cx="0" cy="0"/>
-        </a:xfrm>
-      </p:grpSpPr>
-      <p:sp>
-        <p:nvSpPr>
-          <p:cNvPr id="2" name="Title 1">
-            <a:extLst>
-              <a:ext uri="{FF2B5EF4-FFF2-40B4-BE49-F238E27FC236}">
-                <a16:creationId xmlns:a16="http://schemas.microsoft.com/office/drawing/2014/main" id="{3838D1F7-D9B7-1062-7B0E-106DAB3C1104}"/>
-              </a:ext>
-            </a:extLst>
-          </p:cNvPr>
-          <p:cNvSpPr>
-            <a:spLocks noGrp="1"/>
-          </p:cNvSpPr>
-          <p:nvPr>
-            <p:ph type="title"/>
-          </p:nvPr>
-        </p:nvSpPr>
-        <p:spPr>
-          <a:xfrm>
-            <a:off x="838200" y="365126"/>
-            <a:ext cx="10515600" cy="947308"/>
-          </a:xfrm>
-        </p:spPr>
-        <p:txBody>
-          <a:bodyPr/>
-          <a:lstStyle/>
-          <a:p>
-            <a:pPr algn="ctr"/>
-            <a:r>
-              <a:rPr lang="en-US" dirty="0">
-                <a:latin typeface="Aharoni" panose="02010803020104030203" pitchFamily="2" charset="-79"/>
-                <a:cs typeface="Aharoni" panose="02010803020104030203" pitchFamily="2" charset="-79"/>
-              </a:rPr>
-              <a:t>Scatter Plot with a Line</a:t>
-            </a:r>
-          </a:p>
-        </p:txBody>
-      </p:sp>
-      <p:pic>
-        <p:nvPicPr>
-          <p:cNvPr id="6" name="Content Placeholder 5">
-            <a:extLst>
-              <a:ext uri="{FF2B5EF4-FFF2-40B4-BE49-F238E27FC236}">
-                <a16:creationId xmlns:a16="http://schemas.microsoft.com/office/drawing/2014/main" id="{876249B0-1A08-3016-4E61-E45086529CDF}"/>
-              </a:ext>
-            </a:extLst>
-          </p:cNvPr>
-          <p:cNvPicPr>
-            <a:picLocks noGrp="1" noChangeAspect="1"/>
-          </p:cNvPicPr>
-          <p:nvPr>
-            <p:ph idx="1"/>
-          </p:nvPr>
-        </p:nvPicPr>
-        <p:blipFill>
-          <a:blip r:embed="rId2"/>
-          <a:stretch>
-            <a:fillRect/>
-          </a:stretch>
-        </p:blipFill>
-        <p:spPr>
-          <a:xfrm>
-            <a:off x="838200" y="1312434"/>
-            <a:ext cx="10520813" cy="1825039"/>
-          </a:xfrm>
-          <a:prstGeom prst="rect">
-            <a:avLst/>
-          </a:prstGeom>
-        </p:spPr>
-      </p:pic>
-      <p:cxnSp>
-        <p:nvCxnSpPr>
-          <p:cNvPr id="5" name="Straight Connector 4">
-            <a:extLst>
-              <a:ext uri="{FF2B5EF4-FFF2-40B4-BE49-F238E27FC236}">
-                <a16:creationId xmlns:a16="http://schemas.microsoft.com/office/drawing/2014/main" id="{43364DEE-CC1C-DA48-483B-37A50A6CD30B}"/>
-              </a:ext>
-            </a:extLst>
-          </p:cNvPr>
-          <p:cNvCxnSpPr/>
-          <p:nvPr/>
-        </p:nvCxnSpPr>
-        <p:spPr>
-          <a:xfrm>
-            <a:off x="838200" y="1161826"/>
-            <a:ext cx="10515600" cy="0"/>
-          </a:xfrm>
-          <a:prstGeom prst="line">
-            <a:avLst/>
-          </a:prstGeom>
-          <a:ln>
-            <a:solidFill>
-              <a:srgbClr val="C00000"/>
-            </a:solidFill>
-          </a:ln>
-        </p:spPr>
-        <p:style>
-          <a:lnRef idx="2">
-            <a:schemeClr val="accent1"/>
-          </a:lnRef>
-          <a:fillRef idx="0">
-            <a:schemeClr val="accent1"/>
-          </a:fillRef>
-          <a:effectRef idx="1">
-            <a:schemeClr val="accent1"/>
-          </a:effectRef>
-          <a:fontRef idx="minor">
-            <a:schemeClr val="tx1"/>
-          </a:fontRef>
-        </p:style>
-      </p:cxnSp>
-      <p:pic>
-        <p:nvPicPr>
-          <p:cNvPr id="8" name="Picture 7">
-            <a:extLst>
-              <a:ext uri="{FF2B5EF4-FFF2-40B4-BE49-F238E27FC236}">
-                <a16:creationId xmlns:a16="http://schemas.microsoft.com/office/drawing/2014/main" id="{83D2766F-B18C-5EEF-4C8D-41CB5314B8F5}"/>
-              </a:ext>
-            </a:extLst>
-          </p:cNvPr>
-          <p:cNvPicPr>
-            <a:picLocks noChangeAspect="1"/>
-          </p:cNvPicPr>
-          <p:nvPr/>
-        </p:nvPicPr>
-        <p:blipFill>
-          <a:blip r:embed="rId3"/>
-          <a:stretch>
-            <a:fillRect/>
-          </a:stretch>
-        </p:blipFill>
-        <p:spPr>
-          <a:xfrm>
-            <a:off x="7982174" y="3249358"/>
-            <a:ext cx="3818964" cy="3418589"/>
-          </a:xfrm>
-          <a:prstGeom prst="rect">
-            <a:avLst/>
-          </a:prstGeom>
-        </p:spPr>
-      </p:pic>
-      <p:sp>
-        <p:nvSpPr>
-          <p:cNvPr id="9" name="TextBox 8">
-            <a:extLst>
-              <a:ext uri="{FF2B5EF4-FFF2-40B4-BE49-F238E27FC236}">
-                <a16:creationId xmlns:a16="http://schemas.microsoft.com/office/drawing/2014/main" id="{EC22492B-74E2-C07C-F781-340910E74C70}"/>
-              </a:ext>
-            </a:extLst>
-          </p:cNvPr>
-          <p:cNvSpPr txBox="1"/>
-          <p:nvPr/>
-        </p:nvSpPr>
-        <p:spPr>
-          <a:xfrm>
-            <a:off x="838200" y="3397362"/>
-            <a:ext cx="6852621" cy="1200329"/>
-          </a:xfrm>
-          <a:prstGeom prst="rect">
-            <a:avLst/>
-          </a:prstGeom>
-          <a:noFill/>
-        </p:spPr>
-        <p:txBody>
-          <a:bodyPr wrap="square" rtlCol="0">
-            <a:spAutoFit/>
-          </a:bodyPr>
-          <a:lstStyle/>
-          <a:p>
-            <a:pPr marL="285750" indent="-285750">
-              <a:buFont typeface="Arial" panose="020B0604020202020204" pitchFamily="34" charset="0"/>
-              <a:buChar char="•"/>
-            </a:pPr>
-            <a:r>
-              <a:rPr lang="en-US" sz="2400" dirty="0">
-                <a:latin typeface="Times New Roman" panose="02020603050405020304" pitchFamily="18" charset="0"/>
-                <a:cs typeface="Times New Roman" panose="02020603050405020304" pitchFamily="18" charset="0"/>
-              </a:rPr>
-              <a:t>You can make a scatter plot and then add a line on top to see the correlation between two variable.</a:t>
-            </a:r>
-          </a:p>
-          <a:p>
-            <a:pPr marL="285750" indent="-285750">
-              <a:buFont typeface="Arial" panose="020B0604020202020204" pitchFamily="34" charset="0"/>
-              <a:buChar char="•"/>
-            </a:pPr>
-            <a:r>
-              <a:rPr lang="en-US" sz="2400" dirty="0">
-                <a:latin typeface="Times New Roman" panose="02020603050405020304" pitchFamily="18" charset="0"/>
-                <a:cs typeface="Times New Roman" panose="02020603050405020304" pitchFamily="18" charset="0"/>
-              </a:rPr>
-              <a:t>Useful when you have two numeric variables.  </a:t>
-            </a:r>
-          </a:p>
-        </p:txBody>
-      </p:sp>
-    </p:spTree>
-    <p:extLst>
-      <p:ext uri="{BB962C8B-B14F-4D97-AF65-F5344CB8AC3E}">
-        <p14:creationId xmlns:p14="http://schemas.microsoft.com/office/powerpoint/2010/main" val="3128766542"/>
-      </p:ext>
-    </p:extLst>
-  </p:cSld>
-  <p:clrMapOvr>
-    <a:masterClrMapping/>
-  </p:clrMapOvr>
-</p:sld>
-</file>
-
-<file path=ppt/slides/slide16.xml><?xml version="1.0" encoding="utf-8"?>
-<p:sld xmlns:a="http://schemas.openxmlformats.org/drawingml/2006/main" xmlns:r="http://schemas.openxmlformats.org/officeDocument/2006/relationships" xmlns:p="http://schemas.openxmlformats.org/presentationml/2006/main">
-  <p:cSld>
-    <p:spTree>
-      <p:nvGrpSpPr>
-        <p:cNvPr id="1" name="">
-          <a:extLst>
-            <a:ext uri="{FF2B5EF4-FFF2-40B4-BE49-F238E27FC236}">
-              <a16:creationId xmlns:a16="http://schemas.microsoft.com/office/drawing/2014/main" id="{B1A64174-8800-2C44-DEB2-D050A3DFF196}"/>
-            </a:ext>
-          </a:extLst>
-        </p:cNvPr>
-        <p:cNvGrpSpPr/>
-        <p:nvPr/>
-      </p:nvGrpSpPr>
-      <p:grpSpPr>
-        <a:xfrm>
-          <a:off x="0" y="0"/>
-          <a:ext cx="0" cy="0"/>
-          <a:chOff x="0" y="0"/>
-          <a:chExt cx="0" cy="0"/>
-        </a:xfrm>
-      </p:grpSpPr>
-      <p:sp>
-        <p:nvSpPr>
-          <p:cNvPr id="2" name="Title 1">
-            <a:extLst>
-              <a:ext uri="{FF2B5EF4-FFF2-40B4-BE49-F238E27FC236}">
-                <a16:creationId xmlns:a16="http://schemas.microsoft.com/office/drawing/2014/main" id="{0AD83300-E94E-109B-C43C-AD22B316F7F0}"/>
-              </a:ext>
-            </a:extLst>
-          </p:cNvPr>
-          <p:cNvSpPr>
-            <a:spLocks noGrp="1"/>
-          </p:cNvSpPr>
-          <p:nvPr>
-            <p:ph type="title"/>
-          </p:nvPr>
-        </p:nvSpPr>
-        <p:spPr>
-          <a:xfrm>
-            <a:off x="838200" y="365126"/>
-            <a:ext cx="10515600" cy="947308"/>
-          </a:xfrm>
-        </p:spPr>
-        <p:txBody>
-          <a:bodyPr/>
-          <a:lstStyle/>
-          <a:p>
-            <a:pPr algn="ctr"/>
-            <a:r>
-              <a:rPr lang="en-US" dirty="0">
-                <a:latin typeface="Aharoni" panose="02010803020104030203" pitchFamily="2" charset="-79"/>
-                <a:cs typeface="Aharoni" panose="02010803020104030203" pitchFamily="2" charset="-79"/>
-              </a:rPr>
-              <a:t>Histograms</a:t>
-            </a:r>
-          </a:p>
-        </p:txBody>
-      </p:sp>
-      <p:pic>
-        <p:nvPicPr>
-          <p:cNvPr id="6" name="Content Placeholder 5">
-            <a:extLst>
-              <a:ext uri="{FF2B5EF4-FFF2-40B4-BE49-F238E27FC236}">
-                <a16:creationId xmlns:a16="http://schemas.microsoft.com/office/drawing/2014/main" id="{53BD81E9-AB9A-170C-9D1D-9EDD376DCFFF}"/>
-              </a:ext>
-            </a:extLst>
-          </p:cNvPr>
-          <p:cNvPicPr>
-            <a:picLocks noGrp="1" noChangeAspect="1"/>
-          </p:cNvPicPr>
-          <p:nvPr>
-            <p:ph idx="1"/>
-          </p:nvPr>
-        </p:nvPicPr>
-        <p:blipFill>
-          <a:blip r:embed="rId2"/>
-          <a:stretch>
-            <a:fillRect/>
-          </a:stretch>
-        </p:blipFill>
-        <p:spPr>
-          <a:xfrm>
-            <a:off x="838200" y="1219373"/>
-            <a:ext cx="10515600" cy="1588294"/>
-          </a:xfrm>
-          <a:prstGeom prst="rect">
-            <a:avLst/>
-          </a:prstGeom>
-        </p:spPr>
-      </p:pic>
-      <p:cxnSp>
-        <p:nvCxnSpPr>
-          <p:cNvPr id="5" name="Straight Connector 4">
-            <a:extLst>
-              <a:ext uri="{FF2B5EF4-FFF2-40B4-BE49-F238E27FC236}">
-                <a16:creationId xmlns:a16="http://schemas.microsoft.com/office/drawing/2014/main" id="{35827D49-DD0C-7F83-37B3-A54AE24A237C}"/>
-              </a:ext>
-            </a:extLst>
-          </p:cNvPr>
-          <p:cNvCxnSpPr/>
-          <p:nvPr/>
-        </p:nvCxnSpPr>
-        <p:spPr>
-          <a:xfrm>
-            <a:off x="838200" y="1161826"/>
-            <a:ext cx="10515600" cy="0"/>
-          </a:xfrm>
-          <a:prstGeom prst="line">
-            <a:avLst/>
-          </a:prstGeom>
-          <a:ln>
-            <a:solidFill>
-              <a:srgbClr val="C00000"/>
-            </a:solidFill>
-          </a:ln>
-        </p:spPr>
-        <p:style>
-          <a:lnRef idx="2">
-            <a:schemeClr val="accent1"/>
-          </a:lnRef>
-          <a:fillRef idx="0">
-            <a:schemeClr val="accent1"/>
-          </a:fillRef>
-          <a:effectRef idx="1">
-            <a:schemeClr val="accent1"/>
-          </a:effectRef>
-          <a:fontRef idx="minor">
-            <a:schemeClr val="tx1"/>
-          </a:fontRef>
-        </p:style>
-      </p:cxnSp>
-      <p:pic>
-        <p:nvPicPr>
-          <p:cNvPr id="8" name="Picture 7">
-            <a:extLst>
-              <a:ext uri="{FF2B5EF4-FFF2-40B4-BE49-F238E27FC236}">
-                <a16:creationId xmlns:a16="http://schemas.microsoft.com/office/drawing/2014/main" id="{D7DAF39D-364D-9ED5-CF6D-0C3B7471F887}"/>
-              </a:ext>
-            </a:extLst>
-          </p:cNvPr>
-          <p:cNvPicPr>
-            <a:picLocks noChangeAspect="1"/>
-          </p:cNvPicPr>
-          <p:nvPr/>
-        </p:nvPicPr>
-        <p:blipFill>
-          <a:blip r:embed="rId3"/>
-          <a:stretch>
-            <a:fillRect/>
-          </a:stretch>
-        </p:blipFill>
-        <p:spPr>
-          <a:xfrm>
-            <a:off x="7379746" y="2955223"/>
-            <a:ext cx="4226185" cy="3773685"/>
-          </a:xfrm>
-          <a:prstGeom prst="rect">
-            <a:avLst/>
-          </a:prstGeom>
-        </p:spPr>
-      </p:pic>
-      <p:sp>
-        <p:nvSpPr>
-          <p:cNvPr id="11" name="TextBox 10">
-            <a:extLst>
-              <a:ext uri="{FF2B5EF4-FFF2-40B4-BE49-F238E27FC236}">
-                <a16:creationId xmlns:a16="http://schemas.microsoft.com/office/drawing/2014/main" id="{F2938BE4-C7A9-267E-7096-C92353704447}"/>
-              </a:ext>
-            </a:extLst>
-          </p:cNvPr>
-          <p:cNvSpPr txBox="1"/>
-          <p:nvPr/>
-        </p:nvSpPr>
-        <p:spPr>
-          <a:xfrm>
-            <a:off x="586069" y="3013501"/>
-            <a:ext cx="6852621" cy="1200329"/>
-          </a:xfrm>
-          <a:prstGeom prst="rect">
-            <a:avLst/>
-          </a:prstGeom>
-          <a:noFill/>
-        </p:spPr>
-        <p:txBody>
-          <a:bodyPr wrap="square" rtlCol="0">
-            <a:spAutoFit/>
-          </a:bodyPr>
-          <a:lstStyle/>
-          <a:p>
-            <a:pPr marL="285750" indent="-285750">
-              <a:buFont typeface="Arial" panose="020B0604020202020204" pitchFamily="34" charset="0"/>
-              <a:buChar char="•"/>
-            </a:pPr>
-            <a:r>
-              <a:rPr lang="en-US" sz="2400" dirty="0">
-                <a:latin typeface="Times New Roman" panose="02020603050405020304" pitchFamily="18" charset="0"/>
-                <a:cs typeface="Times New Roman" panose="02020603050405020304" pitchFamily="18" charset="0"/>
-              </a:rPr>
-              <a:t>Great for seeing the distribution of a variable. </a:t>
-            </a:r>
-          </a:p>
-          <a:p>
-            <a:pPr marL="285750" indent="-285750">
-              <a:buFont typeface="Arial" panose="020B0604020202020204" pitchFamily="34" charset="0"/>
-              <a:buChar char="•"/>
-            </a:pPr>
-            <a:r>
-              <a:rPr lang="en-US" sz="2400" dirty="0">
-                <a:latin typeface="Times New Roman" panose="02020603050405020304" pitchFamily="18" charset="0"/>
-                <a:cs typeface="Times New Roman" panose="02020603050405020304" pitchFamily="18" charset="0"/>
-              </a:rPr>
-              <a:t>Can also use base R </a:t>
-            </a:r>
-            <a:r>
-              <a:rPr lang="en-US" sz="2400" dirty="0">
-                <a:latin typeface="Courier New" panose="02070309020205020404" pitchFamily="49" charset="0"/>
-                <a:cs typeface="Courier New" panose="02070309020205020404" pitchFamily="49" charset="0"/>
-              </a:rPr>
-              <a:t>hist() </a:t>
-            </a:r>
-            <a:r>
-              <a:rPr lang="en-US" sz="2400" dirty="0">
-                <a:latin typeface="Times New Roman" panose="02020603050405020304" pitchFamily="18" charset="0"/>
-                <a:cs typeface="Times New Roman" panose="02020603050405020304" pitchFamily="18" charset="0"/>
-              </a:rPr>
-              <a:t>if you want to quickly look and don’t care about the look. </a:t>
-            </a:r>
-          </a:p>
-        </p:txBody>
-      </p:sp>
-      <p:pic>
-        <p:nvPicPr>
-          <p:cNvPr id="13" name="Picture 12">
-            <a:extLst>
-              <a:ext uri="{FF2B5EF4-FFF2-40B4-BE49-F238E27FC236}">
-                <a16:creationId xmlns:a16="http://schemas.microsoft.com/office/drawing/2014/main" id="{5A1BA04B-B443-C686-6A8B-B6250CD974EC}"/>
-              </a:ext>
-            </a:extLst>
-          </p:cNvPr>
-          <p:cNvPicPr>
-            <a:picLocks noChangeAspect="1"/>
-          </p:cNvPicPr>
-          <p:nvPr/>
-        </p:nvPicPr>
-        <p:blipFill>
-          <a:blip r:embed="rId4"/>
-          <a:srcRect t="-1" r="25922" b="-960"/>
-          <a:stretch>
-            <a:fillRect/>
-          </a:stretch>
-        </p:blipFill>
-        <p:spPr>
-          <a:xfrm>
-            <a:off x="838200" y="4240211"/>
-            <a:ext cx="5610336" cy="358906"/>
-          </a:xfrm>
-          <a:prstGeom prst="rect">
-            <a:avLst/>
-          </a:prstGeom>
-        </p:spPr>
-      </p:pic>
-    </p:spTree>
-    <p:extLst>
-      <p:ext uri="{BB962C8B-B14F-4D97-AF65-F5344CB8AC3E}">
-        <p14:creationId xmlns:p14="http://schemas.microsoft.com/office/powerpoint/2010/main" val="867222241"/>
-      </p:ext>
-    </p:extLst>
-  </p:cSld>
-  <p:clrMapOvr>
-    <a:masterClrMapping/>
-  </p:clrMapOvr>
-</p:sld>
-</file>
-
-<file path=ppt/slides/slide17.xml><?xml version="1.0" encoding="utf-8"?>
-<p:sld xmlns:a="http://schemas.openxmlformats.org/drawingml/2006/main" xmlns:r="http://schemas.openxmlformats.org/officeDocument/2006/relationships" xmlns:p="http://schemas.openxmlformats.org/presentationml/2006/main">
-  <p:cSld>
-    <p:spTree>
-      <p:nvGrpSpPr>
-        <p:cNvPr id="1" name="">
-          <a:extLst>
-            <a:ext uri="{FF2B5EF4-FFF2-40B4-BE49-F238E27FC236}">
-              <a16:creationId xmlns:a16="http://schemas.microsoft.com/office/drawing/2014/main" id="{0A82A265-29BA-C710-7055-BE7DF6143F60}"/>
-            </a:ext>
-          </a:extLst>
-        </p:cNvPr>
-        <p:cNvGrpSpPr/>
-        <p:nvPr/>
-      </p:nvGrpSpPr>
-      <p:grpSpPr>
-        <a:xfrm>
-          <a:off x="0" y="0"/>
-          <a:ext cx="0" cy="0"/>
-          <a:chOff x="0" y="0"/>
-          <a:chExt cx="0" cy="0"/>
-        </a:xfrm>
-      </p:grpSpPr>
-      <p:sp>
-        <p:nvSpPr>
-          <p:cNvPr id="2" name="Title 1">
-            <a:extLst>
-              <a:ext uri="{FF2B5EF4-FFF2-40B4-BE49-F238E27FC236}">
-                <a16:creationId xmlns:a16="http://schemas.microsoft.com/office/drawing/2014/main" id="{A86B6973-6A0B-CA9A-2C5D-3D4171B7ECE2}"/>
-              </a:ext>
-            </a:extLst>
-          </p:cNvPr>
-          <p:cNvSpPr>
-            <a:spLocks noGrp="1"/>
-          </p:cNvSpPr>
-          <p:nvPr>
-            <p:ph type="title"/>
-          </p:nvPr>
-        </p:nvSpPr>
-        <p:spPr>
-          <a:xfrm>
-            <a:off x="838200" y="365126"/>
-            <a:ext cx="10515600" cy="947308"/>
-          </a:xfrm>
-        </p:spPr>
-        <p:txBody>
-          <a:bodyPr/>
-          <a:lstStyle/>
-          <a:p>
-            <a:pPr algn="ctr"/>
-            <a:r>
-              <a:rPr lang="en-US" dirty="0">
-                <a:latin typeface="Aharoni" panose="02010803020104030203" pitchFamily="2" charset="-79"/>
-                <a:cs typeface="Aharoni" panose="02010803020104030203" pitchFamily="2" charset="-79"/>
-              </a:rPr>
-              <a:t>Density Plots</a:t>
-            </a:r>
-          </a:p>
-        </p:txBody>
-      </p:sp>
-      <p:pic>
-        <p:nvPicPr>
-          <p:cNvPr id="6" name="Content Placeholder 5">
-            <a:extLst>
-              <a:ext uri="{FF2B5EF4-FFF2-40B4-BE49-F238E27FC236}">
-                <a16:creationId xmlns:a16="http://schemas.microsoft.com/office/drawing/2014/main" id="{F86F227A-62BE-CB0D-FF42-8B3EDA4B9461}"/>
-              </a:ext>
-            </a:extLst>
-          </p:cNvPr>
-          <p:cNvPicPr>
-            <a:picLocks noGrp="1" noChangeAspect="1"/>
-          </p:cNvPicPr>
-          <p:nvPr>
-            <p:ph idx="1"/>
-          </p:nvPr>
-        </p:nvPicPr>
-        <p:blipFill>
-          <a:blip r:embed="rId2"/>
-          <a:stretch>
-            <a:fillRect/>
-          </a:stretch>
-        </p:blipFill>
-        <p:spPr>
-          <a:xfrm>
-            <a:off x="838199" y="1312433"/>
-            <a:ext cx="10495023" cy="1151067"/>
-          </a:xfrm>
-          <a:prstGeom prst="rect">
-            <a:avLst/>
-          </a:prstGeom>
-        </p:spPr>
-      </p:pic>
-      <p:cxnSp>
-        <p:nvCxnSpPr>
-          <p:cNvPr id="5" name="Straight Connector 4">
-            <a:extLst>
-              <a:ext uri="{FF2B5EF4-FFF2-40B4-BE49-F238E27FC236}">
-                <a16:creationId xmlns:a16="http://schemas.microsoft.com/office/drawing/2014/main" id="{29BBF4BA-B45D-4ACA-3B0D-EC9BC33BC3B5}"/>
-              </a:ext>
-            </a:extLst>
-          </p:cNvPr>
-          <p:cNvCxnSpPr/>
-          <p:nvPr/>
-        </p:nvCxnSpPr>
-        <p:spPr>
-          <a:xfrm>
-            <a:off x="838200" y="1161826"/>
-            <a:ext cx="10515600" cy="0"/>
-          </a:xfrm>
-          <a:prstGeom prst="line">
-            <a:avLst/>
-          </a:prstGeom>
-          <a:ln>
-            <a:solidFill>
-              <a:srgbClr val="C00000"/>
-            </a:solidFill>
-          </a:ln>
-        </p:spPr>
-        <p:style>
-          <a:lnRef idx="2">
-            <a:schemeClr val="accent1"/>
-          </a:lnRef>
-          <a:fillRef idx="0">
-            <a:schemeClr val="accent1"/>
-          </a:fillRef>
-          <a:effectRef idx="1">
-            <a:schemeClr val="accent1"/>
-          </a:effectRef>
-          <a:fontRef idx="minor">
-            <a:schemeClr val="tx1"/>
-          </a:fontRef>
-        </p:style>
-      </p:cxnSp>
-      <p:pic>
-        <p:nvPicPr>
-          <p:cNvPr id="8" name="Picture 7">
-            <a:extLst>
-              <a:ext uri="{FF2B5EF4-FFF2-40B4-BE49-F238E27FC236}">
-                <a16:creationId xmlns:a16="http://schemas.microsoft.com/office/drawing/2014/main" id="{0E0A7BFC-4E16-EE69-6AAE-FABFC7DE618B}"/>
-              </a:ext>
-            </a:extLst>
-          </p:cNvPr>
-          <p:cNvPicPr>
-            <a:picLocks noChangeAspect="1"/>
-          </p:cNvPicPr>
-          <p:nvPr/>
-        </p:nvPicPr>
-        <p:blipFill>
-          <a:blip r:embed="rId3"/>
-          <a:stretch>
-            <a:fillRect/>
-          </a:stretch>
-        </p:blipFill>
-        <p:spPr>
-          <a:xfrm>
-            <a:off x="7406064" y="2614106"/>
-            <a:ext cx="4545163" cy="4067691"/>
-          </a:xfrm>
-          <a:prstGeom prst="rect">
-            <a:avLst/>
-          </a:prstGeom>
-        </p:spPr>
-      </p:pic>
-      <p:sp>
-        <p:nvSpPr>
-          <p:cNvPr id="9" name="TextBox 8">
-            <a:extLst>
-              <a:ext uri="{FF2B5EF4-FFF2-40B4-BE49-F238E27FC236}">
-                <a16:creationId xmlns:a16="http://schemas.microsoft.com/office/drawing/2014/main" id="{0CA8837D-9E7A-AEC6-76DF-BD49AB595E93}"/>
-              </a:ext>
-            </a:extLst>
-          </p:cNvPr>
-          <p:cNvSpPr txBox="1"/>
-          <p:nvPr/>
-        </p:nvSpPr>
-        <p:spPr>
-          <a:xfrm>
-            <a:off x="553443" y="2764713"/>
-            <a:ext cx="6852621" cy="461665"/>
-          </a:xfrm>
-          <a:prstGeom prst="rect">
-            <a:avLst/>
-          </a:prstGeom>
-          <a:noFill/>
-        </p:spPr>
-        <p:txBody>
-          <a:bodyPr wrap="square" rtlCol="0">
-            <a:spAutoFit/>
-          </a:bodyPr>
-          <a:lstStyle/>
-          <a:p>
-            <a:pPr marL="285750" indent="-285750">
-              <a:buFont typeface="Arial" panose="020B0604020202020204" pitchFamily="34" charset="0"/>
-              <a:buChar char="•"/>
-            </a:pPr>
-            <a:r>
-              <a:rPr lang="en-US" sz="2400" dirty="0">
-                <a:latin typeface="Times New Roman" panose="02020603050405020304" pitchFamily="18" charset="0"/>
-                <a:cs typeface="Times New Roman" panose="02020603050405020304" pitchFamily="18" charset="0"/>
-              </a:rPr>
-              <a:t>Another way to see a variable distribution. </a:t>
-            </a:r>
-          </a:p>
-        </p:txBody>
-      </p:sp>
-    </p:spTree>
-    <p:extLst>
-      <p:ext uri="{BB962C8B-B14F-4D97-AF65-F5344CB8AC3E}">
-        <p14:creationId xmlns:p14="http://schemas.microsoft.com/office/powerpoint/2010/main" val="1648967674"/>
-      </p:ext>
-    </p:extLst>
-  </p:cSld>
-  <p:clrMapOvr>
-    <a:masterClrMapping/>
-  </p:clrMapOvr>
-</p:sld>
-</file>
-
-<file path=ppt/slides/slide18.xml><?xml version="1.0" encoding="utf-8"?>
-<p:sld xmlns:a="http://schemas.openxmlformats.org/drawingml/2006/main" xmlns:r="http://schemas.openxmlformats.org/officeDocument/2006/relationships" xmlns:p="http://schemas.openxmlformats.org/presentationml/2006/main">
-  <p:cSld>
-    <p:spTree>
-      <p:nvGrpSpPr>
-        <p:cNvPr id="1" name="">
-          <a:extLst>
-            <a:ext uri="{FF2B5EF4-FFF2-40B4-BE49-F238E27FC236}">
-              <a16:creationId xmlns:a16="http://schemas.microsoft.com/office/drawing/2014/main" id="{B20FD1F3-9B2C-8B19-E73A-F60F06F4EE4C}"/>
-            </a:ext>
-          </a:extLst>
-        </p:cNvPr>
-        <p:cNvGrpSpPr/>
-        <p:nvPr/>
-      </p:nvGrpSpPr>
-      <p:grpSpPr>
-        <a:xfrm>
-          <a:off x="0" y="0"/>
-          <a:ext cx="0" cy="0"/>
-          <a:chOff x="0" y="0"/>
-          <a:chExt cx="0" cy="0"/>
-        </a:xfrm>
-      </p:grpSpPr>
-      <p:sp>
-        <p:nvSpPr>
-          <p:cNvPr id="2" name="Title 1">
-            <a:extLst>
-              <a:ext uri="{FF2B5EF4-FFF2-40B4-BE49-F238E27FC236}">
-                <a16:creationId xmlns:a16="http://schemas.microsoft.com/office/drawing/2014/main" id="{5FA929B9-2EB3-23FC-8481-17F00E0055FF}"/>
-              </a:ext>
-            </a:extLst>
-          </p:cNvPr>
-          <p:cNvSpPr>
-            <a:spLocks noGrp="1"/>
-          </p:cNvSpPr>
-          <p:nvPr>
-            <p:ph type="title"/>
-          </p:nvPr>
-        </p:nvSpPr>
-        <p:spPr>
-          <a:xfrm>
-            <a:off x="838200" y="365126"/>
-            <a:ext cx="10515600" cy="947308"/>
-          </a:xfrm>
-        </p:spPr>
-        <p:txBody>
-          <a:bodyPr/>
-          <a:lstStyle/>
-          <a:p>
-            <a:pPr algn="ctr"/>
-            <a:r>
-              <a:rPr lang="en-US" dirty="0">
-                <a:latin typeface="Aharoni" panose="02010803020104030203" pitchFamily="2" charset="-79"/>
-                <a:cs typeface="Aharoni" panose="02010803020104030203" pitchFamily="2" charset="-79"/>
-              </a:rPr>
-              <a:t>Bar Plots</a:t>
-            </a:r>
-          </a:p>
-        </p:txBody>
-      </p:sp>
-      <p:pic>
-        <p:nvPicPr>
-          <p:cNvPr id="6" name="Content Placeholder 5">
-            <a:extLst>
-              <a:ext uri="{FF2B5EF4-FFF2-40B4-BE49-F238E27FC236}">
-                <a16:creationId xmlns:a16="http://schemas.microsoft.com/office/drawing/2014/main" id="{E708DCFD-450A-7083-9BA1-D421EC0CDFB6}"/>
-              </a:ext>
-            </a:extLst>
-          </p:cNvPr>
-          <p:cNvPicPr>
-            <a:picLocks noGrp="1" noChangeAspect="1"/>
-          </p:cNvPicPr>
-          <p:nvPr>
-            <p:ph idx="1"/>
-          </p:nvPr>
-        </p:nvPicPr>
-        <p:blipFill>
-          <a:blip r:embed="rId2"/>
-          <a:stretch>
-            <a:fillRect/>
-          </a:stretch>
-        </p:blipFill>
-        <p:spPr>
-          <a:xfrm>
-            <a:off x="838200" y="1312434"/>
-            <a:ext cx="10515600" cy="1455588"/>
-          </a:xfrm>
-          <a:prstGeom prst="rect">
-            <a:avLst/>
-          </a:prstGeom>
-        </p:spPr>
-      </p:pic>
-      <p:cxnSp>
-        <p:nvCxnSpPr>
-          <p:cNvPr id="5" name="Straight Connector 4">
-            <a:extLst>
-              <a:ext uri="{FF2B5EF4-FFF2-40B4-BE49-F238E27FC236}">
-                <a16:creationId xmlns:a16="http://schemas.microsoft.com/office/drawing/2014/main" id="{E4AE87C1-AD5B-A160-CC91-2726B5169156}"/>
-              </a:ext>
-            </a:extLst>
-          </p:cNvPr>
-          <p:cNvCxnSpPr/>
-          <p:nvPr/>
-        </p:nvCxnSpPr>
-        <p:spPr>
-          <a:xfrm>
-            <a:off x="838200" y="1161826"/>
-            <a:ext cx="10515600" cy="0"/>
-          </a:xfrm>
-          <a:prstGeom prst="line">
-            <a:avLst/>
-          </a:prstGeom>
-          <a:ln>
-            <a:solidFill>
-              <a:srgbClr val="C00000"/>
-            </a:solidFill>
-          </a:ln>
-        </p:spPr>
-        <p:style>
-          <a:lnRef idx="2">
-            <a:schemeClr val="accent1"/>
-          </a:lnRef>
-          <a:fillRef idx="0">
-            <a:schemeClr val="accent1"/>
-          </a:fillRef>
-          <a:effectRef idx="1">
-            <a:schemeClr val="accent1"/>
-          </a:effectRef>
-          <a:fontRef idx="minor">
-            <a:schemeClr val="tx1"/>
-          </a:fontRef>
-        </p:style>
-      </p:cxnSp>
-      <p:pic>
-        <p:nvPicPr>
-          <p:cNvPr id="8" name="Picture 7">
-            <a:extLst>
-              <a:ext uri="{FF2B5EF4-FFF2-40B4-BE49-F238E27FC236}">
-                <a16:creationId xmlns:a16="http://schemas.microsoft.com/office/drawing/2014/main" id="{5B63118E-B2A6-68D0-5A36-9FC571E66F34}"/>
-              </a:ext>
-            </a:extLst>
-          </p:cNvPr>
-          <p:cNvPicPr>
-            <a:picLocks noChangeAspect="1"/>
-          </p:cNvPicPr>
-          <p:nvPr/>
-        </p:nvPicPr>
-        <p:blipFill>
-          <a:blip r:embed="rId3"/>
-          <a:stretch>
-            <a:fillRect/>
-          </a:stretch>
-        </p:blipFill>
-        <p:spPr>
-          <a:xfrm>
-            <a:off x="7390502" y="2981691"/>
-            <a:ext cx="4313817" cy="3876310"/>
-          </a:xfrm>
-          <a:prstGeom prst="rect">
-            <a:avLst/>
-          </a:prstGeom>
-        </p:spPr>
-      </p:pic>
-      <p:sp>
-        <p:nvSpPr>
-          <p:cNvPr id="10" name="TextBox 9">
-            <a:extLst>
-              <a:ext uri="{FF2B5EF4-FFF2-40B4-BE49-F238E27FC236}">
-                <a16:creationId xmlns:a16="http://schemas.microsoft.com/office/drawing/2014/main" id="{F770034C-A839-CF1E-E216-87C479433296}"/>
-              </a:ext>
-            </a:extLst>
-          </p:cNvPr>
-          <p:cNvSpPr txBox="1"/>
-          <p:nvPr/>
-        </p:nvSpPr>
-        <p:spPr>
-          <a:xfrm>
-            <a:off x="639504" y="2967335"/>
-            <a:ext cx="6852621" cy="830997"/>
-          </a:xfrm>
-          <a:prstGeom prst="rect">
-            <a:avLst/>
-          </a:prstGeom>
-          <a:noFill/>
-        </p:spPr>
-        <p:txBody>
-          <a:bodyPr wrap="square" rtlCol="0">
-            <a:spAutoFit/>
-          </a:bodyPr>
-          <a:lstStyle/>
-          <a:p>
-            <a:pPr marL="285750" indent="-285750">
-              <a:buFont typeface="Arial" panose="020B0604020202020204" pitchFamily="34" charset="0"/>
-              <a:buChar char="•"/>
-            </a:pPr>
-            <a:r>
-              <a:rPr lang="en-US" sz="2400" dirty="0">
-                <a:latin typeface="Times New Roman" panose="02020603050405020304" pitchFamily="18" charset="0"/>
-                <a:cs typeface="Times New Roman" panose="02020603050405020304" pitchFamily="18" charset="0"/>
-              </a:rPr>
-              <a:t>Useful when you have one categorical and one numeric variable. </a:t>
-            </a:r>
-          </a:p>
-        </p:txBody>
-      </p:sp>
-    </p:spTree>
-    <p:extLst>
-      <p:ext uri="{BB962C8B-B14F-4D97-AF65-F5344CB8AC3E}">
-        <p14:creationId xmlns:p14="http://schemas.microsoft.com/office/powerpoint/2010/main" val="3155683692"/>
-      </p:ext>
-    </p:extLst>
-  </p:cSld>
-  <p:clrMapOvr>
-    <a:masterClrMapping/>
-  </p:clrMapOvr>
-</p:sld>
-</file>
-
-<file path=ppt/slides/slide19.xml><?xml version="1.0" encoding="utf-8"?>
-<p:sld xmlns:a="http://schemas.openxmlformats.org/drawingml/2006/main" xmlns:r="http://schemas.openxmlformats.org/officeDocument/2006/relationships" xmlns:p="http://schemas.openxmlformats.org/presentationml/2006/main">
-  <p:cSld>
-    <p:spTree>
-      <p:nvGrpSpPr>
-        <p:cNvPr id="1" name="">
-          <a:extLst>
-            <a:ext uri="{FF2B5EF4-FFF2-40B4-BE49-F238E27FC236}">
-              <a16:creationId xmlns:a16="http://schemas.microsoft.com/office/drawing/2014/main" id="{F9262315-CCF5-1E7D-E2F8-65C88965151D}"/>
-            </a:ext>
-          </a:extLst>
-        </p:cNvPr>
-        <p:cNvGrpSpPr/>
-        <p:nvPr/>
-      </p:nvGrpSpPr>
-      <p:grpSpPr>
-        <a:xfrm>
-          <a:off x="0" y="0"/>
-          <a:ext cx="0" cy="0"/>
-          <a:chOff x="0" y="0"/>
-          <a:chExt cx="0" cy="0"/>
-        </a:xfrm>
-      </p:grpSpPr>
-      <p:sp>
-        <p:nvSpPr>
-          <p:cNvPr id="2" name="Title 1">
-            <a:extLst>
-              <a:ext uri="{FF2B5EF4-FFF2-40B4-BE49-F238E27FC236}">
-                <a16:creationId xmlns:a16="http://schemas.microsoft.com/office/drawing/2014/main" id="{B1F1E16A-CC25-C9B6-5283-5638773D7A69}"/>
-              </a:ext>
-            </a:extLst>
-          </p:cNvPr>
-          <p:cNvSpPr>
-            <a:spLocks noGrp="1"/>
-          </p:cNvSpPr>
-          <p:nvPr>
-            <p:ph type="title"/>
-          </p:nvPr>
-        </p:nvSpPr>
-        <p:spPr>
-          <a:xfrm>
-            <a:off x="838200" y="365126"/>
-            <a:ext cx="10515600" cy="947308"/>
-          </a:xfrm>
-        </p:spPr>
-        <p:txBody>
-          <a:bodyPr/>
-          <a:lstStyle/>
-          <a:p>
-            <a:pPr algn="ctr"/>
-            <a:r>
-              <a:rPr lang="en-US" dirty="0">
-                <a:latin typeface="Aharoni" panose="02010803020104030203" pitchFamily="2" charset="-79"/>
-                <a:cs typeface="Aharoni" panose="02010803020104030203" pitchFamily="2" charset="-79"/>
-              </a:rPr>
-              <a:t>Boxplots</a:t>
-            </a:r>
-          </a:p>
-        </p:txBody>
-      </p:sp>
-      <p:cxnSp>
-        <p:nvCxnSpPr>
-          <p:cNvPr id="5" name="Straight Connector 4">
-            <a:extLst>
-              <a:ext uri="{FF2B5EF4-FFF2-40B4-BE49-F238E27FC236}">
-                <a16:creationId xmlns:a16="http://schemas.microsoft.com/office/drawing/2014/main" id="{07AB8248-3001-AD9F-C7F0-666C67EDA3F0}"/>
-              </a:ext>
-            </a:extLst>
-          </p:cNvPr>
-          <p:cNvCxnSpPr/>
-          <p:nvPr/>
-        </p:nvCxnSpPr>
-        <p:spPr>
-          <a:xfrm>
-            <a:off x="838200" y="1161826"/>
-            <a:ext cx="10515600" cy="0"/>
-          </a:xfrm>
-          <a:prstGeom prst="line">
-            <a:avLst/>
-          </a:prstGeom>
-          <a:ln>
-            <a:solidFill>
-              <a:srgbClr val="C00000"/>
-            </a:solidFill>
-          </a:ln>
-        </p:spPr>
-        <p:style>
-          <a:lnRef idx="2">
-            <a:schemeClr val="accent1"/>
-          </a:lnRef>
-          <a:fillRef idx="0">
-            <a:schemeClr val="accent1"/>
-          </a:fillRef>
-          <a:effectRef idx="1">
-            <a:schemeClr val="accent1"/>
-          </a:effectRef>
-          <a:fontRef idx="minor">
-            <a:schemeClr val="tx1"/>
-          </a:fontRef>
-        </p:style>
-      </p:cxnSp>
-      <p:pic>
-        <p:nvPicPr>
-          <p:cNvPr id="13" name="Content Placeholder 12">
-            <a:extLst>
-              <a:ext uri="{FF2B5EF4-FFF2-40B4-BE49-F238E27FC236}">
-                <a16:creationId xmlns:a16="http://schemas.microsoft.com/office/drawing/2014/main" id="{5A140A48-A4B7-845B-85E1-87450F60DE4D}"/>
-              </a:ext>
-            </a:extLst>
-          </p:cNvPr>
-          <p:cNvPicPr>
-            <a:picLocks noGrp="1" noChangeAspect="1"/>
-          </p:cNvPicPr>
-          <p:nvPr>
-            <p:ph idx="1"/>
-          </p:nvPr>
-        </p:nvPicPr>
-        <p:blipFill>
-          <a:blip r:embed="rId2"/>
-          <a:stretch>
-            <a:fillRect/>
-          </a:stretch>
-        </p:blipFill>
-        <p:spPr>
-          <a:xfrm>
-            <a:off x="838200" y="1409150"/>
-            <a:ext cx="10515600" cy="903684"/>
-          </a:xfrm>
-          <a:prstGeom prst="rect">
-            <a:avLst/>
-          </a:prstGeom>
-        </p:spPr>
-      </p:pic>
-      <p:pic>
-        <p:nvPicPr>
-          <p:cNvPr id="15" name="Picture 14">
-            <a:extLst>
-              <a:ext uri="{FF2B5EF4-FFF2-40B4-BE49-F238E27FC236}">
-                <a16:creationId xmlns:a16="http://schemas.microsoft.com/office/drawing/2014/main" id="{B4E68BFA-BD96-07BB-A33E-6A6DC7A48704}"/>
-              </a:ext>
-            </a:extLst>
-          </p:cNvPr>
-          <p:cNvPicPr>
-            <a:picLocks noChangeAspect="1"/>
-          </p:cNvPicPr>
-          <p:nvPr/>
-        </p:nvPicPr>
-        <p:blipFill>
-          <a:blip r:embed="rId3"/>
-          <a:stretch>
-            <a:fillRect/>
-          </a:stretch>
-        </p:blipFill>
-        <p:spPr>
-          <a:xfrm>
-            <a:off x="6939504" y="2409550"/>
-            <a:ext cx="4414296" cy="3957645"/>
-          </a:xfrm>
-          <a:prstGeom prst="rect">
-            <a:avLst/>
-          </a:prstGeom>
-        </p:spPr>
-      </p:pic>
-      <p:sp>
-        <p:nvSpPr>
-          <p:cNvPr id="17" name="TextBox 16">
-            <a:extLst>
-              <a:ext uri="{FF2B5EF4-FFF2-40B4-BE49-F238E27FC236}">
-                <a16:creationId xmlns:a16="http://schemas.microsoft.com/office/drawing/2014/main" id="{D285F845-DF81-EF3D-187F-EA078EF9DB22}"/>
-              </a:ext>
-            </a:extLst>
-          </p:cNvPr>
-          <p:cNvSpPr txBox="1"/>
-          <p:nvPr/>
-        </p:nvSpPr>
-        <p:spPr>
-          <a:xfrm>
-            <a:off x="639505" y="2598003"/>
-            <a:ext cx="6482058" cy="1569660"/>
-          </a:xfrm>
-          <a:prstGeom prst="rect">
-            <a:avLst/>
-          </a:prstGeom>
-          <a:noFill/>
-        </p:spPr>
-        <p:txBody>
-          <a:bodyPr wrap="square" rtlCol="0">
-            <a:spAutoFit/>
-          </a:bodyPr>
-          <a:lstStyle/>
-          <a:p>
-            <a:pPr marL="285750" indent="-285750">
-              <a:buFont typeface="Arial" panose="020B0604020202020204" pitchFamily="34" charset="0"/>
-              <a:buChar char="•"/>
-            </a:pPr>
-            <a:r>
-              <a:rPr lang="en-US" sz="2400" dirty="0">
-                <a:latin typeface="Times New Roman" panose="02020603050405020304" pitchFamily="18" charset="0"/>
-                <a:cs typeface="Times New Roman" panose="02020603050405020304" pitchFamily="18" charset="0"/>
-              </a:rPr>
-              <a:t>Useful when you have one categorical and one numeric variable. </a:t>
-            </a:r>
-          </a:p>
-          <a:p>
-            <a:pPr marL="285750" indent="-285750">
-              <a:buFont typeface="Arial" panose="020B0604020202020204" pitchFamily="34" charset="0"/>
-              <a:buChar char="•"/>
-            </a:pPr>
-            <a:r>
-              <a:rPr lang="en-US" sz="2400" dirty="0">
-                <a:latin typeface="Times New Roman" panose="02020603050405020304" pitchFamily="18" charset="0"/>
-                <a:cs typeface="Times New Roman" panose="02020603050405020304" pitchFamily="18" charset="0"/>
-              </a:rPr>
-              <a:t>Shows you the max, min, mean, first quartile, and third quartile for each group. </a:t>
-            </a:r>
-          </a:p>
-        </p:txBody>
-      </p:sp>
-    </p:spTree>
-    <p:extLst>
-      <p:ext uri="{BB962C8B-B14F-4D97-AF65-F5344CB8AC3E}">
-        <p14:creationId xmlns:p14="http://schemas.microsoft.com/office/powerpoint/2010/main" val="1875679802"/>
       </p:ext>
     </p:extLst>
   </p:cSld>
@@ -7642,7 +7486,7 @@
                 <a:latin typeface="Times New Roman" panose="02020603050405020304" pitchFamily="18" charset="0"/>
                 <a:cs typeface="Times New Roman" panose="02020603050405020304" pitchFamily="18" charset="0"/>
               </a:rPr>
-              <a:t>Did anyone run into any issues? </a:t>
+              <a:t>Did anyone run into any issues or have any questions? </a:t>
             </a:r>
           </a:p>
           <a:p>
@@ -7715,6 +7559,1180 @@
         <p:cNvPr id="1" name="">
           <a:extLst>
             <a:ext uri="{FF2B5EF4-FFF2-40B4-BE49-F238E27FC236}">
+              <a16:creationId xmlns:a16="http://schemas.microsoft.com/office/drawing/2014/main" id="{F287173A-2521-81AE-ECFB-A762D03469A6}"/>
+            </a:ext>
+          </a:extLst>
+        </p:cNvPr>
+        <p:cNvGrpSpPr/>
+        <p:nvPr/>
+      </p:nvGrpSpPr>
+      <p:grpSpPr>
+        <a:xfrm>
+          <a:off x="0" y="0"/>
+          <a:ext cx="0" cy="0"/>
+          <a:chOff x="0" y="0"/>
+          <a:chExt cx="0" cy="0"/>
+        </a:xfrm>
+      </p:grpSpPr>
+      <p:sp>
+        <p:nvSpPr>
+          <p:cNvPr id="2" name="Title 1">
+            <a:extLst>
+              <a:ext uri="{FF2B5EF4-FFF2-40B4-BE49-F238E27FC236}">
+                <a16:creationId xmlns:a16="http://schemas.microsoft.com/office/drawing/2014/main" id="{3838D1F7-D9B7-1062-7B0E-106DAB3C1104}"/>
+              </a:ext>
+            </a:extLst>
+          </p:cNvPr>
+          <p:cNvSpPr>
+            <a:spLocks noGrp="1"/>
+          </p:cNvSpPr>
+          <p:nvPr>
+            <p:ph type="title"/>
+          </p:nvPr>
+        </p:nvSpPr>
+        <p:spPr>
+          <a:xfrm>
+            <a:off x="838200" y="365126"/>
+            <a:ext cx="10515600" cy="947308"/>
+          </a:xfrm>
+        </p:spPr>
+        <p:txBody>
+          <a:bodyPr/>
+          <a:lstStyle/>
+          <a:p>
+            <a:pPr algn="ctr"/>
+            <a:r>
+              <a:rPr lang="en-US" dirty="0">
+                <a:latin typeface="Aharoni" panose="02010803020104030203" pitchFamily="2" charset="-79"/>
+                <a:cs typeface="Aharoni" panose="02010803020104030203" pitchFamily="2" charset="-79"/>
+              </a:rPr>
+              <a:t>Scatter Plot with a Line</a:t>
+            </a:r>
+          </a:p>
+        </p:txBody>
+      </p:sp>
+      <p:pic>
+        <p:nvPicPr>
+          <p:cNvPr id="6" name="Content Placeholder 5">
+            <a:extLst>
+              <a:ext uri="{FF2B5EF4-FFF2-40B4-BE49-F238E27FC236}">
+                <a16:creationId xmlns:a16="http://schemas.microsoft.com/office/drawing/2014/main" id="{876249B0-1A08-3016-4E61-E45086529CDF}"/>
+              </a:ext>
+            </a:extLst>
+          </p:cNvPr>
+          <p:cNvPicPr>
+            <a:picLocks noGrp="1" noChangeAspect="1"/>
+          </p:cNvPicPr>
+          <p:nvPr>
+            <p:ph idx="1"/>
+          </p:nvPr>
+        </p:nvPicPr>
+        <p:blipFill>
+          <a:blip r:embed="rId2"/>
+          <a:stretch>
+            <a:fillRect/>
+          </a:stretch>
+        </p:blipFill>
+        <p:spPr>
+          <a:xfrm>
+            <a:off x="838200" y="1312434"/>
+            <a:ext cx="10520813" cy="1825039"/>
+          </a:xfrm>
+          <a:prstGeom prst="rect">
+            <a:avLst/>
+          </a:prstGeom>
+        </p:spPr>
+      </p:pic>
+      <p:cxnSp>
+        <p:nvCxnSpPr>
+          <p:cNvPr id="5" name="Straight Connector 4">
+            <a:extLst>
+              <a:ext uri="{FF2B5EF4-FFF2-40B4-BE49-F238E27FC236}">
+                <a16:creationId xmlns:a16="http://schemas.microsoft.com/office/drawing/2014/main" id="{43364DEE-CC1C-DA48-483B-37A50A6CD30B}"/>
+              </a:ext>
+            </a:extLst>
+          </p:cNvPr>
+          <p:cNvCxnSpPr/>
+          <p:nvPr/>
+        </p:nvCxnSpPr>
+        <p:spPr>
+          <a:xfrm>
+            <a:off x="838200" y="1161826"/>
+            <a:ext cx="10515600" cy="0"/>
+          </a:xfrm>
+          <a:prstGeom prst="line">
+            <a:avLst/>
+          </a:prstGeom>
+          <a:ln>
+            <a:solidFill>
+              <a:srgbClr val="C00000"/>
+            </a:solidFill>
+          </a:ln>
+        </p:spPr>
+        <p:style>
+          <a:lnRef idx="2">
+            <a:schemeClr val="accent1"/>
+          </a:lnRef>
+          <a:fillRef idx="0">
+            <a:schemeClr val="accent1"/>
+          </a:fillRef>
+          <a:effectRef idx="1">
+            <a:schemeClr val="accent1"/>
+          </a:effectRef>
+          <a:fontRef idx="minor">
+            <a:schemeClr val="tx1"/>
+          </a:fontRef>
+        </p:style>
+      </p:cxnSp>
+      <p:pic>
+        <p:nvPicPr>
+          <p:cNvPr id="8" name="Picture 7">
+            <a:extLst>
+              <a:ext uri="{FF2B5EF4-FFF2-40B4-BE49-F238E27FC236}">
+                <a16:creationId xmlns:a16="http://schemas.microsoft.com/office/drawing/2014/main" id="{83D2766F-B18C-5EEF-4C8D-41CB5314B8F5}"/>
+              </a:ext>
+            </a:extLst>
+          </p:cNvPr>
+          <p:cNvPicPr>
+            <a:picLocks noChangeAspect="1"/>
+          </p:cNvPicPr>
+          <p:nvPr/>
+        </p:nvPicPr>
+        <p:blipFill>
+          <a:blip r:embed="rId3"/>
+          <a:stretch>
+            <a:fillRect/>
+          </a:stretch>
+        </p:blipFill>
+        <p:spPr>
+          <a:xfrm>
+            <a:off x="7982174" y="3249358"/>
+            <a:ext cx="3818964" cy="3418589"/>
+          </a:xfrm>
+          <a:prstGeom prst="rect">
+            <a:avLst/>
+          </a:prstGeom>
+        </p:spPr>
+      </p:pic>
+      <p:sp>
+        <p:nvSpPr>
+          <p:cNvPr id="9" name="TextBox 8">
+            <a:extLst>
+              <a:ext uri="{FF2B5EF4-FFF2-40B4-BE49-F238E27FC236}">
+                <a16:creationId xmlns:a16="http://schemas.microsoft.com/office/drawing/2014/main" id="{EC22492B-74E2-C07C-F781-340910E74C70}"/>
+              </a:ext>
+            </a:extLst>
+          </p:cNvPr>
+          <p:cNvSpPr txBox="1"/>
+          <p:nvPr/>
+        </p:nvSpPr>
+        <p:spPr>
+          <a:xfrm>
+            <a:off x="838200" y="3397362"/>
+            <a:ext cx="6852621" cy="1200329"/>
+          </a:xfrm>
+          <a:prstGeom prst="rect">
+            <a:avLst/>
+          </a:prstGeom>
+          <a:noFill/>
+        </p:spPr>
+        <p:txBody>
+          <a:bodyPr wrap="square" rtlCol="0">
+            <a:spAutoFit/>
+          </a:bodyPr>
+          <a:lstStyle/>
+          <a:p>
+            <a:pPr marL="285750" indent="-285750">
+              <a:buFont typeface="Arial" panose="020B0604020202020204" pitchFamily="34" charset="0"/>
+              <a:buChar char="•"/>
+            </a:pPr>
+            <a:r>
+              <a:rPr lang="en-US" sz="2400" dirty="0">
+                <a:latin typeface="Times New Roman" panose="02020603050405020304" pitchFamily="18" charset="0"/>
+                <a:cs typeface="Times New Roman" panose="02020603050405020304" pitchFamily="18" charset="0"/>
+              </a:rPr>
+              <a:t>You can make a scatter plot and then add a line on top to see the correlation between two variable.</a:t>
+            </a:r>
+          </a:p>
+          <a:p>
+            <a:pPr marL="285750" indent="-285750">
+              <a:buFont typeface="Arial" panose="020B0604020202020204" pitchFamily="34" charset="0"/>
+              <a:buChar char="•"/>
+            </a:pPr>
+            <a:r>
+              <a:rPr lang="en-US" sz="2400" dirty="0">
+                <a:latin typeface="Times New Roman" panose="02020603050405020304" pitchFamily="18" charset="0"/>
+                <a:cs typeface="Times New Roman" panose="02020603050405020304" pitchFamily="18" charset="0"/>
+              </a:rPr>
+              <a:t>Useful when you have two numeric variables.  </a:t>
+            </a:r>
+          </a:p>
+        </p:txBody>
+      </p:sp>
+    </p:spTree>
+    <p:extLst>
+      <p:ext uri="{BB962C8B-B14F-4D97-AF65-F5344CB8AC3E}">
+        <p14:creationId xmlns:p14="http://schemas.microsoft.com/office/powerpoint/2010/main" val="3128766542"/>
+      </p:ext>
+    </p:extLst>
+  </p:cSld>
+  <p:clrMapOvr>
+    <a:masterClrMapping/>
+  </p:clrMapOvr>
+</p:sld>
+</file>
+
+<file path=ppt/slides/slide21.xml><?xml version="1.0" encoding="utf-8"?>
+<p:sld xmlns:a="http://schemas.openxmlformats.org/drawingml/2006/main" xmlns:r="http://schemas.openxmlformats.org/officeDocument/2006/relationships" xmlns:p="http://schemas.openxmlformats.org/presentationml/2006/main">
+  <p:cSld>
+    <p:spTree>
+      <p:nvGrpSpPr>
+        <p:cNvPr id="1" name="">
+          <a:extLst>
+            <a:ext uri="{FF2B5EF4-FFF2-40B4-BE49-F238E27FC236}">
+              <a16:creationId xmlns:a16="http://schemas.microsoft.com/office/drawing/2014/main" id="{B1A64174-8800-2C44-DEB2-D050A3DFF196}"/>
+            </a:ext>
+          </a:extLst>
+        </p:cNvPr>
+        <p:cNvGrpSpPr/>
+        <p:nvPr/>
+      </p:nvGrpSpPr>
+      <p:grpSpPr>
+        <a:xfrm>
+          <a:off x="0" y="0"/>
+          <a:ext cx="0" cy="0"/>
+          <a:chOff x="0" y="0"/>
+          <a:chExt cx="0" cy="0"/>
+        </a:xfrm>
+      </p:grpSpPr>
+      <p:sp>
+        <p:nvSpPr>
+          <p:cNvPr id="2" name="Title 1">
+            <a:extLst>
+              <a:ext uri="{FF2B5EF4-FFF2-40B4-BE49-F238E27FC236}">
+                <a16:creationId xmlns:a16="http://schemas.microsoft.com/office/drawing/2014/main" id="{0AD83300-E94E-109B-C43C-AD22B316F7F0}"/>
+              </a:ext>
+            </a:extLst>
+          </p:cNvPr>
+          <p:cNvSpPr>
+            <a:spLocks noGrp="1"/>
+          </p:cNvSpPr>
+          <p:nvPr>
+            <p:ph type="title"/>
+          </p:nvPr>
+        </p:nvSpPr>
+        <p:spPr>
+          <a:xfrm>
+            <a:off x="838200" y="365126"/>
+            <a:ext cx="10515600" cy="947308"/>
+          </a:xfrm>
+        </p:spPr>
+        <p:txBody>
+          <a:bodyPr/>
+          <a:lstStyle/>
+          <a:p>
+            <a:pPr algn="ctr"/>
+            <a:r>
+              <a:rPr lang="en-US" dirty="0">
+                <a:latin typeface="Aharoni" panose="02010803020104030203" pitchFamily="2" charset="-79"/>
+                <a:cs typeface="Aharoni" panose="02010803020104030203" pitchFamily="2" charset="-79"/>
+              </a:rPr>
+              <a:t>Histograms</a:t>
+            </a:r>
+          </a:p>
+        </p:txBody>
+      </p:sp>
+      <p:pic>
+        <p:nvPicPr>
+          <p:cNvPr id="6" name="Content Placeholder 5">
+            <a:extLst>
+              <a:ext uri="{FF2B5EF4-FFF2-40B4-BE49-F238E27FC236}">
+                <a16:creationId xmlns:a16="http://schemas.microsoft.com/office/drawing/2014/main" id="{53BD81E9-AB9A-170C-9D1D-9EDD376DCFFF}"/>
+              </a:ext>
+            </a:extLst>
+          </p:cNvPr>
+          <p:cNvPicPr>
+            <a:picLocks noGrp="1" noChangeAspect="1"/>
+          </p:cNvPicPr>
+          <p:nvPr>
+            <p:ph idx="1"/>
+          </p:nvPr>
+        </p:nvPicPr>
+        <p:blipFill>
+          <a:blip r:embed="rId2"/>
+          <a:stretch>
+            <a:fillRect/>
+          </a:stretch>
+        </p:blipFill>
+        <p:spPr>
+          <a:xfrm>
+            <a:off x="838200" y="1219373"/>
+            <a:ext cx="10515600" cy="1588294"/>
+          </a:xfrm>
+          <a:prstGeom prst="rect">
+            <a:avLst/>
+          </a:prstGeom>
+        </p:spPr>
+      </p:pic>
+      <p:cxnSp>
+        <p:nvCxnSpPr>
+          <p:cNvPr id="5" name="Straight Connector 4">
+            <a:extLst>
+              <a:ext uri="{FF2B5EF4-FFF2-40B4-BE49-F238E27FC236}">
+                <a16:creationId xmlns:a16="http://schemas.microsoft.com/office/drawing/2014/main" id="{35827D49-DD0C-7F83-37B3-A54AE24A237C}"/>
+              </a:ext>
+            </a:extLst>
+          </p:cNvPr>
+          <p:cNvCxnSpPr/>
+          <p:nvPr/>
+        </p:nvCxnSpPr>
+        <p:spPr>
+          <a:xfrm>
+            <a:off x="838200" y="1161826"/>
+            <a:ext cx="10515600" cy="0"/>
+          </a:xfrm>
+          <a:prstGeom prst="line">
+            <a:avLst/>
+          </a:prstGeom>
+          <a:ln>
+            <a:solidFill>
+              <a:srgbClr val="C00000"/>
+            </a:solidFill>
+          </a:ln>
+        </p:spPr>
+        <p:style>
+          <a:lnRef idx="2">
+            <a:schemeClr val="accent1"/>
+          </a:lnRef>
+          <a:fillRef idx="0">
+            <a:schemeClr val="accent1"/>
+          </a:fillRef>
+          <a:effectRef idx="1">
+            <a:schemeClr val="accent1"/>
+          </a:effectRef>
+          <a:fontRef idx="minor">
+            <a:schemeClr val="tx1"/>
+          </a:fontRef>
+        </p:style>
+      </p:cxnSp>
+      <p:pic>
+        <p:nvPicPr>
+          <p:cNvPr id="8" name="Picture 7">
+            <a:extLst>
+              <a:ext uri="{FF2B5EF4-FFF2-40B4-BE49-F238E27FC236}">
+                <a16:creationId xmlns:a16="http://schemas.microsoft.com/office/drawing/2014/main" id="{D7DAF39D-364D-9ED5-CF6D-0C3B7471F887}"/>
+              </a:ext>
+            </a:extLst>
+          </p:cNvPr>
+          <p:cNvPicPr>
+            <a:picLocks noChangeAspect="1"/>
+          </p:cNvPicPr>
+          <p:nvPr/>
+        </p:nvPicPr>
+        <p:blipFill>
+          <a:blip r:embed="rId3"/>
+          <a:stretch>
+            <a:fillRect/>
+          </a:stretch>
+        </p:blipFill>
+        <p:spPr>
+          <a:xfrm>
+            <a:off x="7379746" y="2955223"/>
+            <a:ext cx="4226185" cy="3773685"/>
+          </a:xfrm>
+          <a:prstGeom prst="rect">
+            <a:avLst/>
+          </a:prstGeom>
+        </p:spPr>
+      </p:pic>
+      <p:sp>
+        <p:nvSpPr>
+          <p:cNvPr id="11" name="TextBox 10">
+            <a:extLst>
+              <a:ext uri="{FF2B5EF4-FFF2-40B4-BE49-F238E27FC236}">
+                <a16:creationId xmlns:a16="http://schemas.microsoft.com/office/drawing/2014/main" id="{F2938BE4-C7A9-267E-7096-C92353704447}"/>
+              </a:ext>
+            </a:extLst>
+          </p:cNvPr>
+          <p:cNvSpPr txBox="1"/>
+          <p:nvPr/>
+        </p:nvSpPr>
+        <p:spPr>
+          <a:xfrm>
+            <a:off x="586069" y="3013501"/>
+            <a:ext cx="6852621" cy="1200329"/>
+          </a:xfrm>
+          <a:prstGeom prst="rect">
+            <a:avLst/>
+          </a:prstGeom>
+          <a:noFill/>
+        </p:spPr>
+        <p:txBody>
+          <a:bodyPr wrap="square" rtlCol="0">
+            <a:spAutoFit/>
+          </a:bodyPr>
+          <a:lstStyle/>
+          <a:p>
+            <a:pPr marL="285750" indent="-285750">
+              <a:buFont typeface="Arial" panose="020B0604020202020204" pitchFamily="34" charset="0"/>
+              <a:buChar char="•"/>
+            </a:pPr>
+            <a:r>
+              <a:rPr lang="en-US" sz="2400" dirty="0">
+                <a:latin typeface="Times New Roman" panose="02020603050405020304" pitchFamily="18" charset="0"/>
+                <a:cs typeface="Times New Roman" panose="02020603050405020304" pitchFamily="18" charset="0"/>
+              </a:rPr>
+              <a:t>Great for seeing the distribution of a variable. </a:t>
+            </a:r>
+          </a:p>
+          <a:p>
+            <a:pPr marL="285750" indent="-285750">
+              <a:buFont typeface="Arial" panose="020B0604020202020204" pitchFamily="34" charset="0"/>
+              <a:buChar char="•"/>
+            </a:pPr>
+            <a:r>
+              <a:rPr lang="en-US" sz="2400" dirty="0">
+                <a:latin typeface="Times New Roman" panose="02020603050405020304" pitchFamily="18" charset="0"/>
+                <a:cs typeface="Times New Roman" panose="02020603050405020304" pitchFamily="18" charset="0"/>
+              </a:rPr>
+              <a:t>Can also use base R </a:t>
+            </a:r>
+            <a:r>
+              <a:rPr lang="en-US" sz="2400" dirty="0">
+                <a:latin typeface="Courier New" panose="02070309020205020404" pitchFamily="49" charset="0"/>
+                <a:cs typeface="Courier New" panose="02070309020205020404" pitchFamily="49" charset="0"/>
+              </a:rPr>
+              <a:t>hist() </a:t>
+            </a:r>
+            <a:r>
+              <a:rPr lang="en-US" sz="2400" dirty="0">
+                <a:latin typeface="Times New Roman" panose="02020603050405020304" pitchFamily="18" charset="0"/>
+                <a:cs typeface="Times New Roman" panose="02020603050405020304" pitchFamily="18" charset="0"/>
+              </a:rPr>
+              <a:t>if you want to quickly look and don’t care about the look. </a:t>
+            </a:r>
+          </a:p>
+        </p:txBody>
+      </p:sp>
+      <p:pic>
+        <p:nvPicPr>
+          <p:cNvPr id="13" name="Picture 12">
+            <a:extLst>
+              <a:ext uri="{FF2B5EF4-FFF2-40B4-BE49-F238E27FC236}">
+                <a16:creationId xmlns:a16="http://schemas.microsoft.com/office/drawing/2014/main" id="{5A1BA04B-B443-C686-6A8B-B6250CD974EC}"/>
+              </a:ext>
+            </a:extLst>
+          </p:cNvPr>
+          <p:cNvPicPr>
+            <a:picLocks noChangeAspect="1"/>
+          </p:cNvPicPr>
+          <p:nvPr/>
+        </p:nvPicPr>
+        <p:blipFill>
+          <a:blip r:embed="rId4"/>
+          <a:srcRect t="-1" r="25922" b="-960"/>
+          <a:stretch>
+            <a:fillRect/>
+          </a:stretch>
+        </p:blipFill>
+        <p:spPr>
+          <a:xfrm>
+            <a:off x="838200" y="4240211"/>
+            <a:ext cx="5610336" cy="358906"/>
+          </a:xfrm>
+          <a:prstGeom prst="rect">
+            <a:avLst/>
+          </a:prstGeom>
+        </p:spPr>
+      </p:pic>
+    </p:spTree>
+    <p:extLst>
+      <p:ext uri="{BB962C8B-B14F-4D97-AF65-F5344CB8AC3E}">
+        <p14:creationId xmlns:p14="http://schemas.microsoft.com/office/powerpoint/2010/main" val="867222241"/>
+      </p:ext>
+    </p:extLst>
+  </p:cSld>
+  <p:clrMapOvr>
+    <a:masterClrMapping/>
+  </p:clrMapOvr>
+</p:sld>
+</file>
+
+<file path=ppt/slides/slide22.xml><?xml version="1.0" encoding="utf-8"?>
+<p:sld xmlns:a="http://schemas.openxmlformats.org/drawingml/2006/main" xmlns:r="http://schemas.openxmlformats.org/officeDocument/2006/relationships" xmlns:p="http://schemas.openxmlformats.org/presentationml/2006/main">
+  <p:cSld>
+    <p:spTree>
+      <p:nvGrpSpPr>
+        <p:cNvPr id="1" name="">
+          <a:extLst>
+            <a:ext uri="{FF2B5EF4-FFF2-40B4-BE49-F238E27FC236}">
+              <a16:creationId xmlns:a16="http://schemas.microsoft.com/office/drawing/2014/main" id="{0A82A265-29BA-C710-7055-BE7DF6143F60}"/>
+            </a:ext>
+          </a:extLst>
+        </p:cNvPr>
+        <p:cNvGrpSpPr/>
+        <p:nvPr/>
+      </p:nvGrpSpPr>
+      <p:grpSpPr>
+        <a:xfrm>
+          <a:off x="0" y="0"/>
+          <a:ext cx="0" cy="0"/>
+          <a:chOff x="0" y="0"/>
+          <a:chExt cx="0" cy="0"/>
+        </a:xfrm>
+      </p:grpSpPr>
+      <p:sp>
+        <p:nvSpPr>
+          <p:cNvPr id="2" name="Title 1">
+            <a:extLst>
+              <a:ext uri="{FF2B5EF4-FFF2-40B4-BE49-F238E27FC236}">
+                <a16:creationId xmlns:a16="http://schemas.microsoft.com/office/drawing/2014/main" id="{A86B6973-6A0B-CA9A-2C5D-3D4171B7ECE2}"/>
+              </a:ext>
+            </a:extLst>
+          </p:cNvPr>
+          <p:cNvSpPr>
+            <a:spLocks noGrp="1"/>
+          </p:cNvSpPr>
+          <p:nvPr>
+            <p:ph type="title"/>
+          </p:nvPr>
+        </p:nvSpPr>
+        <p:spPr>
+          <a:xfrm>
+            <a:off x="838200" y="365126"/>
+            <a:ext cx="10515600" cy="947308"/>
+          </a:xfrm>
+        </p:spPr>
+        <p:txBody>
+          <a:bodyPr/>
+          <a:lstStyle/>
+          <a:p>
+            <a:pPr algn="ctr"/>
+            <a:r>
+              <a:rPr lang="en-US" dirty="0">
+                <a:latin typeface="Aharoni" panose="02010803020104030203" pitchFamily="2" charset="-79"/>
+                <a:cs typeface="Aharoni" panose="02010803020104030203" pitchFamily="2" charset="-79"/>
+              </a:rPr>
+              <a:t>Density Plots</a:t>
+            </a:r>
+          </a:p>
+        </p:txBody>
+      </p:sp>
+      <p:pic>
+        <p:nvPicPr>
+          <p:cNvPr id="6" name="Content Placeholder 5">
+            <a:extLst>
+              <a:ext uri="{FF2B5EF4-FFF2-40B4-BE49-F238E27FC236}">
+                <a16:creationId xmlns:a16="http://schemas.microsoft.com/office/drawing/2014/main" id="{F86F227A-62BE-CB0D-FF42-8B3EDA4B9461}"/>
+              </a:ext>
+            </a:extLst>
+          </p:cNvPr>
+          <p:cNvPicPr>
+            <a:picLocks noGrp="1" noChangeAspect="1"/>
+          </p:cNvPicPr>
+          <p:nvPr>
+            <p:ph idx="1"/>
+          </p:nvPr>
+        </p:nvPicPr>
+        <p:blipFill>
+          <a:blip r:embed="rId2"/>
+          <a:stretch>
+            <a:fillRect/>
+          </a:stretch>
+        </p:blipFill>
+        <p:spPr>
+          <a:xfrm>
+            <a:off x="838199" y="1312433"/>
+            <a:ext cx="10495023" cy="1151067"/>
+          </a:xfrm>
+          <a:prstGeom prst="rect">
+            <a:avLst/>
+          </a:prstGeom>
+        </p:spPr>
+      </p:pic>
+      <p:cxnSp>
+        <p:nvCxnSpPr>
+          <p:cNvPr id="5" name="Straight Connector 4">
+            <a:extLst>
+              <a:ext uri="{FF2B5EF4-FFF2-40B4-BE49-F238E27FC236}">
+                <a16:creationId xmlns:a16="http://schemas.microsoft.com/office/drawing/2014/main" id="{29BBF4BA-B45D-4ACA-3B0D-EC9BC33BC3B5}"/>
+              </a:ext>
+            </a:extLst>
+          </p:cNvPr>
+          <p:cNvCxnSpPr/>
+          <p:nvPr/>
+        </p:nvCxnSpPr>
+        <p:spPr>
+          <a:xfrm>
+            <a:off x="838200" y="1161826"/>
+            <a:ext cx="10515600" cy="0"/>
+          </a:xfrm>
+          <a:prstGeom prst="line">
+            <a:avLst/>
+          </a:prstGeom>
+          <a:ln>
+            <a:solidFill>
+              <a:srgbClr val="C00000"/>
+            </a:solidFill>
+          </a:ln>
+        </p:spPr>
+        <p:style>
+          <a:lnRef idx="2">
+            <a:schemeClr val="accent1"/>
+          </a:lnRef>
+          <a:fillRef idx="0">
+            <a:schemeClr val="accent1"/>
+          </a:fillRef>
+          <a:effectRef idx="1">
+            <a:schemeClr val="accent1"/>
+          </a:effectRef>
+          <a:fontRef idx="minor">
+            <a:schemeClr val="tx1"/>
+          </a:fontRef>
+        </p:style>
+      </p:cxnSp>
+      <p:pic>
+        <p:nvPicPr>
+          <p:cNvPr id="8" name="Picture 7">
+            <a:extLst>
+              <a:ext uri="{FF2B5EF4-FFF2-40B4-BE49-F238E27FC236}">
+                <a16:creationId xmlns:a16="http://schemas.microsoft.com/office/drawing/2014/main" id="{0E0A7BFC-4E16-EE69-6AAE-FABFC7DE618B}"/>
+              </a:ext>
+            </a:extLst>
+          </p:cNvPr>
+          <p:cNvPicPr>
+            <a:picLocks noChangeAspect="1"/>
+          </p:cNvPicPr>
+          <p:nvPr/>
+        </p:nvPicPr>
+        <p:blipFill>
+          <a:blip r:embed="rId3"/>
+          <a:stretch>
+            <a:fillRect/>
+          </a:stretch>
+        </p:blipFill>
+        <p:spPr>
+          <a:xfrm>
+            <a:off x="7406064" y="2614106"/>
+            <a:ext cx="4545163" cy="4067691"/>
+          </a:xfrm>
+          <a:prstGeom prst="rect">
+            <a:avLst/>
+          </a:prstGeom>
+        </p:spPr>
+      </p:pic>
+      <p:sp>
+        <p:nvSpPr>
+          <p:cNvPr id="9" name="TextBox 8">
+            <a:extLst>
+              <a:ext uri="{FF2B5EF4-FFF2-40B4-BE49-F238E27FC236}">
+                <a16:creationId xmlns:a16="http://schemas.microsoft.com/office/drawing/2014/main" id="{0CA8837D-9E7A-AEC6-76DF-BD49AB595E93}"/>
+              </a:ext>
+            </a:extLst>
+          </p:cNvPr>
+          <p:cNvSpPr txBox="1"/>
+          <p:nvPr/>
+        </p:nvSpPr>
+        <p:spPr>
+          <a:xfrm>
+            <a:off x="553443" y="2764713"/>
+            <a:ext cx="6852621" cy="461665"/>
+          </a:xfrm>
+          <a:prstGeom prst="rect">
+            <a:avLst/>
+          </a:prstGeom>
+          <a:noFill/>
+        </p:spPr>
+        <p:txBody>
+          <a:bodyPr wrap="square" rtlCol="0">
+            <a:spAutoFit/>
+          </a:bodyPr>
+          <a:lstStyle/>
+          <a:p>
+            <a:pPr marL="285750" indent="-285750">
+              <a:buFont typeface="Arial" panose="020B0604020202020204" pitchFamily="34" charset="0"/>
+              <a:buChar char="•"/>
+            </a:pPr>
+            <a:r>
+              <a:rPr lang="en-US" sz="2400" dirty="0">
+                <a:latin typeface="Times New Roman" panose="02020603050405020304" pitchFamily="18" charset="0"/>
+                <a:cs typeface="Times New Roman" panose="02020603050405020304" pitchFamily="18" charset="0"/>
+              </a:rPr>
+              <a:t>Another way to see a variable distribution. </a:t>
+            </a:r>
+          </a:p>
+        </p:txBody>
+      </p:sp>
+    </p:spTree>
+    <p:extLst>
+      <p:ext uri="{BB962C8B-B14F-4D97-AF65-F5344CB8AC3E}">
+        <p14:creationId xmlns:p14="http://schemas.microsoft.com/office/powerpoint/2010/main" val="1648967674"/>
+      </p:ext>
+    </p:extLst>
+  </p:cSld>
+  <p:clrMapOvr>
+    <a:masterClrMapping/>
+  </p:clrMapOvr>
+</p:sld>
+</file>
+
+<file path=ppt/slides/slide23.xml><?xml version="1.0" encoding="utf-8"?>
+<p:sld xmlns:a="http://schemas.openxmlformats.org/drawingml/2006/main" xmlns:r="http://schemas.openxmlformats.org/officeDocument/2006/relationships" xmlns:p="http://schemas.openxmlformats.org/presentationml/2006/main">
+  <p:cSld>
+    <p:spTree>
+      <p:nvGrpSpPr>
+        <p:cNvPr id="1" name="">
+          <a:extLst>
+            <a:ext uri="{FF2B5EF4-FFF2-40B4-BE49-F238E27FC236}">
+              <a16:creationId xmlns:a16="http://schemas.microsoft.com/office/drawing/2014/main" id="{B20FD1F3-9B2C-8B19-E73A-F60F06F4EE4C}"/>
+            </a:ext>
+          </a:extLst>
+        </p:cNvPr>
+        <p:cNvGrpSpPr/>
+        <p:nvPr/>
+      </p:nvGrpSpPr>
+      <p:grpSpPr>
+        <a:xfrm>
+          <a:off x="0" y="0"/>
+          <a:ext cx="0" cy="0"/>
+          <a:chOff x="0" y="0"/>
+          <a:chExt cx="0" cy="0"/>
+        </a:xfrm>
+      </p:grpSpPr>
+      <p:sp>
+        <p:nvSpPr>
+          <p:cNvPr id="2" name="Title 1">
+            <a:extLst>
+              <a:ext uri="{FF2B5EF4-FFF2-40B4-BE49-F238E27FC236}">
+                <a16:creationId xmlns:a16="http://schemas.microsoft.com/office/drawing/2014/main" id="{5FA929B9-2EB3-23FC-8481-17F00E0055FF}"/>
+              </a:ext>
+            </a:extLst>
+          </p:cNvPr>
+          <p:cNvSpPr>
+            <a:spLocks noGrp="1"/>
+          </p:cNvSpPr>
+          <p:nvPr>
+            <p:ph type="title"/>
+          </p:nvPr>
+        </p:nvSpPr>
+        <p:spPr>
+          <a:xfrm>
+            <a:off x="838200" y="365126"/>
+            <a:ext cx="10515600" cy="947308"/>
+          </a:xfrm>
+        </p:spPr>
+        <p:txBody>
+          <a:bodyPr/>
+          <a:lstStyle/>
+          <a:p>
+            <a:pPr algn="ctr"/>
+            <a:r>
+              <a:rPr lang="en-US" dirty="0">
+                <a:latin typeface="Aharoni" panose="02010803020104030203" pitchFamily="2" charset="-79"/>
+                <a:cs typeface="Aharoni" panose="02010803020104030203" pitchFamily="2" charset="-79"/>
+              </a:rPr>
+              <a:t>Bar Plots</a:t>
+            </a:r>
+          </a:p>
+        </p:txBody>
+      </p:sp>
+      <p:pic>
+        <p:nvPicPr>
+          <p:cNvPr id="6" name="Content Placeholder 5">
+            <a:extLst>
+              <a:ext uri="{FF2B5EF4-FFF2-40B4-BE49-F238E27FC236}">
+                <a16:creationId xmlns:a16="http://schemas.microsoft.com/office/drawing/2014/main" id="{E708DCFD-450A-7083-9BA1-D421EC0CDFB6}"/>
+              </a:ext>
+            </a:extLst>
+          </p:cNvPr>
+          <p:cNvPicPr>
+            <a:picLocks noGrp="1" noChangeAspect="1"/>
+          </p:cNvPicPr>
+          <p:nvPr>
+            <p:ph idx="1"/>
+          </p:nvPr>
+        </p:nvPicPr>
+        <p:blipFill>
+          <a:blip r:embed="rId2"/>
+          <a:stretch>
+            <a:fillRect/>
+          </a:stretch>
+        </p:blipFill>
+        <p:spPr>
+          <a:xfrm>
+            <a:off x="838200" y="1312434"/>
+            <a:ext cx="10515600" cy="1455588"/>
+          </a:xfrm>
+          <a:prstGeom prst="rect">
+            <a:avLst/>
+          </a:prstGeom>
+        </p:spPr>
+      </p:pic>
+      <p:cxnSp>
+        <p:nvCxnSpPr>
+          <p:cNvPr id="5" name="Straight Connector 4">
+            <a:extLst>
+              <a:ext uri="{FF2B5EF4-FFF2-40B4-BE49-F238E27FC236}">
+                <a16:creationId xmlns:a16="http://schemas.microsoft.com/office/drawing/2014/main" id="{E4AE87C1-AD5B-A160-CC91-2726B5169156}"/>
+              </a:ext>
+            </a:extLst>
+          </p:cNvPr>
+          <p:cNvCxnSpPr/>
+          <p:nvPr/>
+        </p:nvCxnSpPr>
+        <p:spPr>
+          <a:xfrm>
+            <a:off x="838200" y="1161826"/>
+            <a:ext cx="10515600" cy="0"/>
+          </a:xfrm>
+          <a:prstGeom prst="line">
+            <a:avLst/>
+          </a:prstGeom>
+          <a:ln>
+            <a:solidFill>
+              <a:srgbClr val="C00000"/>
+            </a:solidFill>
+          </a:ln>
+        </p:spPr>
+        <p:style>
+          <a:lnRef idx="2">
+            <a:schemeClr val="accent1"/>
+          </a:lnRef>
+          <a:fillRef idx="0">
+            <a:schemeClr val="accent1"/>
+          </a:fillRef>
+          <a:effectRef idx="1">
+            <a:schemeClr val="accent1"/>
+          </a:effectRef>
+          <a:fontRef idx="minor">
+            <a:schemeClr val="tx1"/>
+          </a:fontRef>
+        </p:style>
+      </p:cxnSp>
+      <p:pic>
+        <p:nvPicPr>
+          <p:cNvPr id="8" name="Picture 7">
+            <a:extLst>
+              <a:ext uri="{FF2B5EF4-FFF2-40B4-BE49-F238E27FC236}">
+                <a16:creationId xmlns:a16="http://schemas.microsoft.com/office/drawing/2014/main" id="{5B63118E-B2A6-68D0-5A36-9FC571E66F34}"/>
+              </a:ext>
+            </a:extLst>
+          </p:cNvPr>
+          <p:cNvPicPr>
+            <a:picLocks noChangeAspect="1"/>
+          </p:cNvPicPr>
+          <p:nvPr/>
+        </p:nvPicPr>
+        <p:blipFill>
+          <a:blip r:embed="rId3"/>
+          <a:stretch>
+            <a:fillRect/>
+          </a:stretch>
+        </p:blipFill>
+        <p:spPr>
+          <a:xfrm>
+            <a:off x="7390502" y="2981691"/>
+            <a:ext cx="4313817" cy="3876310"/>
+          </a:xfrm>
+          <a:prstGeom prst="rect">
+            <a:avLst/>
+          </a:prstGeom>
+        </p:spPr>
+      </p:pic>
+      <p:sp>
+        <p:nvSpPr>
+          <p:cNvPr id="10" name="TextBox 9">
+            <a:extLst>
+              <a:ext uri="{FF2B5EF4-FFF2-40B4-BE49-F238E27FC236}">
+                <a16:creationId xmlns:a16="http://schemas.microsoft.com/office/drawing/2014/main" id="{F770034C-A839-CF1E-E216-87C479433296}"/>
+              </a:ext>
+            </a:extLst>
+          </p:cNvPr>
+          <p:cNvSpPr txBox="1"/>
+          <p:nvPr/>
+        </p:nvSpPr>
+        <p:spPr>
+          <a:xfrm>
+            <a:off x="639504" y="2967335"/>
+            <a:ext cx="6852621" cy="830997"/>
+          </a:xfrm>
+          <a:prstGeom prst="rect">
+            <a:avLst/>
+          </a:prstGeom>
+          <a:noFill/>
+        </p:spPr>
+        <p:txBody>
+          <a:bodyPr wrap="square" rtlCol="0">
+            <a:spAutoFit/>
+          </a:bodyPr>
+          <a:lstStyle/>
+          <a:p>
+            <a:pPr marL="285750" indent="-285750">
+              <a:buFont typeface="Arial" panose="020B0604020202020204" pitchFamily="34" charset="0"/>
+              <a:buChar char="•"/>
+            </a:pPr>
+            <a:r>
+              <a:rPr lang="en-US" sz="2400" dirty="0">
+                <a:latin typeface="Times New Roman" panose="02020603050405020304" pitchFamily="18" charset="0"/>
+                <a:cs typeface="Times New Roman" panose="02020603050405020304" pitchFamily="18" charset="0"/>
+              </a:rPr>
+              <a:t>Useful when you have one categorical and one numeric variable. </a:t>
+            </a:r>
+          </a:p>
+        </p:txBody>
+      </p:sp>
+    </p:spTree>
+    <p:extLst>
+      <p:ext uri="{BB962C8B-B14F-4D97-AF65-F5344CB8AC3E}">
+        <p14:creationId xmlns:p14="http://schemas.microsoft.com/office/powerpoint/2010/main" val="3155683692"/>
+      </p:ext>
+    </p:extLst>
+  </p:cSld>
+  <p:clrMapOvr>
+    <a:masterClrMapping/>
+  </p:clrMapOvr>
+</p:sld>
+</file>
+
+<file path=ppt/slides/slide24.xml><?xml version="1.0" encoding="utf-8"?>
+<p:sld xmlns:a="http://schemas.openxmlformats.org/drawingml/2006/main" xmlns:r="http://schemas.openxmlformats.org/officeDocument/2006/relationships" xmlns:p="http://schemas.openxmlformats.org/presentationml/2006/main">
+  <p:cSld>
+    <p:spTree>
+      <p:nvGrpSpPr>
+        <p:cNvPr id="1" name="">
+          <a:extLst>
+            <a:ext uri="{FF2B5EF4-FFF2-40B4-BE49-F238E27FC236}">
+              <a16:creationId xmlns:a16="http://schemas.microsoft.com/office/drawing/2014/main" id="{F9262315-CCF5-1E7D-E2F8-65C88965151D}"/>
+            </a:ext>
+          </a:extLst>
+        </p:cNvPr>
+        <p:cNvGrpSpPr/>
+        <p:nvPr/>
+      </p:nvGrpSpPr>
+      <p:grpSpPr>
+        <a:xfrm>
+          <a:off x="0" y="0"/>
+          <a:ext cx="0" cy="0"/>
+          <a:chOff x="0" y="0"/>
+          <a:chExt cx="0" cy="0"/>
+        </a:xfrm>
+      </p:grpSpPr>
+      <p:sp>
+        <p:nvSpPr>
+          <p:cNvPr id="2" name="Title 1">
+            <a:extLst>
+              <a:ext uri="{FF2B5EF4-FFF2-40B4-BE49-F238E27FC236}">
+                <a16:creationId xmlns:a16="http://schemas.microsoft.com/office/drawing/2014/main" id="{B1F1E16A-CC25-C9B6-5283-5638773D7A69}"/>
+              </a:ext>
+            </a:extLst>
+          </p:cNvPr>
+          <p:cNvSpPr>
+            <a:spLocks noGrp="1"/>
+          </p:cNvSpPr>
+          <p:nvPr>
+            <p:ph type="title"/>
+          </p:nvPr>
+        </p:nvSpPr>
+        <p:spPr>
+          <a:xfrm>
+            <a:off x="838200" y="365126"/>
+            <a:ext cx="10515600" cy="947308"/>
+          </a:xfrm>
+        </p:spPr>
+        <p:txBody>
+          <a:bodyPr/>
+          <a:lstStyle/>
+          <a:p>
+            <a:pPr algn="ctr"/>
+            <a:r>
+              <a:rPr lang="en-US" dirty="0">
+                <a:latin typeface="Aharoni" panose="02010803020104030203" pitchFamily="2" charset="-79"/>
+                <a:cs typeface="Aharoni" panose="02010803020104030203" pitchFamily="2" charset="-79"/>
+              </a:rPr>
+              <a:t>Boxplots</a:t>
+            </a:r>
+          </a:p>
+        </p:txBody>
+      </p:sp>
+      <p:cxnSp>
+        <p:nvCxnSpPr>
+          <p:cNvPr id="5" name="Straight Connector 4">
+            <a:extLst>
+              <a:ext uri="{FF2B5EF4-FFF2-40B4-BE49-F238E27FC236}">
+                <a16:creationId xmlns:a16="http://schemas.microsoft.com/office/drawing/2014/main" id="{07AB8248-3001-AD9F-C7F0-666C67EDA3F0}"/>
+              </a:ext>
+            </a:extLst>
+          </p:cNvPr>
+          <p:cNvCxnSpPr/>
+          <p:nvPr/>
+        </p:nvCxnSpPr>
+        <p:spPr>
+          <a:xfrm>
+            <a:off x="838200" y="1161826"/>
+            <a:ext cx="10515600" cy="0"/>
+          </a:xfrm>
+          <a:prstGeom prst="line">
+            <a:avLst/>
+          </a:prstGeom>
+          <a:ln>
+            <a:solidFill>
+              <a:srgbClr val="C00000"/>
+            </a:solidFill>
+          </a:ln>
+        </p:spPr>
+        <p:style>
+          <a:lnRef idx="2">
+            <a:schemeClr val="accent1"/>
+          </a:lnRef>
+          <a:fillRef idx="0">
+            <a:schemeClr val="accent1"/>
+          </a:fillRef>
+          <a:effectRef idx="1">
+            <a:schemeClr val="accent1"/>
+          </a:effectRef>
+          <a:fontRef idx="minor">
+            <a:schemeClr val="tx1"/>
+          </a:fontRef>
+        </p:style>
+      </p:cxnSp>
+      <p:pic>
+        <p:nvPicPr>
+          <p:cNvPr id="13" name="Content Placeholder 12">
+            <a:extLst>
+              <a:ext uri="{FF2B5EF4-FFF2-40B4-BE49-F238E27FC236}">
+                <a16:creationId xmlns:a16="http://schemas.microsoft.com/office/drawing/2014/main" id="{5A140A48-A4B7-845B-85E1-87450F60DE4D}"/>
+              </a:ext>
+            </a:extLst>
+          </p:cNvPr>
+          <p:cNvPicPr>
+            <a:picLocks noGrp="1" noChangeAspect="1"/>
+          </p:cNvPicPr>
+          <p:nvPr>
+            <p:ph idx="1"/>
+          </p:nvPr>
+        </p:nvPicPr>
+        <p:blipFill>
+          <a:blip r:embed="rId2"/>
+          <a:stretch>
+            <a:fillRect/>
+          </a:stretch>
+        </p:blipFill>
+        <p:spPr>
+          <a:xfrm>
+            <a:off x="838200" y="1409150"/>
+            <a:ext cx="10515600" cy="903684"/>
+          </a:xfrm>
+          <a:prstGeom prst="rect">
+            <a:avLst/>
+          </a:prstGeom>
+        </p:spPr>
+      </p:pic>
+      <p:pic>
+        <p:nvPicPr>
+          <p:cNvPr id="15" name="Picture 14">
+            <a:extLst>
+              <a:ext uri="{FF2B5EF4-FFF2-40B4-BE49-F238E27FC236}">
+                <a16:creationId xmlns:a16="http://schemas.microsoft.com/office/drawing/2014/main" id="{B4E68BFA-BD96-07BB-A33E-6A6DC7A48704}"/>
+              </a:ext>
+            </a:extLst>
+          </p:cNvPr>
+          <p:cNvPicPr>
+            <a:picLocks noChangeAspect="1"/>
+          </p:cNvPicPr>
+          <p:nvPr/>
+        </p:nvPicPr>
+        <p:blipFill>
+          <a:blip r:embed="rId3"/>
+          <a:stretch>
+            <a:fillRect/>
+          </a:stretch>
+        </p:blipFill>
+        <p:spPr>
+          <a:xfrm>
+            <a:off x="6939504" y="2409550"/>
+            <a:ext cx="4414296" cy="3957645"/>
+          </a:xfrm>
+          <a:prstGeom prst="rect">
+            <a:avLst/>
+          </a:prstGeom>
+        </p:spPr>
+      </p:pic>
+      <p:sp>
+        <p:nvSpPr>
+          <p:cNvPr id="17" name="TextBox 16">
+            <a:extLst>
+              <a:ext uri="{FF2B5EF4-FFF2-40B4-BE49-F238E27FC236}">
+                <a16:creationId xmlns:a16="http://schemas.microsoft.com/office/drawing/2014/main" id="{D285F845-DF81-EF3D-187F-EA078EF9DB22}"/>
+              </a:ext>
+            </a:extLst>
+          </p:cNvPr>
+          <p:cNvSpPr txBox="1"/>
+          <p:nvPr/>
+        </p:nvSpPr>
+        <p:spPr>
+          <a:xfrm>
+            <a:off x="639505" y="2598003"/>
+            <a:ext cx="6482058" cy="1569660"/>
+          </a:xfrm>
+          <a:prstGeom prst="rect">
+            <a:avLst/>
+          </a:prstGeom>
+          <a:noFill/>
+        </p:spPr>
+        <p:txBody>
+          <a:bodyPr wrap="square" rtlCol="0">
+            <a:spAutoFit/>
+          </a:bodyPr>
+          <a:lstStyle/>
+          <a:p>
+            <a:pPr marL="285750" indent="-285750">
+              <a:buFont typeface="Arial" panose="020B0604020202020204" pitchFamily="34" charset="0"/>
+              <a:buChar char="•"/>
+            </a:pPr>
+            <a:r>
+              <a:rPr lang="en-US" sz="2400" dirty="0">
+                <a:latin typeface="Times New Roman" panose="02020603050405020304" pitchFamily="18" charset="0"/>
+                <a:cs typeface="Times New Roman" panose="02020603050405020304" pitchFamily="18" charset="0"/>
+              </a:rPr>
+              <a:t>Useful when you have one categorical and one numeric variable. </a:t>
+            </a:r>
+          </a:p>
+          <a:p>
+            <a:pPr marL="285750" indent="-285750">
+              <a:buFont typeface="Arial" panose="020B0604020202020204" pitchFamily="34" charset="0"/>
+              <a:buChar char="•"/>
+            </a:pPr>
+            <a:r>
+              <a:rPr lang="en-US" sz="2400" dirty="0">
+                <a:latin typeface="Times New Roman" panose="02020603050405020304" pitchFamily="18" charset="0"/>
+                <a:cs typeface="Times New Roman" panose="02020603050405020304" pitchFamily="18" charset="0"/>
+              </a:rPr>
+              <a:t>Shows you the max, min, mean, first quartile, and third quartile for each group. </a:t>
+            </a:r>
+          </a:p>
+        </p:txBody>
+      </p:sp>
+    </p:spTree>
+    <p:extLst>
+      <p:ext uri="{BB962C8B-B14F-4D97-AF65-F5344CB8AC3E}">
+        <p14:creationId xmlns:p14="http://schemas.microsoft.com/office/powerpoint/2010/main" val="1875679802"/>
+      </p:ext>
+    </p:extLst>
+  </p:cSld>
+  <p:clrMapOvr>
+    <a:masterClrMapping/>
+  </p:clrMapOvr>
+</p:sld>
+</file>
+
+<file path=ppt/slides/slide25.xml><?xml version="1.0" encoding="utf-8"?>
+<p:sld xmlns:a="http://schemas.openxmlformats.org/drawingml/2006/main" xmlns:r="http://schemas.openxmlformats.org/officeDocument/2006/relationships" xmlns:p="http://schemas.openxmlformats.org/presentationml/2006/main">
+  <p:cSld>
+    <p:spTree>
+      <p:nvGrpSpPr>
+        <p:cNvPr id="1" name="">
+          <a:extLst>
+            <a:ext uri="{FF2B5EF4-FFF2-40B4-BE49-F238E27FC236}">
               <a16:creationId xmlns:a16="http://schemas.microsoft.com/office/drawing/2014/main" id="{168481A2-4864-80BF-B9E4-B63C83498B6D}"/>
             </a:ext>
           </a:extLst>
@@ -7832,9 +8850,22 @@
         </p:spPr>
         <p:txBody>
           <a:bodyPr>
-            <a:normAutofit/>
+            <a:normAutofit lnSpcReduction="10000"/>
           </a:bodyPr>
           <a:lstStyle/>
+          <a:p>
+            <a:pPr marL="514350" indent="-514350">
+              <a:buFont typeface="+mj-lt"/>
+              <a:buAutoNum type="arabicPeriod"/>
+            </a:pPr>
+            <a:r>
+              <a:rPr lang="en-US" dirty="0">
+                <a:latin typeface="Times New Roman" panose="02020603050405020304" pitchFamily="18" charset="0"/>
+                <a:cs typeface="Times New Roman" panose="02020603050405020304" pitchFamily="18" charset="0"/>
+              </a:rPr>
+              <a:t>Change the theme</a:t>
+            </a:r>
+          </a:p>
           <a:p>
             <a:pPr marL="514350" indent="-514350">
               <a:buFont typeface="+mj-lt"/>
@@ -7954,7 +8985,7 @@
 </p:sld>
 </file>
 
-<file path=ppt/slides/slide21.xml><?xml version="1.0" encoding="utf-8"?>
+<file path=ppt/slides/slide26.xml><?xml version="1.0" encoding="utf-8"?>
 <p:sld xmlns:a="http://schemas.openxmlformats.org/drawingml/2006/main" xmlns:r="http://schemas.openxmlformats.org/officeDocument/2006/relationships" xmlns:p="http://schemas.openxmlformats.org/presentationml/2006/main">
   <p:cSld>
     <p:spTree>
@@ -7995,7 +9026,7 @@
         </p:nvSpPr>
         <p:spPr>
           <a:xfrm>
-            <a:off x="838200" y="365126"/>
+            <a:off x="838200" y="0"/>
             <a:ext cx="10515600" cy="947308"/>
           </a:xfrm>
         </p:spPr>
@@ -8009,7 +9040,7 @@
                 <a:latin typeface="Aharoni" panose="02010803020104030203" pitchFamily="2" charset="-79"/>
                 <a:cs typeface="Aharoni" panose="02010803020104030203" pitchFamily="2" charset="-79"/>
               </a:rPr>
-              <a:t>Adding Color</a:t>
+              <a:t>Changing the Theme</a:t>
             </a:r>
           </a:p>
         </p:txBody>
@@ -8020,6 +9051,301 @@
             <a:extLst>
               <a:ext uri="{FF2B5EF4-FFF2-40B4-BE49-F238E27FC236}">
                 <a16:creationId xmlns:a16="http://schemas.microsoft.com/office/drawing/2014/main" id="{633D69C1-645E-4D81-4F28-518BACB70184}"/>
+              </a:ext>
+            </a:extLst>
+          </p:cNvPr>
+          <p:cNvCxnSpPr/>
+          <p:nvPr/>
+        </p:nvCxnSpPr>
+        <p:spPr>
+          <a:xfrm>
+            <a:off x="838200" y="798270"/>
+            <a:ext cx="10515600" cy="0"/>
+          </a:xfrm>
+          <a:prstGeom prst="line">
+            <a:avLst/>
+          </a:prstGeom>
+          <a:ln>
+            <a:solidFill>
+              <a:srgbClr val="C00000"/>
+            </a:solidFill>
+          </a:ln>
+        </p:spPr>
+        <p:style>
+          <a:lnRef idx="2">
+            <a:schemeClr val="accent1"/>
+          </a:lnRef>
+          <a:fillRef idx="0">
+            <a:schemeClr val="accent1"/>
+          </a:fillRef>
+          <a:effectRef idx="1">
+            <a:schemeClr val="accent1"/>
+          </a:effectRef>
+          <a:fontRef idx="minor">
+            <a:schemeClr val="tx1"/>
+          </a:fontRef>
+        </p:style>
+      </p:cxnSp>
+      <p:pic>
+        <p:nvPicPr>
+          <p:cNvPr id="4" name="Picture 3">
+            <a:extLst>
+              <a:ext uri="{FF2B5EF4-FFF2-40B4-BE49-F238E27FC236}">
+                <a16:creationId xmlns:a16="http://schemas.microsoft.com/office/drawing/2014/main" id="{5210DAEC-9871-060F-87AE-6D5803E367AF}"/>
+              </a:ext>
+            </a:extLst>
+          </p:cNvPr>
+          <p:cNvPicPr>
+            <a:picLocks noChangeAspect="1"/>
+          </p:cNvPicPr>
+          <p:nvPr/>
+        </p:nvPicPr>
+        <p:blipFill>
+          <a:blip r:embed="rId2"/>
+          <a:stretch>
+            <a:fillRect/>
+          </a:stretch>
+        </p:blipFill>
+        <p:spPr>
+          <a:xfrm>
+            <a:off x="750111" y="881000"/>
+            <a:ext cx="8742139" cy="916514"/>
+          </a:xfrm>
+          <a:prstGeom prst="rect">
+            <a:avLst/>
+          </a:prstGeom>
+        </p:spPr>
+      </p:pic>
+      <p:pic>
+        <p:nvPicPr>
+          <p:cNvPr id="12" name="Picture 11">
+            <a:extLst>
+              <a:ext uri="{FF2B5EF4-FFF2-40B4-BE49-F238E27FC236}">
+                <a16:creationId xmlns:a16="http://schemas.microsoft.com/office/drawing/2014/main" id="{BA1B74A3-F924-0A77-DE45-A232F9029908}"/>
+              </a:ext>
+            </a:extLst>
+          </p:cNvPr>
+          <p:cNvPicPr>
+            <a:picLocks noChangeAspect="1"/>
+          </p:cNvPicPr>
+          <p:nvPr/>
+        </p:nvPicPr>
+        <p:blipFill>
+          <a:blip r:embed="rId3"/>
+          <a:stretch>
+            <a:fillRect/>
+          </a:stretch>
+        </p:blipFill>
+        <p:spPr>
+          <a:xfrm>
+            <a:off x="9580339" y="889203"/>
+            <a:ext cx="2390424" cy="1952680"/>
+          </a:xfrm>
+          <a:prstGeom prst="rect">
+            <a:avLst/>
+          </a:prstGeom>
+        </p:spPr>
+      </p:pic>
+      <p:pic>
+        <p:nvPicPr>
+          <p:cNvPr id="14" name="Picture 13">
+            <a:extLst>
+              <a:ext uri="{FF2B5EF4-FFF2-40B4-BE49-F238E27FC236}">
+                <a16:creationId xmlns:a16="http://schemas.microsoft.com/office/drawing/2014/main" id="{D220DD8F-B271-E4A3-575F-17F186F496E2}"/>
+              </a:ext>
+            </a:extLst>
+          </p:cNvPr>
+          <p:cNvPicPr>
+            <a:picLocks noChangeAspect="1"/>
+          </p:cNvPicPr>
+          <p:nvPr/>
+        </p:nvPicPr>
+        <p:blipFill>
+          <a:blip r:embed="rId4"/>
+          <a:stretch>
+            <a:fillRect/>
+          </a:stretch>
+        </p:blipFill>
+        <p:spPr>
+          <a:xfrm>
+            <a:off x="750111" y="2779095"/>
+            <a:ext cx="8742139" cy="909182"/>
+          </a:xfrm>
+          <a:prstGeom prst="rect">
+            <a:avLst/>
+          </a:prstGeom>
+        </p:spPr>
+      </p:pic>
+      <p:pic>
+        <p:nvPicPr>
+          <p:cNvPr id="16" name="Picture 15">
+            <a:extLst>
+              <a:ext uri="{FF2B5EF4-FFF2-40B4-BE49-F238E27FC236}">
+                <a16:creationId xmlns:a16="http://schemas.microsoft.com/office/drawing/2014/main" id="{7385BFEF-F4C0-39E4-47ED-EE65E9DB2DDA}"/>
+              </a:ext>
+            </a:extLst>
+          </p:cNvPr>
+          <p:cNvPicPr>
+            <a:picLocks noChangeAspect="1"/>
+          </p:cNvPicPr>
+          <p:nvPr/>
+        </p:nvPicPr>
+        <p:blipFill>
+          <a:blip r:embed="rId5"/>
+          <a:srcRect r="4582"/>
+          <a:stretch>
+            <a:fillRect/>
+          </a:stretch>
+        </p:blipFill>
+        <p:spPr>
+          <a:xfrm>
+            <a:off x="9672811" y="2856013"/>
+            <a:ext cx="2132180" cy="1815587"/>
+          </a:xfrm>
+          <a:prstGeom prst="rect">
+            <a:avLst/>
+          </a:prstGeom>
+        </p:spPr>
+      </p:pic>
+      <p:pic>
+        <p:nvPicPr>
+          <p:cNvPr id="18" name="Picture 17">
+            <a:extLst>
+              <a:ext uri="{FF2B5EF4-FFF2-40B4-BE49-F238E27FC236}">
+                <a16:creationId xmlns:a16="http://schemas.microsoft.com/office/drawing/2014/main" id="{6F8AC942-B01F-93E3-AB92-706DB42FF46D}"/>
+              </a:ext>
+            </a:extLst>
+          </p:cNvPr>
+          <p:cNvPicPr>
+            <a:picLocks noChangeAspect="1"/>
+          </p:cNvPicPr>
+          <p:nvPr/>
+        </p:nvPicPr>
+        <p:blipFill>
+          <a:blip r:embed="rId6"/>
+          <a:stretch>
+            <a:fillRect/>
+          </a:stretch>
+        </p:blipFill>
+        <p:spPr>
+          <a:xfrm>
+            <a:off x="750111" y="4755549"/>
+            <a:ext cx="8742139" cy="878464"/>
+          </a:xfrm>
+          <a:prstGeom prst="rect">
+            <a:avLst/>
+          </a:prstGeom>
+        </p:spPr>
+      </p:pic>
+      <p:pic>
+        <p:nvPicPr>
+          <p:cNvPr id="20" name="Picture 19">
+            <a:extLst>
+              <a:ext uri="{FF2B5EF4-FFF2-40B4-BE49-F238E27FC236}">
+                <a16:creationId xmlns:a16="http://schemas.microsoft.com/office/drawing/2014/main" id="{C092EB68-15C1-8E17-12E6-C3A3D5D6C013}"/>
+              </a:ext>
+            </a:extLst>
+          </p:cNvPr>
+          <p:cNvPicPr>
+            <a:picLocks noChangeAspect="1"/>
+          </p:cNvPicPr>
+          <p:nvPr/>
+        </p:nvPicPr>
+        <p:blipFill>
+          <a:blip r:embed="rId7"/>
+          <a:stretch>
+            <a:fillRect/>
+          </a:stretch>
+        </p:blipFill>
+        <p:spPr>
+          <a:xfrm>
+            <a:off x="9669415" y="4905320"/>
+            <a:ext cx="2391388" cy="1952680"/>
+          </a:xfrm>
+          <a:prstGeom prst="rect">
+            <a:avLst/>
+          </a:prstGeom>
+        </p:spPr>
+      </p:pic>
+    </p:spTree>
+    <p:extLst>
+      <p:ext uri="{BB962C8B-B14F-4D97-AF65-F5344CB8AC3E}">
+        <p14:creationId xmlns:p14="http://schemas.microsoft.com/office/powerpoint/2010/main" val="1189669103"/>
+      </p:ext>
+    </p:extLst>
+  </p:cSld>
+  <p:clrMapOvr>
+    <a:masterClrMapping/>
+  </p:clrMapOvr>
+</p:sld>
+</file>
+
+<file path=ppt/slides/slide27.xml><?xml version="1.0" encoding="utf-8"?>
+<p:sld xmlns:a="http://schemas.openxmlformats.org/drawingml/2006/main" xmlns:r="http://schemas.openxmlformats.org/officeDocument/2006/relationships" xmlns:p="http://schemas.openxmlformats.org/presentationml/2006/main">
+  <p:cSld>
+    <p:spTree>
+      <p:nvGrpSpPr>
+        <p:cNvPr id="1" name="">
+          <a:extLst>
+            <a:ext uri="{FF2B5EF4-FFF2-40B4-BE49-F238E27FC236}">
+              <a16:creationId xmlns:a16="http://schemas.microsoft.com/office/drawing/2014/main" id="{7F2114F8-1980-21C3-2601-91E42C83856B}"/>
+            </a:ext>
+          </a:extLst>
+        </p:cNvPr>
+        <p:cNvGrpSpPr/>
+        <p:nvPr/>
+      </p:nvGrpSpPr>
+      <p:grpSpPr>
+        <a:xfrm>
+          <a:off x="0" y="0"/>
+          <a:ext cx="0" cy="0"/>
+          <a:chOff x="0" y="0"/>
+          <a:chExt cx="0" cy="0"/>
+        </a:xfrm>
+      </p:grpSpPr>
+      <p:sp>
+        <p:nvSpPr>
+          <p:cNvPr id="2" name="Title 1">
+            <a:extLst>
+              <a:ext uri="{FF2B5EF4-FFF2-40B4-BE49-F238E27FC236}">
+                <a16:creationId xmlns:a16="http://schemas.microsoft.com/office/drawing/2014/main" id="{668C16E4-AA84-255D-781F-9139AA81E032}"/>
+              </a:ext>
+            </a:extLst>
+          </p:cNvPr>
+          <p:cNvSpPr>
+            <a:spLocks noGrp="1"/>
+          </p:cNvSpPr>
+          <p:nvPr>
+            <p:ph type="title"/>
+          </p:nvPr>
+        </p:nvSpPr>
+        <p:spPr>
+          <a:xfrm>
+            <a:off x="838200" y="365126"/>
+            <a:ext cx="10515600" cy="947308"/>
+          </a:xfrm>
+        </p:spPr>
+        <p:txBody>
+          <a:bodyPr/>
+          <a:lstStyle/>
+          <a:p>
+            <a:pPr algn="ctr"/>
+            <a:r>
+              <a:rPr lang="en-US" dirty="0">
+                <a:latin typeface="Aharoni" panose="02010803020104030203" pitchFamily="2" charset="-79"/>
+                <a:cs typeface="Aharoni" panose="02010803020104030203" pitchFamily="2" charset="-79"/>
+              </a:rPr>
+              <a:t>Adding Color</a:t>
+            </a:r>
+          </a:p>
+        </p:txBody>
+      </p:sp>
+      <p:cxnSp>
+        <p:nvCxnSpPr>
+          <p:cNvPr id="5" name="Straight Connector 4">
+            <a:extLst>
+              <a:ext uri="{FF2B5EF4-FFF2-40B4-BE49-F238E27FC236}">
+                <a16:creationId xmlns:a16="http://schemas.microsoft.com/office/drawing/2014/main" id="{77491040-ADA1-E9B9-A6CE-4396D26D1707}"/>
               </a:ext>
             </a:extLst>
           </p:cNvPr>
@@ -8060,7 +9386,7 @@
           <p:cNvPr id="6" name="Content Placeholder 5">
             <a:extLst>
               <a:ext uri="{FF2B5EF4-FFF2-40B4-BE49-F238E27FC236}">
-                <a16:creationId xmlns:a16="http://schemas.microsoft.com/office/drawing/2014/main" id="{3E73EA4C-32E1-8962-435A-A79D2F39CACE}"/>
+                <a16:creationId xmlns:a16="http://schemas.microsoft.com/office/drawing/2014/main" id="{3093353F-E493-7B8D-5A10-A396ADB5577B}"/>
               </a:ext>
             </a:extLst>
           </p:cNvPr>
@@ -8092,7 +9418,7 @@
           <p:cNvPr id="8" name="Picture 7">
             <a:extLst>
               <a:ext uri="{FF2B5EF4-FFF2-40B4-BE49-F238E27FC236}">
-                <a16:creationId xmlns:a16="http://schemas.microsoft.com/office/drawing/2014/main" id="{733B7DD3-AC41-E81E-19FD-DF5E3F605248}"/>
+                <a16:creationId xmlns:a16="http://schemas.microsoft.com/office/drawing/2014/main" id="{818EC883-E045-6B4F-8098-651B1C783D8A}"/>
               </a:ext>
             </a:extLst>
           </p:cNvPr>
@@ -8122,7 +9448,7 @@
           <p:cNvPr id="9" name="TextBox 8">
             <a:extLst>
               <a:ext uri="{FF2B5EF4-FFF2-40B4-BE49-F238E27FC236}">
-                <a16:creationId xmlns:a16="http://schemas.microsoft.com/office/drawing/2014/main" id="{6540DF65-0E34-62E4-90C7-E3C674715A7C}"/>
+                <a16:creationId xmlns:a16="http://schemas.microsoft.com/office/drawing/2014/main" id="{1957270A-451B-763F-6E45-563B18B748FB}"/>
               </a:ext>
             </a:extLst>
           </p:cNvPr>
@@ -8203,7 +9529,7 @@
     </p:spTree>
     <p:extLst>
       <p:ext uri="{BB962C8B-B14F-4D97-AF65-F5344CB8AC3E}">
-        <p14:creationId xmlns:p14="http://schemas.microsoft.com/office/powerpoint/2010/main" val="1189669103"/>
+        <p14:creationId xmlns:p14="http://schemas.microsoft.com/office/powerpoint/2010/main" val="243435533"/>
       </p:ext>
     </p:extLst>
   </p:cSld>
@@ -8213,7 +9539,7 @@
 </p:sld>
 </file>
 
-<file path=ppt/slides/slide22.xml><?xml version="1.0" encoding="utf-8"?>
+<file path=ppt/slides/slide28.xml><?xml version="1.0" encoding="utf-8"?>
 <p:sld xmlns:a="http://schemas.openxmlformats.org/drawingml/2006/main" xmlns:r="http://schemas.openxmlformats.org/officeDocument/2006/relationships" xmlns:p="http://schemas.openxmlformats.org/presentationml/2006/main">
   <p:cSld>
     <p:spTree>
@@ -8452,7 +9778,7 @@
 </p:sld>
 </file>
 
-<file path=ppt/slides/slide23.xml><?xml version="1.0" encoding="utf-8"?>
+<file path=ppt/slides/slide29.xml><?xml version="1.0" encoding="utf-8"?>
 <p:sld xmlns:a="http://schemas.openxmlformats.org/drawingml/2006/main" xmlns:r="http://schemas.openxmlformats.org/officeDocument/2006/relationships" xmlns:p="http://schemas.openxmlformats.org/presentationml/2006/main">
   <p:cSld>
     <p:spTree>
@@ -8718,7 +10044,356 @@
 </p:sld>
 </file>
 
-<file path=ppt/slides/slide24.xml><?xml version="1.0" encoding="utf-8"?>
+<file path=ppt/slides/slide3.xml><?xml version="1.0" encoding="utf-8"?>
+<p:sld xmlns:a="http://schemas.openxmlformats.org/drawingml/2006/main" xmlns:r="http://schemas.openxmlformats.org/officeDocument/2006/relationships" xmlns:p="http://schemas.openxmlformats.org/presentationml/2006/main">
+  <p:cSld>
+    <p:spTree>
+      <p:nvGrpSpPr>
+        <p:cNvPr id="1" name=""/>
+        <p:cNvGrpSpPr/>
+        <p:nvPr/>
+      </p:nvGrpSpPr>
+      <p:grpSpPr>
+        <a:xfrm>
+          <a:off x="0" y="0"/>
+          <a:ext cx="0" cy="0"/>
+          <a:chOff x="0" y="0"/>
+          <a:chExt cx="0" cy="0"/>
+        </a:xfrm>
+      </p:grpSpPr>
+      <p:pic>
+        <p:nvPicPr>
+          <p:cNvPr id="5" name="Content Placeholder 4">
+            <a:extLst>
+              <a:ext uri="{FF2B5EF4-FFF2-40B4-BE49-F238E27FC236}">
+                <a16:creationId xmlns:a16="http://schemas.microsoft.com/office/drawing/2014/main" id="{F2C82E05-41E8-179B-F588-DF759186E636}"/>
+              </a:ext>
+            </a:extLst>
+          </p:cNvPr>
+          <p:cNvPicPr>
+            <a:picLocks noGrp="1" noChangeAspect="1"/>
+          </p:cNvPicPr>
+          <p:nvPr>
+            <p:ph idx="1"/>
+          </p:nvPr>
+        </p:nvPicPr>
+        <p:blipFill>
+          <a:blip r:embed="rId2"/>
+          <a:stretch>
+            <a:fillRect/>
+          </a:stretch>
+        </p:blipFill>
+        <p:spPr>
+          <a:xfrm>
+            <a:off x="562779" y="251198"/>
+            <a:ext cx="11148151" cy="927497"/>
+          </a:xfrm>
+          <a:prstGeom prst="rect">
+            <a:avLst/>
+          </a:prstGeom>
+        </p:spPr>
+      </p:pic>
+      <p:sp>
+        <p:nvSpPr>
+          <p:cNvPr id="6" name="TextBox 5">
+            <a:extLst>
+              <a:ext uri="{FF2B5EF4-FFF2-40B4-BE49-F238E27FC236}">
+                <a16:creationId xmlns:a16="http://schemas.microsoft.com/office/drawing/2014/main" id="{E01D217D-A8D8-F4D3-48F9-5AACE6CAEFB2}"/>
+              </a:ext>
+            </a:extLst>
+          </p:cNvPr>
+          <p:cNvSpPr txBox="1"/>
+          <p:nvPr/>
+        </p:nvSpPr>
+        <p:spPr>
+          <a:xfrm>
+            <a:off x="560024" y="1355075"/>
+            <a:ext cx="11071952" cy="646331"/>
+          </a:xfrm>
+          <a:prstGeom prst="rect">
+            <a:avLst/>
+          </a:prstGeom>
+          <a:noFill/>
+        </p:spPr>
+        <p:txBody>
+          <a:bodyPr wrap="square" rtlCol="0">
+            <a:spAutoFit/>
+          </a:bodyPr>
+          <a:lstStyle/>
+          <a:p>
+            <a:pPr marL="285750" indent="-285750">
+              <a:buFont typeface="Arial" panose="020B0604020202020204" pitchFamily="34" charset="0"/>
+              <a:buChar char="•"/>
+            </a:pPr>
+            <a:r>
+              <a:rPr lang="en-US" dirty="0">
+                <a:latin typeface="Times New Roman" panose="02020603050405020304" pitchFamily="18" charset="0"/>
+                <a:cs typeface="Times New Roman" panose="02020603050405020304" pitchFamily="18" charset="0"/>
+              </a:rPr>
+              <a:t>You only need to run </a:t>
+            </a:r>
+            <a:r>
+              <a:rPr lang="en-US" dirty="0" err="1">
+                <a:latin typeface="Courier New" panose="02070309020205020404" pitchFamily="49" charset="0"/>
+                <a:cs typeface="Courier New" panose="02070309020205020404" pitchFamily="49" charset="0"/>
+              </a:rPr>
+              <a:t>install.packages</a:t>
+            </a:r>
+            <a:r>
+              <a:rPr lang="en-US" dirty="0">
+                <a:latin typeface="Courier New" panose="02070309020205020404" pitchFamily="49" charset="0"/>
+                <a:cs typeface="Courier New" panose="02070309020205020404" pitchFamily="49" charset="0"/>
+              </a:rPr>
+              <a:t>() </a:t>
+            </a:r>
+            <a:r>
+              <a:rPr lang="en-US" dirty="0">
+                <a:latin typeface="Times New Roman" panose="02020603050405020304" pitchFamily="18" charset="0"/>
+                <a:cs typeface="Times New Roman" panose="02020603050405020304" pitchFamily="18" charset="0"/>
+              </a:rPr>
+              <a:t>once per device for every package. Once it is installed, you just call it with library. </a:t>
+            </a:r>
+          </a:p>
+        </p:txBody>
+      </p:sp>
+      <p:pic>
+        <p:nvPicPr>
+          <p:cNvPr id="8" name="Picture 7">
+            <a:extLst>
+              <a:ext uri="{FF2B5EF4-FFF2-40B4-BE49-F238E27FC236}">
+                <a16:creationId xmlns:a16="http://schemas.microsoft.com/office/drawing/2014/main" id="{B6B3DFB0-CE5A-A32E-0206-43078A0C5745}"/>
+              </a:ext>
+            </a:extLst>
+          </p:cNvPr>
+          <p:cNvPicPr>
+            <a:picLocks noChangeAspect="1"/>
+          </p:cNvPicPr>
+          <p:nvPr/>
+        </p:nvPicPr>
+        <p:blipFill>
+          <a:blip r:embed="rId3"/>
+          <a:stretch>
+            <a:fillRect/>
+          </a:stretch>
+        </p:blipFill>
+        <p:spPr>
+          <a:xfrm>
+            <a:off x="560023" y="2001406"/>
+            <a:ext cx="11071951" cy="1681361"/>
+          </a:xfrm>
+          <a:prstGeom prst="rect">
+            <a:avLst/>
+          </a:prstGeom>
+        </p:spPr>
+      </p:pic>
+      <p:sp>
+        <p:nvSpPr>
+          <p:cNvPr id="9" name="TextBox 8">
+            <a:extLst>
+              <a:ext uri="{FF2B5EF4-FFF2-40B4-BE49-F238E27FC236}">
+                <a16:creationId xmlns:a16="http://schemas.microsoft.com/office/drawing/2014/main" id="{D4974836-8B8F-3805-17FC-F306B67125AB}"/>
+              </a:ext>
+            </a:extLst>
+          </p:cNvPr>
+          <p:cNvSpPr txBox="1"/>
+          <p:nvPr/>
+        </p:nvSpPr>
+        <p:spPr>
+          <a:xfrm>
+            <a:off x="560022" y="3859147"/>
+            <a:ext cx="11071952" cy="1200329"/>
+          </a:xfrm>
+          <a:prstGeom prst="rect">
+            <a:avLst/>
+          </a:prstGeom>
+          <a:noFill/>
+        </p:spPr>
+        <p:txBody>
+          <a:bodyPr wrap="square" rtlCol="0">
+            <a:spAutoFit/>
+          </a:bodyPr>
+          <a:lstStyle/>
+          <a:p>
+            <a:pPr marL="285750" indent="-285750">
+              <a:buFont typeface="Arial" panose="020B0604020202020204" pitchFamily="34" charset="0"/>
+              <a:buChar char="•"/>
+            </a:pPr>
+            <a:r>
+              <a:rPr lang="en-US" dirty="0">
+                <a:latin typeface="Times New Roman" panose="02020603050405020304" pitchFamily="18" charset="0"/>
+                <a:cs typeface="Times New Roman" panose="02020603050405020304" pitchFamily="18" charset="0"/>
+              </a:rPr>
+              <a:t>You can remove all unwanted variables in one select. I might rename the variables too. </a:t>
+            </a:r>
+          </a:p>
+          <a:p>
+            <a:pPr marL="285750" indent="-285750">
+              <a:buFont typeface="Arial" panose="020B0604020202020204" pitchFamily="34" charset="0"/>
+              <a:buChar char="•"/>
+            </a:pPr>
+            <a:r>
+              <a:rPr lang="en-US" dirty="0">
+                <a:latin typeface="Courier New" panose="02070309020205020404" pitchFamily="49" charset="0"/>
+                <a:cs typeface="Courier New" panose="02070309020205020404" pitchFamily="49" charset="0"/>
+              </a:rPr>
+              <a:t>select(-c(</a:t>
+            </a:r>
+            <a:r>
+              <a:rPr lang="en-US" dirty="0" err="1">
+                <a:latin typeface="Courier New" panose="02070309020205020404" pitchFamily="49" charset="0"/>
+                <a:cs typeface="Courier New" panose="02070309020205020404" pitchFamily="49" charset="0"/>
+              </a:rPr>
+              <a:t>WarNum</a:t>
+            </a:r>
+            <a:r>
+              <a:rPr lang="en-US" dirty="0">
+                <a:latin typeface="Courier New" panose="02070309020205020404" pitchFamily="49" charset="0"/>
+                <a:cs typeface="Courier New" panose="02070309020205020404" pitchFamily="49" charset="0"/>
+              </a:rPr>
+              <a:t>, </a:t>
+            </a:r>
+            <a:r>
+              <a:rPr lang="en-US" dirty="0" err="1">
+                <a:latin typeface="Courier New" panose="02070309020205020404" pitchFamily="49" charset="0"/>
+                <a:cs typeface="Courier New" panose="02070309020205020404" pitchFamily="49" charset="0"/>
+              </a:rPr>
+              <a:t>WarType</a:t>
+            </a:r>
+            <a:r>
+              <a:rPr lang="en-US" dirty="0">
+                <a:latin typeface="Courier New" panose="02070309020205020404" pitchFamily="49" charset="0"/>
+                <a:cs typeface="Courier New" panose="02070309020205020404" pitchFamily="49" charset="0"/>
+              </a:rPr>
+              <a:t>, </a:t>
+            </a:r>
+            <a:r>
+              <a:rPr lang="en-US" dirty="0" err="1">
+                <a:latin typeface="Courier New" panose="02070309020205020404" pitchFamily="49" charset="0"/>
+                <a:cs typeface="Courier New" panose="02070309020205020404" pitchFamily="49" charset="0"/>
+              </a:rPr>
+              <a:t>StartMonth</a:t>
+            </a:r>
+            <a:r>
+              <a:rPr lang="en-US" dirty="0">
+                <a:latin typeface="Courier New" panose="02070309020205020404" pitchFamily="49" charset="0"/>
+                <a:cs typeface="Courier New" panose="02070309020205020404" pitchFamily="49" charset="0"/>
+              </a:rPr>
+              <a:t>, </a:t>
+            </a:r>
+            <a:r>
+              <a:rPr lang="en-US" dirty="0" err="1">
+                <a:latin typeface="Courier New" panose="02070309020205020404" pitchFamily="49" charset="0"/>
+                <a:cs typeface="Courier New" panose="02070309020205020404" pitchFamily="49" charset="0"/>
+              </a:rPr>
+              <a:t>StartDay</a:t>
+            </a:r>
+            <a:r>
+              <a:rPr lang="en-US" dirty="0">
+                <a:latin typeface="Courier New" panose="02070309020205020404" pitchFamily="49" charset="0"/>
+                <a:cs typeface="Courier New" panose="02070309020205020404" pitchFamily="49" charset="0"/>
+              </a:rPr>
+              <a:t>, </a:t>
+            </a:r>
+            <a:r>
+              <a:rPr lang="en-US" dirty="0" err="1">
+                <a:latin typeface="Courier New" panose="02070309020205020404" pitchFamily="49" charset="0"/>
+                <a:cs typeface="Courier New" panose="02070309020205020404" pitchFamily="49" charset="0"/>
+              </a:rPr>
+              <a:t>EndMonth</a:t>
+            </a:r>
+            <a:r>
+              <a:rPr lang="en-US" dirty="0">
+                <a:latin typeface="Courier New" panose="02070309020205020404" pitchFamily="49" charset="0"/>
+                <a:cs typeface="Courier New" panose="02070309020205020404" pitchFamily="49" charset="0"/>
+              </a:rPr>
+              <a:t>, </a:t>
+            </a:r>
+            <a:r>
+              <a:rPr lang="en-US" dirty="0" err="1">
+                <a:latin typeface="Courier New" panose="02070309020205020404" pitchFamily="49" charset="0"/>
+                <a:cs typeface="Courier New" panose="02070309020205020404" pitchFamily="49" charset="0"/>
+              </a:rPr>
+              <a:t>EndDay</a:t>
+            </a:r>
+            <a:r>
+              <a:rPr lang="en-US" dirty="0">
+                <a:latin typeface="Courier New" panose="02070309020205020404" pitchFamily="49" charset="0"/>
+                <a:cs typeface="Courier New" panose="02070309020205020404" pitchFamily="49" charset="0"/>
+              </a:rPr>
+              <a:t>, </a:t>
+            </a:r>
+            <a:r>
+              <a:rPr lang="en-US" dirty="0" err="1">
+                <a:latin typeface="Courier New" panose="02070309020205020404" pitchFamily="49" charset="0"/>
+                <a:cs typeface="Courier New" panose="02070309020205020404" pitchFamily="49" charset="0"/>
+              </a:rPr>
+              <a:t>TransFrom</a:t>
+            </a:r>
+            <a:r>
+              <a:rPr lang="en-US" dirty="0">
+                <a:latin typeface="Courier New" panose="02070309020205020404" pitchFamily="49" charset="0"/>
+                <a:cs typeface="Courier New" panose="02070309020205020404" pitchFamily="49" charset="0"/>
+              </a:rPr>
+              <a:t>, </a:t>
+            </a:r>
+            <a:r>
+              <a:rPr lang="en-US" dirty="0" err="1">
+                <a:latin typeface="Courier New" panose="02070309020205020404" pitchFamily="49" charset="0"/>
+                <a:cs typeface="Courier New" panose="02070309020205020404" pitchFamily="49" charset="0"/>
+              </a:rPr>
+              <a:t>TransTo</a:t>
+            </a:r>
+            <a:r>
+              <a:rPr lang="en-US" dirty="0">
+                <a:latin typeface="Courier New" panose="02070309020205020404" pitchFamily="49" charset="0"/>
+                <a:cs typeface="Courier New" panose="02070309020205020404" pitchFamily="49" charset="0"/>
+              </a:rPr>
+              <a:t>, Version)) </a:t>
+            </a:r>
+          </a:p>
+          <a:p>
+            <a:pPr marL="285750" indent="-285750">
+              <a:buFont typeface="Arial" panose="020B0604020202020204" pitchFamily="34" charset="0"/>
+              <a:buChar char="•"/>
+            </a:pPr>
+            <a:r>
+              <a:rPr lang="en-US" dirty="0">
+                <a:latin typeface="Times New Roman" panose="02020603050405020304" pitchFamily="18" charset="0"/>
+                <a:cs typeface="Times New Roman" panose="02020603050405020304" pitchFamily="18" charset="0"/>
+              </a:rPr>
+              <a:t>Also, you can do </a:t>
+            </a:r>
+            <a:r>
+              <a:rPr lang="en-US" dirty="0">
+                <a:latin typeface="Courier New" panose="02070309020205020404" pitchFamily="49" charset="0"/>
+                <a:cs typeface="Courier New" panose="02070309020205020404" pitchFamily="49" charset="0"/>
+              </a:rPr>
+              <a:t>select(!c()). </a:t>
+            </a:r>
+            <a:r>
+              <a:rPr lang="en-US" dirty="0">
+                <a:latin typeface="Times New Roman" panose="02020603050405020304" pitchFamily="18" charset="0"/>
+                <a:cs typeface="Times New Roman" panose="02020603050405020304" pitchFamily="18" charset="0"/>
+              </a:rPr>
+              <a:t>I actually did not know this. You taught me something new!! </a:t>
+            </a:r>
+          </a:p>
+        </p:txBody>
+      </p:sp>
+    </p:spTree>
+    <p:extLst>
+      <p:ext uri="{BB962C8B-B14F-4D97-AF65-F5344CB8AC3E}">
+        <p14:creationId xmlns:p14="http://schemas.microsoft.com/office/powerpoint/2010/main" val="4043002054"/>
+      </p:ext>
+    </p:extLst>
+  </p:cSld>
+  <p:clrMapOvr>
+    <a:masterClrMapping/>
+  </p:clrMapOvr>
+</p:sld>
+</file>
+
+<file path=ppt/slides/slide30.xml><?xml version="1.0" encoding="utf-8"?>
 <p:sld xmlns:a="http://schemas.openxmlformats.org/drawingml/2006/main" xmlns:r="http://schemas.openxmlformats.org/officeDocument/2006/relationships" xmlns:p="http://schemas.openxmlformats.org/presentationml/2006/main">
   <p:cSld>
     <p:spTree>
@@ -8950,7 +10625,7 @@
 </p:sld>
 </file>
 
-<file path=ppt/slides/slide25.xml><?xml version="1.0" encoding="utf-8"?>
+<file path=ppt/slides/slide31.xml><?xml version="1.0" encoding="utf-8"?>
 <p:sld xmlns:a="http://schemas.openxmlformats.org/drawingml/2006/main" xmlns:r="http://schemas.openxmlformats.org/officeDocument/2006/relationships" xmlns:p="http://schemas.openxmlformats.org/presentationml/2006/main">
   <p:cSld>
     <p:spTree>
@@ -9202,7 +10877,7 @@
 </p:sld>
 </file>
 
-<file path=ppt/slides/slide26.xml><?xml version="1.0" encoding="utf-8"?>
+<file path=ppt/slides/slide32.xml><?xml version="1.0" encoding="utf-8"?>
 <p:sld xmlns:a="http://schemas.openxmlformats.org/drawingml/2006/main" xmlns:r="http://schemas.openxmlformats.org/officeDocument/2006/relationships" xmlns:p="http://schemas.openxmlformats.org/presentationml/2006/main">
   <p:cSld>
     <p:spTree>
@@ -9459,7 +11134,7 @@
 </p:sld>
 </file>
 
-<file path=ppt/slides/slide27.xml><?xml version="1.0" encoding="utf-8"?>
+<file path=ppt/slides/slide33.xml><?xml version="1.0" encoding="utf-8"?>
 <p:sld xmlns:a="http://schemas.openxmlformats.org/drawingml/2006/main" xmlns:r="http://schemas.openxmlformats.org/officeDocument/2006/relationships" xmlns:p="http://schemas.openxmlformats.org/presentationml/2006/main">
   <p:cSld>
     <p:spTree>
@@ -9727,7 +11402,7 @@
 </p:sld>
 </file>
 
-<file path=ppt/slides/slide28.xml><?xml version="1.0" encoding="utf-8"?>
+<file path=ppt/slides/slide34.xml><?xml version="1.0" encoding="utf-8"?>
 <p:sld xmlns:a="http://schemas.openxmlformats.org/drawingml/2006/main" xmlns:r="http://schemas.openxmlformats.org/officeDocument/2006/relationships" xmlns:p="http://schemas.openxmlformats.org/presentationml/2006/main">
   <p:cSld>
     <p:spTree>
@@ -9948,6 +11623,37 @@
               <a:t>Add a line to the plot.</a:t>
             </a:r>
           </a:p>
+          <a:p>
+            <a:pPr lvl="1"/>
+            <a:r>
+              <a:rPr lang="en-US" dirty="0">
+                <a:latin typeface="Times New Roman" panose="02020603050405020304" pitchFamily="18" charset="0"/>
+                <a:cs typeface="Times New Roman" panose="02020603050405020304" pitchFamily="18" charset="0"/>
+              </a:rPr>
+              <a:t>Change the theme to </a:t>
+            </a:r>
+            <a:r>
+              <a:rPr lang="en-US" dirty="0" err="1">
+                <a:latin typeface="Courier New" panose="02070309020205020404" pitchFamily="49" charset="0"/>
+                <a:cs typeface="Courier New" panose="02070309020205020404" pitchFamily="49" charset="0"/>
+              </a:rPr>
+              <a:t>theme_bw</a:t>
+            </a:r>
+            <a:r>
+              <a:rPr lang="en-US" dirty="0">
+                <a:latin typeface="Courier New" panose="02070309020205020404" pitchFamily="49" charset="0"/>
+                <a:cs typeface="Courier New" panose="02070309020205020404" pitchFamily="49" charset="0"/>
+              </a:rPr>
+              <a:t>()</a:t>
+            </a:r>
+          </a:p>
+          <a:p>
+            <a:pPr lvl="1"/>
+            <a:endParaRPr lang="en-US" dirty="0">
+              <a:latin typeface="Times New Roman" panose="02020603050405020304" pitchFamily="18" charset="0"/>
+              <a:cs typeface="Times New Roman" panose="02020603050405020304" pitchFamily="18" charset="0"/>
+            </a:endParaRPr>
+          </a:p>
         </p:txBody>
       </p:sp>
     </p:spTree>
@@ -9963,7 +11669,1020 @@
 </p:sld>
 </file>
 
-<file path=ppt/slides/slide3.xml><?xml version="1.0" encoding="utf-8"?>
+<file path=ppt/slides/slide35.xml><?xml version="1.0" encoding="utf-8"?>
+<p:sld xmlns:a="http://schemas.openxmlformats.org/drawingml/2006/main" xmlns:r="http://schemas.openxmlformats.org/officeDocument/2006/relationships" xmlns:p="http://schemas.openxmlformats.org/presentationml/2006/main">
+  <p:cSld>
+    <p:spTree>
+      <p:nvGrpSpPr>
+        <p:cNvPr id="1" name="">
+          <a:extLst>
+            <a:ext uri="{FF2B5EF4-FFF2-40B4-BE49-F238E27FC236}">
+              <a16:creationId xmlns:a16="http://schemas.microsoft.com/office/drawing/2014/main" id="{81809AEA-844C-16A4-7094-043D3AEF729A}"/>
+            </a:ext>
+          </a:extLst>
+        </p:cNvPr>
+        <p:cNvGrpSpPr/>
+        <p:nvPr/>
+      </p:nvGrpSpPr>
+      <p:grpSpPr>
+        <a:xfrm>
+          <a:off x="0" y="0"/>
+          <a:ext cx="0" cy="0"/>
+          <a:chOff x="0" y="0"/>
+          <a:chExt cx="0" cy="0"/>
+        </a:xfrm>
+      </p:grpSpPr>
+      <p:sp>
+        <p:nvSpPr>
+          <p:cNvPr id="2" name="Title 1">
+            <a:extLst>
+              <a:ext uri="{FF2B5EF4-FFF2-40B4-BE49-F238E27FC236}">
+                <a16:creationId xmlns:a16="http://schemas.microsoft.com/office/drawing/2014/main" id="{1F9B728D-5F71-BDB0-0DF3-64E075E0CCDC}"/>
+              </a:ext>
+            </a:extLst>
+          </p:cNvPr>
+          <p:cNvSpPr>
+            <a:spLocks noGrp="1"/>
+          </p:cNvSpPr>
+          <p:nvPr>
+            <p:ph type="title"/>
+          </p:nvPr>
+        </p:nvSpPr>
+        <p:spPr>
+          <a:xfrm>
+            <a:off x="838200" y="365126"/>
+            <a:ext cx="10515600" cy="947308"/>
+          </a:xfrm>
+        </p:spPr>
+        <p:txBody>
+          <a:bodyPr/>
+          <a:lstStyle/>
+          <a:p>
+            <a:pPr algn="ctr"/>
+            <a:r>
+              <a:rPr lang="en-US" dirty="0">
+                <a:latin typeface="Aharoni" panose="02010803020104030203" pitchFamily="2" charset="-79"/>
+                <a:cs typeface="Aharoni" panose="02010803020104030203" pitchFamily="2" charset="-79"/>
+              </a:rPr>
+              <a:t>If Extra Time: Overleaf Introduction</a:t>
+            </a:r>
+          </a:p>
+        </p:txBody>
+      </p:sp>
+      <p:cxnSp>
+        <p:nvCxnSpPr>
+          <p:cNvPr id="5" name="Straight Connector 4">
+            <a:extLst>
+              <a:ext uri="{FF2B5EF4-FFF2-40B4-BE49-F238E27FC236}">
+                <a16:creationId xmlns:a16="http://schemas.microsoft.com/office/drawing/2014/main" id="{52FB1630-050E-F7D0-BF9F-C115EE68CE29}"/>
+              </a:ext>
+            </a:extLst>
+          </p:cNvPr>
+          <p:cNvCxnSpPr/>
+          <p:nvPr/>
+        </p:nvCxnSpPr>
+        <p:spPr>
+          <a:xfrm>
+            <a:off x="838200" y="1161826"/>
+            <a:ext cx="10515600" cy="0"/>
+          </a:xfrm>
+          <a:prstGeom prst="line">
+            <a:avLst/>
+          </a:prstGeom>
+          <a:ln>
+            <a:solidFill>
+              <a:srgbClr val="C00000"/>
+            </a:solidFill>
+          </a:ln>
+        </p:spPr>
+        <p:style>
+          <a:lnRef idx="2">
+            <a:schemeClr val="accent1"/>
+          </a:lnRef>
+          <a:fillRef idx="0">
+            <a:schemeClr val="accent1"/>
+          </a:fillRef>
+          <a:effectRef idx="1">
+            <a:schemeClr val="accent1"/>
+          </a:effectRef>
+          <a:fontRef idx="minor">
+            <a:schemeClr val="tx1"/>
+          </a:fontRef>
+        </p:style>
+      </p:cxnSp>
+      <p:sp>
+        <p:nvSpPr>
+          <p:cNvPr id="4" name="Content Placeholder 3">
+            <a:extLst>
+              <a:ext uri="{FF2B5EF4-FFF2-40B4-BE49-F238E27FC236}">
+                <a16:creationId xmlns:a16="http://schemas.microsoft.com/office/drawing/2014/main" id="{C9C27B87-1E2D-B068-011C-6227FF39D1B6}"/>
+              </a:ext>
+            </a:extLst>
+          </p:cNvPr>
+          <p:cNvSpPr>
+            <a:spLocks noGrp="1"/>
+          </p:cNvSpPr>
+          <p:nvPr>
+            <p:ph idx="1"/>
+          </p:nvPr>
+        </p:nvSpPr>
+        <p:spPr>
+          <a:xfrm>
+            <a:off x="838200" y="1312434"/>
+            <a:ext cx="10515600" cy="4864529"/>
+          </a:xfrm>
+        </p:spPr>
+        <p:txBody>
+          <a:bodyPr/>
+          <a:lstStyle/>
+          <a:p>
+            <a:endParaRPr lang="en-US" dirty="0">
+              <a:latin typeface="Times New Roman" panose="02020603050405020304" pitchFamily="18" charset="0"/>
+              <a:cs typeface="Times New Roman" panose="02020603050405020304" pitchFamily="18" charset="0"/>
+            </a:endParaRPr>
+          </a:p>
+        </p:txBody>
+      </p:sp>
+    </p:spTree>
+    <p:extLst>
+      <p:ext uri="{BB962C8B-B14F-4D97-AF65-F5344CB8AC3E}">
+        <p14:creationId xmlns:p14="http://schemas.microsoft.com/office/powerpoint/2010/main" val="446568511"/>
+      </p:ext>
+    </p:extLst>
+  </p:cSld>
+  <p:clrMapOvr>
+    <a:masterClrMapping/>
+  </p:clrMapOvr>
+</p:sld>
+</file>
+
+<file path=ppt/slides/slide4.xml><?xml version="1.0" encoding="utf-8"?>
+<p:sld xmlns:a="http://schemas.openxmlformats.org/drawingml/2006/main" xmlns:r="http://schemas.openxmlformats.org/officeDocument/2006/relationships" xmlns:p="http://schemas.openxmlformats.org/presentationml/2006/main">
+  <p:cSld>
+    <p:spTree>
+      <p:nvGrpSpPr>
+        <p:cNvPr id="1" name=""/>
+        <p:cNvGrpSpPr/>
+        <p:nvPr/>
+      </p:nvGrpSpPr>
+      <p:grpSpPr>
+        <a:xfrm>
+          <a:off x="0" y="0"/>
+          <a:ext cx="0" cy="0"/>
+          <a:chOff x="0" y="0"/>
+          <a:chExt cx="0" cy="0"/>
+        </a:xfrm>
+      </p:grpSpPr>
+      <p:pic>
+        <p:nvPicPr>
+          <p:cNvPr id="5" name="Picture 4">
+            <a:extLst>
+              <a:ext uri="{FF2B5EF4-FFF2-40B4-BE49-F238E27FC236}">
+                <a16:creationId xmlns:a16="http://schemas.microsoft.com/office/drawing/2014/main" id="{5C0D25D5-499C-EDC6-45D5-91B2F834215E}"/>
+              </a:ext>
+            </a:extLst>
+          </p:cNvPr>
+          <p:cNvPicPr>
+            <a:picLocks noChangeAspect="1"/>
+          </p:cNvPicPr>
+          <p:nvPr/>
+        </p:nvPicPr>
+        <p:blipFill>
+          <a:blip r:embed="rId2"/>
+          <a:stretch>
+            <a:fillRect/>
+          </a:stretch>
+        </p:blipFill>
+        <p:spPr>
+          <a:xfrm>
+            <a:off x="79925" y="263084"/>
+            <a:ext cx="11717007" cy="671187"/>
+          </a:xfrm>
+          <a:prstGeom prst="rect">
+            <a:avLst/>
+          </a:prstGeom>
+        </p:spPr>
+      </p:pic>
+      <p:sp>
+        <p:nvSpPr>
+          <p:cNvPr id="6" name="TextBox 5">
+            <a:extLst>
+              <a:ext uri="{FF2B5EF4-FFF2-40B4-BE49-F238E27FC236}">
+                <a16:creationId xmlns:a16="http://schemas.microsoft.com/office/drawing/2014/main" id="{33A140C5-0F00-C3B8-5F6D-09381172A026}"/>
+              </a:ext>
+            </a:extLst>
+          </p:cNvPr>
+          <p:cNvSpPr txBox="1"/>
+          <p:nvPr/>
+        </p:nvSpPr>
+        <p:spPr>
+          <a:xfrm>
+            <a:off x="164464" y="1049393"/>
+            <a:ext cx="11071952" cy="2308324"/>
+          </a:xfrm>
+          <a:prstGeom prst="rect">
+            <a:avLst/>
+          </a:prstGeom>
+          <a:noFill/>
+        </p:spPr>
+        <p:txBody>
+          <a:bodyPr wrap="square" rtlCol="0">
+            <a:spAutoFit/>
+          </a:bodyPr>
+          <a:lstStyle/>
+          <a:p>
+            <a:pPr marL="285750" indent="-285750">
+              <a:buFont typeface="Arial" panose="020B0604020202020204" pitchFamily="34" charset="0"/>
+              <a:buChar char="•"/>
+            </a:pPr>
+            <a:r>
+              <a:rPr lang="en-US" dirty="0">
+                <a:latin typeface="Times New Roman" panose="02020603050405020304" pitchFamily="18" charset="0"/>
+                <a:cs typeface="Times New Roman" panose="02020603050405020304" pitchFamily="18" charset="0"/>
+              </a:rPr>
+              <a:t>If you use </a:t>
+            </a:r>
+            <a:r>
+              <a:rPr lang="en-US" dirty="0" err="1">
+                <a:latin typeface="Courier New" panose="02070309020205020404" pitchFamily="49" charset="0"/>
+                <a:cs typeface="Courier New" panose="02070309020205020404" pitchFamily="49" charset="0"/>
+              </a:rPr>
+              <a:t>na.omit</a:t>
+            </a:r>
+            <a:r>
+              <a:rPr lang="en-US" dirty="0">
+                <a:latin typeface="Courier New" panose="02070309020205020404" pitchFamily="49" charset="0"/>
+                <a:cs typeface="Courier New" panose="02070309020205020404" pitchFamily="49" charset="0"/>
+              </a:rPr>
+              <a:t>() </a:t>
+            </a:r>
+            <a:r>
+              <a:rPr lang="en-US" dirty="0">
+                <a:latin typeface="Times New Roman" panose="02020603050405020304" pitchFamily="18" charset="0"/>
+                <a:cs typeface="Times New Roman" panose="02020603050405020304" pitchFamily="18" charset="0"/>
+              </a:rPr>
+              <a:t>just be very careful. In this case, after running this line, the data went from 60,000 observations to 35,470. </a:t>
+            </a:r>
+          </a:p>
+          <a:p>
+            <a:pPr marL="285750" indent="-285750">
+              <a:buFont typeface="Arial" panose="020B0604020202020204" pitchFamily="34" charset="0"/>
+              <a:buChar char="•"/>
+            </a:pPr>
+            <a:r>
+              <a:rPr lang="en-US" dirty="0">
+                <a:latin typeface="Times New Roman" panose="02020603050405020304" pitchFamily="18" charset="0"/>
+                <a:cs typeface="Times New Roman" panose="02020603050405020304" pitchFamily="18" charset="0"/>
+              </a:rPr>
+              <a:t>So, it nearly cut the sample size in half. I suggest either keeping them in your data and only removing NAs when you use a certain variable. </a:t>
+            </a:r>
+          </a:p>
+          <a:p>
+            <a:pPr marL="285750" indent="-285750">
+              <a:buFont typeface="Arial" panose="020B0604020202020204" pitchFamily="34" charset="0"/>
+              <a:buChar char="•"/>
+            </a:pPr>
+            <a:r>
+              <a:rPr lang="en-US" dirty="0">
+                <a:latin typeface="Times New Roman" panose="02020603050405020304" pitchFamily="18" charset="0"/>
+                <a:cs typeface="Times New Roman" panose="02020603050405020304" pitchFamily="18" charset="0"/>
+              </a:rPr>
+              <a:t>You will learn more in your methods courses but cutting our sample size can have significant consequences for our estimate. </a:t>
+            </a:r>
+          </a:p>
+          <a:p>
+            <a:pPr marL="285750" indent="-285750">
+              <a:buFont typeface="Arial" panose="020B0604020202020204" pitchFamily="34" charset="0"/>
+              <a:buChar char="•"/>
+            </a:pPr>
+            <a:r>
+              <a:rPr lang="en-US" dirty="0">
+                <a:latin typeface="Times New Roman" panose="02020603050405020304" pitchFamily="18" charset="0"/>
+                <a:cs typeface="Times New Roman" panose="02020603050405020304" pitchFamily="18" charset="0"/>
+              </a:rPr>
+              <a:t>The larger the sample size, the better we can approximate the real population.</a:t>
+            </a:r>
+          </a:p>
+          <a:p>
+            <a:pPr marL="285750" indent="-285750">
+              <a:buFont typeface="Arial" panose="020B0604020202020204" pitchFamily="34" charset="0"/>
+              <a:buChar char="•"/>
+            </a:pPr>
+            <a:r>
+              <a:rPr lang="en-US" dirty="0">
+                <a:latin typeface="Times New Roman" panose="02020603050405020304" pitchFamily="18" charset="0"/>
+                <a:cs typeface="Times New Roman" panose="02020603050405020304" pitchFamily="18" charset="0"/>
+              </a:rPr>
+              <a:t>So, if we cut the sample size, it makes our estimates less precise. </a:t>
+            </a:r>
+          </a:p>
+        </p:txBody>
+      </p:sp>
+      <p:pic>
+        <p:nvPicPr>
+          <p:cNvPr id="8" name="Picture 7">
+            <a:extLst>
+              <a:ext uri="{FF2B5EF4-FFF2-40B4-BE49-F238E27FC236}">
+                <a16:creationId xmlns:a16="http://schemas.microsoft.com/office/drawing/2014/main" id="{F935BD58-7943-C6C4-2565-B421A7E186C9}"/>
+              </a:ext>
+            </a:extLst>
+          </p:cNvPr>
+          <p:cNvPicPr>
+            <a:picLocks noChangeAspect="1"/>
+          </p:cNvPicPr>
+          <p:nvPr/>
+        </p:nvPicPr>
+        <p:blipFill>
+          <a:blip r:embed="rId3"/>
+          <a:stretch>
+            <a:fillRect/>
+          </a:stretch>
+        </p:blipFill>
+        <p:spPr>
+          <a:xfrm>
+            <a:off x="164464" y="3598247"/>
+            <a:ext cx="11589448" cy="940701"/>
+          </a:xfrm>
+          <a:prstGeom prst="rect">
+            <a:avLst/>
+          </a:prstGeom>
+        </p:spPr>
+      </p:pic>
+      <p:sp>
+        <p:nvSpPr>
+          <p:cNvPr id="9" name="TextBox 8">
+            <a:extLst>
+              <a:ext uri="{FF2B5EF4-FFF2-40B4-BE49-F238E27FC236}">
+                <a16:creationId xmlns:a16="http://schemas.microsoft.com/office/drawing/2014/main" id="{57455E99-D7ED-90EF-C160-DC5F055FE671}"/>
+              </a:ext>
+            </a:extLst>
+          </p:cNvPr>
+          <p:cNvSpPr txBox="1"/>
+          <p:nvPr/>
+        </p:nvSpPr>
+        <p:spPr>
+          <a:xfrm>
+            <a:off x="164464" y="4779478"/>
+            <a:ext cx="11071952" cy="646331"/>
+          </a:xfrm>
+          <a:prstGeom prst="rect">
+            <a:avLst/>
+          </a:prstGeom>
+          <a:noFill/>
+        </p:spPr>
+        <p:txBody>
+          <a:bodyPr wrap="square" rtlCol="0">
+            <a:spAutoFit/>
+          </a:bodyPr>
+          <a:lstStyle/>
+          <a:p>
+            <a:pPr marL="285750" indent="-285750">
+              <a:buFont typeface="Arial" panose="020B0604020202020204" pitchFamily="34" charset="0"/>
+              <a:buChar char="•"/>
+            </a:pPr>
+            <a:r>
+              <a:rPr lang="en-US" dirty="0">
+                <a:latin typeface="Times New Roman" panose="02020603050405020304" pitchFamily="18" charset="0"/>
+                <a:cs typeface="Times New Roman" panose="02020603050405020304" pitchFamily="18" charset="0"/>
+              </a:rPr>
+              <a:t>For summary, you generally don’t use the pipe. </a:t>
+            </a:r>
+          </a:p>
+          <a:p>
+            <a:pPr marL="285750" indent="-285750">
+              <a:buFont typeface="Arial" panose="020B0604020202020204" pitchFamily="34" charset="0"/>
+              <a:buChar char="•"/>
+            </a:pPr>
+            <a:r>
+              <a:rPr lang="en-US" dirty="0">
+                <a:latin typeface="Times New Roman" panose="02020603050405020304" pitchFamily="18" charset="0"/>
+                <a:cs typeface="Times New Roman" panose="02020603050405020304" pitchFamily="18" charset="0"/>
+              </a:rPr>
+              <a:t>If you want the summary of statistics of one variable you should do </a:t>
+            </a:r>
+            <a:r>
+              <a:rPr lang="en-US" dirty="0">
+                <a:latin typeface="Courier New" panose="02070309020205020404" pitchFamily="49" charset="0"/>
+                <a:cs typeface="Courier New" panose="02070309020205020404" pitchFamily="49" charset="0"/>
+              </a:rPr>
+              <a:t>summary(</a:t>
+            </a:r>
+            <a:r>
+              <a:rPr lang="en-US" dirty="0" err="1">
+                <a:latin typeface="Courier New" panose="02070309020205020404" pitchFamily="49" charset="0"/>
+                <a:cs typeface="Courier New" panose="02070309020205020404" pitchFamily="49" charset="0"/>
+              </a:rPr>
+              <a:t>data$variable_name</a:t>
+            </a:r>
+            <a:r>
+              <a:rPr lang="en-US" dirty="0">
+                <a:latin typeface="Courier New" panose="02070309020205020404" pitchFamily="49" charset="0"/>
+                <a:cs typeface="Courier New" panose="02070309020205020404" pitchFamily="49" charset="0"/>
+              </a:rPr>
+              <a:t>)</a:t>
+            </a:r>
+          </a:p>
+        </p:txBody>
+      </p:sp>
+    </p:spTree>
+    <p:extLst>
+      <p:ext uri="{BB962C8B-B14F-4D97-AF65-F5344CB8AC3E}">
+        <p14:creationId xmlns:p14="http://schemas.microsoft.com/office/powerpoint/2010/main" val="1918652647"/>
+      </p:ext>
+    </p:extLst>
+  </p:cSld>
+  <p:clrMapOvr>
+    <a:masterClrMapping/>
+  </p:clrMapOvr>
+</p:sld>
+</file>
+
+<file path=ppt/slides/slide5.xml><?xml version="1.0" encoding="utf-8"?>
+<p:sld xmlns:a="http://schemas.openxmlformats.org/drawingml/2006/main" xmlns:r="http://schemas.openxmlformats.org/officeDocument/2006/relationships" xmlns:p="http://schemas.openxmlformats.org/presentationml/2006/main">
+  <p:cSld>
+    <p:spTree>
+      <p:nvGrpSpPr>
+        <p:cNvPr id="1" name=""/>
+        <p:cNvGrpSpPr/>
+        <p:nvPr/>
+      </p:nvGrpSpPr>
+      <p:grpSpPr>
+        <a:xfrm>
+          <a:off x="0" y="0"/>
+          <a:ext cx="0" cy="0"/>
+          <a:chOff x="0" y="0"/>
+          <a:chExt cx="0" cy="0"/>
+        </a:xfrm>
+      </p:grpSpPr>
+      <p:pic>
+        <p:nvPicPr>
+          <p:cNvPr id="5" name="Picture 4">
+            <a:extLst>
+              <a:ext uri="{FF2B5EF4-FFF2-40B4-BE49-F238E27FC236}">
+                <a16:creationId xmlns:a16="http://schemas.microsoft.com/office/drawing/2014/main" id="{F4D1B8FF-35D7-2A0F-0961-4B2671A0A1CD}"/>
+              </a:ext>
+            </a:extLst>
+          </p:cNvPr>
+          <p:cNvPicPr>
+            <a:picLocks noChangeAspect="1"/>
+          </p:cNvPicPr>
+          <p:nvPr/>
+        </p:nvPicPr>
+        <p:blipFill>
+          <a:blip r:embed="rId2"/>
+          <a:stretch>
+            <a:fillRect/>
+          </a:stretch>
+        </p:blipFill>
+        <p:spPr>
+          <a:xfrm>
+            <a:off x="407625" y="142368"/>
+            <a:ext cx="11413474" cy="2771842"/>
+          </a:xfrm>
+          <a:prstGeom prst="rect">
+            <a:avLst/>
+          </a:prstGeom>
+        </p:spPr>
+      </p:pic>
+      <p:sp>
+        <p:nvSpPr>
+          <p:cNvPr id="8" name="TextBox 7">
+            <a:extLst>
+              <a:ext uri="{FF2B5EF4-FFF2-40B4-BE49-F238E27FC236}">
+                <a16:creationId xmlns:a16="http://schemas.microsoft.com/office/drawing/2014/main" id="{B0B9DA3F-63B6-1129-CEA5-78244E66B52D}"/>
+              </a:ext>
+            </a:extLst>
+          </p:cNvPr>
+          <p:cNvSpPr txBox="1"/>
+          <p:nvPr/>
+        </p:nvSpPr>
+        <p:spPr>
+          <a:xfrm>
+            <a:off x="407625" y="3020461"/>
+            <a:ext cx="11071952" cy="923330"/>
+          </a:xfrm>
+          <a:prstGeom prst="rect">
+            <a:avLst/>
+          </a:prstGeom>
+          <a:noFill/>
+        </p:spPr>
+        <p:txBody>
+          <a:bodyPr wrap="square" rtlCol="0">
+            <a:spAutoFit/>
+          </a:bodyPr>
+          <a:lstStyle/>
+          <a:p>
+            <a:pPr marL="285750" indent="-285750">
+              <a:buFont typeface="Arial" panose="020B0604020202020204" pitchFamily="34" charset="0"/>
+              <a:buChar char="•"/>
+            </a:pPr>
+            <a:r>
+              <a:rPr lang="en-US" dirty="0">
+                <a:latin typeface="Times New Roman" panose="02020603050405020304" pitchFamily="18" charset="0"/>
+                <a:cs typeface="Times New Roman" panose="02020603050405020304" pitchFamily="18" charset="0"/>
+              </a:rPr>
+              <a:t>Remember to add labels to categorical variables. </a:t>
+            </a:r>
+          </a:p>
+          <a:p>
+            <a:pPr marL="285750" indent="-285750">
+              <a:buFont typeface="Arial" panose="020B0604020202020204" pitchFamily="34" charset="0"/>
+              <a:buChar char="•"/>
+            </a:pPr>
+            <a:r>
+              <a:rPr lang="en-US" dirty="0">
+                <a:latin typeface="Times New Roman" panose="02020603050405020304" pitchFamily="18" charset="0"/>
+                <a:cs typeface="Times New Roman" panose="02020603050405020304" pitchFamily="18" charset="0"/>
+              </a:rPr>
+              <a:t>We would want 2, 3, 4, and 5 here to have labels so that we know what they represent.</a:t>
+            </a:r>
+          </a:p>
+          <a:p>
+            <a:pPr marL="285750" indent="-285750">
+              <a:buFont typeface="Arial" panose="020B0604020202020204" pitchFamily="34" charset="0"/>
+              <a:buChar char="•"/>
+            </a:pPr>
+            <a:r>
+              <a:rPr lang="en-US" dirty="0">
+                <a:latin typeface="Times New Roman" panose="02020603050405020304" pitchFamily="18" charset="0"/>
+                <a:cs typeface="Times New Roman" panose="02020603050405020304" pitchFamily="18" charset="0"/>
+              </a:rPr>
+              <a:t>Most of the time, if you group by a variable, you probably want to add labels. </a:t>
+            </a:r>
+          </a:p>
+        </p:txBody>
+      </p:sp>
+      <p:pic>
+        <p:nvPicPr>
+          <p:cNvPr id="12" name="Picture 11">
+            <a:extLst>
+              <a:ext uri="{FF2B5EF4-FFF2-40B4-BE49-F238E27FC236}">
+                <a16:creationId xmlns:a16="http://schemas.microsoft.com/office/drawing/2014/main" id="{DBD64FF0-25C1-E698-C2F8-8A2089DC0B98}"/>
+              </a:ext>
+            </a:extLst>
+          </p:cNvPr>
+          <p:cNvPicPr>
+            <a:picLocks noChangeAspect="1"/>
+          </p:cNvPicPr>
+          <p:nvPr/>
+        </p:nvPicPr>
+        <p:blipFill>
+          <a:blip r:embed="rId3"/>
+          <a:stretch>
+            <a:fillRect/>
+          </a:stretch>
+        </p:blipFill>
+        <p:spPr>
+          <a:xfrm>
+            <a:off x="407624" y="3943791"/>
+            <a:ext cx="11085723" cy="473973"/>
+          </a:xfrm>
+          <a:prstGeom prst="rect">
+            <a:avLst/>
+          </a:prstGeom>
+        </p:spPr>
+      </p:pic>
+      <p:sp>
+        <p:nvSpPr>
+          <p:cNvPr id="13" name="TextBox 12">
+            <a:extLst>
+              <a:ext uri="{FF2B5EF4-FFF2-40B4-BE49-F238E27FC236}">
+                <a16:creationId xmlns:a16="http://schemas.microsoft.com/office/drawing/2014/main" id="{1A6BBBF4-FB6A-5FDB-11FA-4E71B298285A}"/>
+              </a:ext>
+            </a:extLst>
+          </p:cNvPr>
+          <p:cNvSpPr txBox="1"/>
+          <p:nvPr/>
+        </p:nvSpPr>
+        <p:spPr>
+          <a:xfrm>
+            <a:off x="407624" y="4502479"/>
+            <a:ext cx="11071952" cy="1754326"/>
+          </a:xfrm>
+          <a:prstGeom prst="rect">
+            <a:avLst/>
+          </a:prstGeom>
+          <a:noFill/>
+        </p:spPr>
+        <p:txBody>
+          <a:bodyPr wrap="square" rtlCol="0">
+            <a:spAutoFit/>
+          </a:bodyPr>
+          <a:lstStyle/>
+          <a:p>
+            <a:pPr marL="285750" indent="-285750">
+              <a:buFont typeface="Arial" panose="020B0604020202020204" pitchFamily="34" charset="0"/>
+              <a:buChar char="•"/>
+            </a:pPr>
+            <a:r>
+              <a:rPr lang="en-US" dirty="0">
+                <a:latin typeface="Times New Roman" panose="02020603050405020304" pitchFamily="18" charset="0"/>
+                <a:cs typeface="Times New Roman" panose="02020603050405020304" pitchFamily="18" charset="0"/>
+              </a:rPr>
+              <a:t>Separate filter arguments with a comma unless you are using the same variable.</a:t>
+            </a:r>
+          </a:p>
+          <a:p>
+            <a:pPr marL="285750" indent="-285750">
+              <a:buFont typeface="Arial" panose="020B0604020202020204" pitchFamily="34" charset="0"/>
+              <a:buChar char="•"/>
+            </a:pPr>
+            <a:r>
+              <a:rPr lang="en-US" dirty="0">
+                <a:latin typeface="Times New Roman" panose="02020603050405020304" pitchFamily="18" charset="0"/>
+                <a:cs typeface="Times New Roman" panose="02020603050405020304" pitchFamily="18" charset="0"/>
+              </a:rPr>
+              <a:t>This code still worked but generally you use &amp; when you use the same variable twice and a comma when you filter another variable. </a:t>
+            </a:r>
+          </a:p>
+          <a:p>
+            <a:pPr marL="285750" indent="-285750">
+              <a:buFont typeface="Arial" panose="020B0604020202020204" pitchFamily="34" charset="0"/>
+              <a:buChar char="•"/>
+            </a:pPr>
+            <a:r>
+              <a:rPr lang="en-US" dirty="0">
+                <a:latin typeface="Courier New" panose="02070309020205020404" pitchFamily="49" charset="0"/>
+                <a:cs typeface="Courier New" panose="02070309020205020404" pitchFamily="49" charset="0"/>
+              </a:rPr>
+              <a:t>filter(</a:t>
+            </a:r>
+            <a:r>
+              <a:rPr lang="en-US" dirty="0" err="1">
+                <a:latin typeface="Courier New" panose="02070309020205020404" pitchFamily="49" charset="0"/>
+                <a:cs typeface="Courier New" panose="02070309020205020404" pitchFamily="49" charset="0"/>
+              </a:rPr>
+              <a:t>stday</a:t>
+            </a:r>
+            <a:r>
+              <a:rPr lang="en-US" dirty="0">
+                <a:latin typeface="Courier New" panose="02070309020205020404" pitchFamily="49" charset="0"/>
+                <a:cs typeface="Courier New" panose="02070309020205020404" pitchFamily="49" charset="0"/>
+              </a:rPr>
+              <a:t>! = -9 &amp; </a:t>
+            </a:r>
+            <a:r>
+              <a:rPr lang="en-US" dirty="0" err="1">
+                <a:latin typeface="Courier New" panose="02070309020205020404" pitchFamily="49" charset="0"/>
+                <a:cs typeface="Courier New" panose="02070309020205020404" pitchFamily="49" charset="0"/>
+              </a:rPr>
+              <a:t>stday</a:t>
+            </a:r>
+            <a:r>
+              <a:rPr lang="en-US" dirty="0">
+                <a:latin typeface="Courier New" panose="02070309020205020404" pitchFamily="49" charset="0"/>
+                <a:cs typeface="Courier New" panose="02070309020205020404" pitchFamily="49" charset="0"/>
+              </a:rPr>
+              <a:t> != -8, </a:t>
+            </a:r>
+            <a:r>
+              <a:rPr lang="en-US" dirty="0" err="1">
+                <a:latin typeface="Courier New" panose="02070309020205020404" pitchFamily="49" charset="0"/>
+                <a:cs typeface="Courier New" panose="02070309020205020404" pitchFamily="49" charset="0"/>
+              </a:rPr>
+              <a:t>stmon</a:t>
+            </a:r>
+            <a:r>
+              <a:rPr lang="en-US" dirty="0">
+                <a:latin typeface="Courier New" panose="02070309020205020404" pitchFamily="49" charset="0"/>
+                <a:cs typeface="Courier New" panose="02070309020205020404" pitchFamily="49" charset="0"/>
+              </a:rPr>
+              <a:t> != -9) </a:t>
+            </a:r>
+          </a:p>
+          <a:p>
+            <a:pPr marL="285750" indent="-285750">
+              <a:buFont typeface="Arial" panose="020B0604020202020204" pitchFamily="34" charset="0"/>
+              <a:buChar char="•"/>
+            </a:pPr>
+            <a:r>
+              <a:rPr lang="en-US" dirty="0">
+                <a:latin typeface="Times New Roman" panose="02020603050405020304" pitchFamily="18" charset="0"/>
+                <a:cs typeface="Times New Roman" panose="02020603050405020304" pitchFamily="18" charset="0"/>
+              </a:rPr>
+              <a:t>You can also hit return if your code is going off the page. </a:t>
+            </a:r>
+          </a:p>
+          <a:p>
+            <a:pPr marL="285750" indent="-285750">
+              <a:buFont typeface="Arial" panose="020B0604020202020204" pitchFamily="34" charset="0"/>
+              <a:buChar char="•"/>
+            </a:pPr>
+            <a:r>
+              <a:rPr lang="en-US" dirty="0">
+                <a:latin typeface="Times New Roman" panose="02020603050405020304" pitchFamily="18" charset="0"/>
+                <a:cs typeface="Times New Roman" panose="02020603050405020304" pitchFamily="18" charset="0"/>
+              </a:rPr>
+              <a:t>It is best practice to try to stay within the border line (show in R)</a:t>
+            </a:r>
+          </a:p>
+        </p:txBody>
+      </p:sp>
+    </p:spTree>
+    <p:extLst>
+      <p:ext uri="{BB962C8B-B14F-4D97-AF65-F5344CB8AC3E}">
+        <p14:creationId xmlns:p14="http://schemas.microsoft.com/office/powerpoint/2010/main" val="858852717"/>
+      </p:ext>
+    </p:extLst>
+  </p:cSld>
+  <p:clrMapOvr>
+    <a:masterClrMapping/>
+  </p:clrMapOvr>
+</p:sld>
+</file>
+
+<file path=ppt/slides/slide6.xml><?xml version="1.0" encoding="utf-8"?>
+<p:sld xmlns:a="http://schemas.openxmlformats.org/drawingml/2006/main" xmlns:r="http://schemas.openxmlformats.org/officeDocument/2006/relationships" xmlns:p="http://schemas.openxmlformats.org/presentationml/2006/main">
+  <p:cSld>
+    <p:spTree>
+      <p:nvGrpSpPr>
+        <p:cNvPr id="1" name=""/>
+        <p:cNvGrpSpPr/>
+        <p:nvPr/>
+      </p:nvGrpSpPr>
+      <p:grpSpPr>
+        <a:xfrm>
+          <a:off x="0" y="0"/>
+          <a:ext cx="0" cy="0"/>
+          <a:chOff x="0" y="0"/>
+          <a:chExt cx="0" cy="0"/>
+        </a:xfrm>
+      </p:grpSpPr>
+      <p:sp>
+        <p:nvSpPr>
+          <p:cNvPr id="2" name="Title 1">
+            <a:extLst>
+              <a:ext uri="{FF2B5EF4-FFF2-40B4-BE49-F238E27FC236}">
+                <a16:creationId xmlns:a16="http://schemas.microsoft.com/office/drawing/2014/main" id="{A59896B0-3E67-E4B9-2076-17D5FEF1DD56}"/>
+              </a:ext>
+            </a:extLst>
+          </p:cNvPr>
+          <p:cNvSpPr>
+            <a:spLocks noGrp="1"/>
+          </p:cNvSpPr>
+          <p:nvPr>
+            <p:ph type="title"/>
+          </p:nvPr>
+        </p:nvSpPr>
+        <p:spPr/>
+        <p:txBody>
+          <a:bodyPr/>
+          <a:lstStyle/>
+          <a:p>
+            <a:r>
+              <a:rPr lang="en-US" dirty="0">
+                <a:latin typeface="Aharoni" panose="02010803020104030203" pitchFamily="2" charset="-79"/>
+                <a:cs typeface="Aharoni" panose="02010803020104030203" pitchFamily="2" charset="-79"/>
+              </a:rPr>
+              <a:t>Look at Solution in R</a:t>
+            </a:r>
+          </a:p>
+        </p:txBody>
+      </p:sp>
+      <p:sp>
+        <p:nvSpPr>
+          <p:cNvPr id="3" name="Content Placeholder 2">
+            <a:extLst>
+              <a:ext uri="{FF2B5EF4-FFF2-40B4-BE49-F238E27FC236}">
+                <a16:creationId xmlns:a16="http://schemas.microsoft.com/office/drawing/2014/main" id="{07E00717-2E50-5047-6964-2A1A38BCD898}"/>
+              </a:ext>
+            </a:extLst>
+          </p:cNvPr>
+          <p:cNvSpPr>
+            <a:spLocks noGrp="1"/>
+          </p:cNvSpPr>
+          <p:nvPr>
+            <p:ph idx="1"/>
+          </p:nvPr>
+        </p:nvSpPr>
+        <p:spPr/>
+        <p:txBody>
+          <a:bodyPr/>
+          <a:lstStyle/>
+          <a:p>
+            <a:r>
+              <a:rPr lang="en-US" dirty="0">
+                <a:latin typeface="Times New Roman" panose="02020603050405020304" pitchFamily="18" charset="0"/>
+                <a:cs typeface="Times New Roman" panose="02020603050405020304" pitchFamily="18" charset="0"/>
+              </a:rPr>
+              <a:t>Everyone did the homework correctly. </a:t>
+            </a:r>
+          </a:p>
+          <a:p>
+            <a:r>
+              <a:rPr lang="en-US" dirty="0">
+                <a:latin typeface="Times New Roman" panose="02020603050405020304" pitchFamily="18" charset="0"/>
+                <a:cs typeface="Times New Roman" panose="02020603050405020304" pitchFamily="18" charset="0"/>
+              </a:rPr>
+              <a:t>I just want to show a few tricks</a:t>
+            </a:r>
+          </a:p>
+        </p:txBody>
+      </p:sp>
+      <p:cxnSp>
+        <p:nvCxnSpPr>
+          <p:cNvPr id="4" name="Straight Connector 3">
+            <a:extLst>
+              <a:ext uri="{FF2B5EF4-FFF2-40B4-BE49-F238E27FC236}">
+                <a16:creationId xmlns:a16="http://schemas.microsoft.com/office/drawing/2014/main" id="{56C80198-6582-602B-0C34-27CF16C3D17A}"/>
+              </a:ext>
+            </a:extLst>
+          </p:cNvPr>
+          <p:cNvCxnSpPr/>
+          <p:nvPr/>
+        </p:nvCxnSpPr>
+        <p:spPr>
+          <a:xfrm>
+            <a:off x="838200" y="1393180"/>
+            <a:ext cx="10515600" cy="0"/>
+          </a:xfrm>
+          <a:prstGeom prst="line">
+            <a:avLst/>
+          </a:prstGeom>
+          <a:ln>
+            <a:solidFill>
+              <a:srgbClr val="C00000"/>
+            </a:solidFill>
+          </a:ln>
+        </p:spPr>
+        <p:style>
+          <a:lnRef idx="2">
+            <a:schemeClr val="accent1"/>
+          </a:lnRef>
+          <a:fillRef idx="0">
+            <a:schemeClr val="accent1"/>
+          </a:fillRef>
+          <a:effectRef idx="1">
+            <a:schemeClr val="accent1"/>
+          </a:effectRef>
+          <a:fontRef idx="minor">
+            <a:schemeClr val="tx1"/>
+          </a:fontRef>
+        </p:style>
+      </p:cxnSp>
+    </p:spTree>
+    <p:extLst>
+      <p:ext uri="{BB962C8B-B14F-4D97-AF65-F5344CB8AC3E}">
+        <p14:creationId xmlns:p14="http://schemas.microsoft.com/office/powerpoint/2010/main" val="1952844250"/>
+      </p:ext>
+    </p:extLst>
+  </p:cSld>
+  <p:clrMapOvr>
+    <a:masterClrMapping/>
+  </p:clrMapOvr>
+</p:sld>
+</file>
+
+<file path=ppt/slides/slide7.xml><?xml version="1.0" encoding="utf-8"?>
+<p:sld xmlns:a="http://schemas.openxmlformats.org/drawingml/2006/main" xmlns:r="http://schemas.openxmlformats.org/officeDocument/2006/relationships" xmlns:p="http://schemas.openxmlformats.org/presentationml/2006/main">
+  <p:cSld>
+    <p:spTree>
+      <p:nvGrpSpPr>
+        <p:cNvPr id="1" name="">
+          <a:extLst>
+            <a:ext uri="{FF2B5EF4-FFF2-40B4-BE49-F238E27FC236}">
+              <a16:creationId xmlns:a16="http://schemas.microsoft.com/office/drawing/2014/main" id="{9583ECCD-54FA-4660-6DB5-017604884EC2}"/>
+            </a:ext>
+          </a:extLst>
+        </p:cNvPr>
+        <p:cNvGrpSpPr/>
+        <p:nvPr/>
+      </p:nvGrpSpPr>
+      <p:grpSpPr>
+        <a:xfrm>
+          <a:off x="0" y="0"/>
+          <a:ext cx="0" cy="0"/>
+          <a:chOff x="0" y="0"/>
+          <a:chExt cx="0" cy="0"/>
+        </a:xfrm>
+      </p:grpSpPr>
+      <p:sp>
+        <p:nvSpPr>
+          <p:cNvPr id="2" name="Title 1">
+            <a:extLst>
+              <a:ext uri="{FF2B5EF4-FFF2-40B4-BE49-F238E27FC236}">
+                <a16:creationId xmlns:a16="http://schemas.microsoft.com/office/drawing/2014/main" id="{18454EDB-14A6-F89C-6537-D540A6BE1990}"/>
+              </a:ext>
+            </a:extLst>
+          </p:cNvPr>
+          <p:cNvSpPr>
+            <a:spLocks noGrp="1"/>
+          </p:cNvSpPr>
+          <p:nvPr>
+            <p:ph type="title"/>
+          </p:nvPr>
+        </p:nvSpPr>
+        <p:spPr/>
+        <p:txBody>
+          <a:bodyPr/>
+          <a:lstStyle/>
+          <a:p>
+            <a:r>
+              <a:rPr lang="en-US" dirty="0">
+                <a:latin typeface="Aharoni" panose="02010803020104030203" pitchFamily="2" charset="-79"/>
+                <a:cs typeface="Aharoni" panose="02010803020104030203" pitchFamily="2" charset="-79"/>
+              </a:rPr>
+              <a:t>Grad School Professionalization</a:t>
+            </a:r>
+          </a:p>
+        </p:txBody>
+      </p:sp>
+      <p:sp>
+        <p:nvSpPr>
+          <p:cNvPr id="3" name="Content Placeholder 2">
+            <a:extLst>
+              <a:ext uri="{FF2B5EF4-FFF2-40B4-BE49-F238E27FC236}">
+                <a16:creationId xmlns:a16="http://schemas.microsoft.com/office/drawing/2014/main" id="{2076220C-9807-6527-2C05-3B12D8E06D35}"/>
+              </a:ext>
+            </a:extLst>
+          </p:cNvPr>
+          <p:cNvSpPr>
+            <a:spLocks noGrp="1"/>
+          </p:cNvSpPr>
+          <p:nvPr>
+            <p:ph idx="1"/>
+          </p:nvPr>
+        </p:nvSpPr>
+        <p:spPr/>
+        <p:txBody>
+          <a:bodyPr/>
+          <a:lstStyle/>
+          <a:p>
+            <a:r>
+              <a:rPr lang="en-US" dirty="0">
+                <a:latin typeface="Times New Roman" panose="02020603050405020304" pitchFamily="18" charset="0"/>
+                <a:cs typeface="Times New Roman" panose="02020603050405020304" pitchFamily="18" charset="0"/>
+              </a:rPr>
+              <a:t>Residency: They may have mentioned this at orientation, but in order to get in-state tuition next year, you need to get your Florida drivers license ASAP. </a:t>
+            </a:r>
+          </a:p>
+          <a:p>
+            <a:pPr lvl="1"/>
+            <a:r>
+              <a:rPr lang="en-US" dirty="0">
+                <a:latin typeface="Times New Roman" panose="02020603050405020304" pitchFamily="18" charset="0"/>
+                <a:cs typeface="Times New Roman" panose="02020603050405020304" pitchFamily="18" charset="0"/>
+              </a:rPr>
+              <a:t>You need to have it valid for a full year before the start of Fall 2027. </a:t>
+            </a:r>
+          </a:p>
+        </p:txBody>
+      </p:sp>
+      <p:cxnSp>
+        <p:nvCxnSpPr>
+          <p:cNvPr id="4" name="Straight Connector 3">
+            <a:extLst>
+              <a:ext uri="{FF2B5EF4-FFF2-40B4-BE49-F238E27FC236}">
+                <a16:creationId xmlns:a16="http://schemas.microsoft.com/office/drawing/2014/main" id="{DB79E1B5-03CE-C429-1279-EC1F092C16D9}"/>
+              </a:ext>
+            </a:extLst>
+          </p:cNvPr>
+          <p:cNvCxnSpPr/>
+          <p:nvPr/>
+        </p:nvCxnSpPr>
+        <p:spPr>
+          <a:xfrm>
+            <a:off x="838200" y="1393180"/>
+            <a:ext cx="10515600" cy="0"/>
+          </a:xfrm>
+          <a:prstGeom prst="line">
+            <a:avLst/>
+          </a:prstGeom>
+          <a:ln>
+            <a:solidFill>
+              <a:srgbClr val="C00000"/>
+            </a:solidFill>
+          </a:ln>
+        </p:spPr>
+        <p:style>
+          <a:lnRef idx="2">
+            <a:schemeClr val="accent1"/>
+          </a:lnRef>
+          <a:fillRef idx="0">
+            <a:schemeClr val="accent1"/>
+          </a:fillRef>
+          <a:effectRef idx="1">
+            <a:schemeClr val="accent1"/>
+          </a:effectRef>
+          <a:fontRef idx="minor">
+            <a:schemeClr val="tx1"/>
+          </a:fontRef>
+        </p:style>
+      </p:cxnSp>
+    </p:spTree>
+    <p:extLst>
+      <p:ext uri="{BB962C8B-B14F-4D97-AF65-F5344CB8AC3E}">
+        <p14:creationId xmlns:p14="http://schemas.microsoft.com/office/powerpoint/2010/main" val="1017132259"/>
+      </p:ext>
+    </p:extLst>
+  </p:cSld>
+  <p:clrMapOvr>
+    <a:masterClrMapping/>
+  </p:clrMapOvr>
+</p:sld>
+</file>
+
+<file path=ppt/slides/slide8.xml><?xml version="1.0" encoding="utf-8"?>
 <p:sld xmlns:a="http://schemas.openxmlformats.org/drawingml/2006/main" xmlns:r="http://schemas.openxmlformats.org/officeDocument/2006/relationships" xmlns:p="http://schemas.openxmlformats.org/presentationml/2006/main">
   <p:cSld>
     <p:spTree>
@@ -10264,7 +12983,7 @@
 </p:sld>
 </file>
 
-<file path=ppt/slides/slide4.xml><?xml version="1.0" encoding="utf-8"?>
+<file path=ppt/slides/slide9.xml><?xml version="1.0" encoding="utf-8"?>
 <p:sld xmlns:a="http://schemas.openxmlformats.org/drawingml/2006/main" xmlns:r="http://schemas.openxmlformats.org/officeDocument/2006/relationships" xmlns:p="http://schemas.openxmlformats.org/presentationml/2006/main">
   <p:cSld>
     <p:spTree>
@@ -10394,1012 +13113,6 @@
         </p:style>
       </p:cxnSp>
     </p:spTree>
-  </p:cSld>
-  <p:clrMapOvr>
-    <a:masterClrMapping/>
-  </p:clrMapOvr>
-</p:sld>
-</file>
-
-<file path=ppt/slides/slide5.xml><?xml version="1.0" encoding="utf-8"?>
-<p:sld xmlns:a="http://schemas.openxmlformats.org/drawingml/2006/main" xmlns:r="http://schemas.openxmlformats.org/officeDocument/2006/relationships" xmlns:p="http://schemas.openxmlformats.org/presentationml/2006/main">
-  <p:cSld>
-    <p:spTree>
-      <p:nvGrpSpPr>
-        <p:cNvPr id="1" name=""/>
-        <p:cNvGrpSpPr/>
-        <p:nvPr/>
-      </p:nvGrpSpPr>
-      <p:grpSpPr>
-        <a:xfrm>
-          <a:off x="0" y="0"/>
-          <a:ext cx="0" cy="0"/>
-          <a:chOff x="0" y="0"/>
-          <a:chExt cx="0" cy="0"/>
-        </a:xfrm>
-      </p:grpSpPr>
-      <p:sp>
-        <p:nvSpPr>
-          <p:cNvPr id="2" name="Title 1"/>
-          <p:cNvSpPr>
-            <a:spLocks noGrp="1"/>
-          </p:cNvSpPr>
-          <p:nvPr>
-            <p:ph type="title"/>
-          </p:nvPr>
-        </p:nvSpPr>
-        <p:spPr/>
-        <p:txBody>
-          <a:bodyPr/>
-          <a:lstStyle/>
-          <a:p>
-            <a:r>
-              <a:rPr dirty="0">
-                <a:latin typeface="Aharoni" panose="02010803020104030203" pitchFamily="2" charset="-79"/>
-                <a:cs typeface="Aharoni" panose="02010803020104030203" pitchFamily="2" charset="-79"/>
-              </a:rPr>
-              <a:t>Olympics Data: Complete Solution</a:t>
-            </a:r>
-          </a:p>
-        </p:txBody>
-      </p:sp>
-      <p:pic>
-        <p:nvPicPr>
-          <p:cNvPr id="5" name="Picture 4">
-            <a:extLst>
-              <a:ext uri="{FF2B5EF4-FFF2-40B4-BE49-F238E27FC236}">
-                <a16:creationId xmlns:a16="http://schemas.microsoft.com/office/drawing/2014/main" id="{54E9D52C-1E87-C87C-1E02-662CD56E205C}"/>
-              </a:ext>
-            </a:extLst>
-          </p:cNvPr>
-          <p:cNvPicPr>
-            <a:picLocks noChangeAspect="1"/>
-          </p:cNvPicPr>
-          <p:nvPr/>
-        </p:nvPicPr>
-        <p:blipFill>
-          <a:blip r:embed="rId2"/>
-          <a:stretch>
-            <a:fillRect/>
-          </a:stretch>
-        </p:blipFill>
-        <p:spPr>
-          <a:xfrm>
-            <a:off x="609599" y="1647881"/>
-            <a:ext cx="11169596" cy="4593263"/>
-          </a:xfrm>
-          <a:prstGeom prst="rect">
-            <a:avLst/>
-          </a:prstGeom>
-        </p:spPr>
-      </p:pic>
-      <p:cxnSp>
-        <p:nvCxnSpPr>
-          <p:cNvPr id="8" name="Straight Connector 7">
-            <a:extLst>
-              <a:ext uri="{FF2B5EF4-FFF2-40B4-BE49-F238E27FC236}">
-                <a16:creationId xmlns:a16="http://schemas.microsoft.com/office/drawing/2014/main" id="{C6D56443-A67C-2D59-BBE6-253CD92CDA17}"/>
-              </a:ext>
-            </a:extLst>
-          </p:cNvPr>
-          <p:cNvCxnSpPr/>
-          <p:nvPr/>
-        </p:nvCxnSpPr>
-        <p:spPr>
-          <a:xfrm>
-            <a:off x="609599" y="1261979"/>
-            <a:ext cx="10972800" cy="0"/>
-          </a:xfrm>
-          <a:prstGeom prst="line">
-            <a:avLst/>
-          </a:prstGeom>
-          <a:ln>
-            <a:solidFill>
-              <a:srgbClr val="C00000"/>
-            </a:solidFill>
-          </a:ln>
-        </p:spPr>
-        <p:style>
-          <a:lnRef idx="2">
-            <a:schemeClr val="accent1"/>
-          </a:lnRef>
-          <a:fillRef idx="0">
-            <a:schemeClr val="accent1"/>
-          </a:fillRef>
-          <a:effectRef idx="1">
-            <a:schemeClr val="accent1"/>
-          </a:effectRef>
-          <a:fontRef idx="minor">
-            <a:schemeClr val="tx1"/>
-          </a:fontRef>
-        </p:style>
-      </p:cxnSp>
-    </p:spTree>
-  </p:cSld>
-  <p:clrMapOvr>
-    <a:masterClrMapping/>
-  </p:clrMapOvr>
-</p:sld>
-</file>
-
-<file path=ppt/slides/slide6.xml><?xml version="1.0" encoding="utf-8"?>
-<p:sld xmlns:a="http://schemas.openxmlformats.org/drawingml/2006/main" xmlns:r="http://schemas.openxmlformats.org/officeDocument/2006/relationships" xmlns:p="http://schemas.openxmlformats.org/presentationml/2006/main">
-  <p:cSld>
-    <p:spTree>
-      <p:nvGrpSpPr>
-        <p:cNvPr id="1" name=""/>
-        <p:cNvGrpSpPr/>
-        <p:nvPr/>
-      </p:nvGrpSpPr>
-      <p:grpSpPr>
-        <a:xfrm>
-          <a:off x="0" y="0"/>
-          <a:ext cx="0" cy="0"/>
-          <a:chOff x="0" y="0"/>
-          <a:chExt cx="0" cy="0"/>
-        </a:xfrm>
-      </p:grpSpPr>
-      <p:sp>
-        <p:nvSpPr>
-          <p:cNvPr id="2" name="Title 1"/>
-          <p:cNvSpPr>
-            <a:spLocks noGrp="1"/>
-          </p:cNvSpPr>
-          <p:nvPr>
-            <p:ph type="title"/>
-          </p:nvPr>
-        </p:nvSpPr>
-        <p:spPr/>
-        <p:txBody>
-          <a:bodyPr/>
-          <a:lstStyle/>
-          <a:p>
-            <a:r>
-              <a:rPr dirty="0">
-                <a:latin typeface="Aharoni" panose="02010803020104030203" pitchFamily="2" charset="-79"/>
-                <a:cs typeface="Aharoni" panose="02010803020104030203" pitchFamily="2" charset="-79"/>
-              </a:rPr>
-              <a:t>Olympics Data: Solution, Continued</a:t>
-            </a:r>
-          </a:p>
-        </p:txBody>
-      </p:sp>
-      <p:pic>
-        <p:nvPicPr>
-          <p:cNvPr id="7" name="Picture 6">
-            <a:extLst>
-              <a:ext uri="{FF2B5EF4-FFF2-40B4-BE49-F238E27FC236}">
-                <a16:creationId xmlns:a16="http://schemas.microsoft.com/office/drawing/2014/main" id="{D8517AC1-8972-448E-CFF2-E81A244CC9AB}"/>
-              </a:ext>
-            </a:extLst>
-          </p:cNvPr>
-          <p:cNvPicPr>
-            <a:picLocks noChangeAspect="1"/>
-          </p:cNvPicPr>
-          <p:nvPr/>
-        </p:nvPicPr>
-        <p:blipFill>
-          <a:blip r:embed="rId2"/>
-          <a:stretch>
-            <a:fillRect/>
-          </a:stretch>
-        </p:blipFill>
-        <p:spPr>
-          <a:xfrm>
-            <a:off x="294105" y="1417638"/>
-            <a:ext cx="11470105" cy="5081055"/>
-          </a:xfrm>
-          <a:prstGeom prst="rect">
-            <a:avLst/>
-          </a:prstGeom>
-        </p:spPr>
-      </p:pic>
-      <p:cxnSp>
-        <p:nvCxnSpPr>
-          <p:cNvPr id="8" name="Straight Connector 7">
-            <a:extLst>
-              <a:ext uri="{FF2B5EF4-FFF2-40B4-BE49-F238E27FC236}">
-                <a16:creationId xmlns:a16="http://schemas.microsoft.com/office/drawing/2014/main" id="{C0BEF72F-9D95-E9F8-4514-E24E336C146E}"/>
-              </a:ext>
-            </a:extLst>
-          </p:cNvPr>
-          <p:cNvCxnSpPr/>
-          <p:nvPr/>
-        </p:nvCxnSpPr>
-        <p:spPr>
-          <a:xfrm>
-            <a:off x="609600" y="1229895"/>
-            <a:ext cx="10972800" cy="0"/>
-          </a:xfrm>
-          <a:prstGeom prst="line">
-            <a:avLst/>
-          </a:prstGeom>
-          <a:ln>
-            <a:solidFill>
-              <a:srgbClr val="C00000"/>
-            </a:solidFill>
-          </a:ln>
-        </p:spPr>
-        <p:style>
-          <a:lnRef idx="2">
-            <a:schemeClr val="accent1"/>
-          </a:lnRef>
-          <a:fillRef idx="0">
-            <a:schemeClr val="accent1"/>
-          </a:fillRef>
-          <a:effectRef idx="1">
-            <a:schemeClr val="accent1"/>
-          </a:effectRef>
-          <a:fontRef idx="minor">
-            <a:schemeClr val="tx1"/>
-          </a:fontRef>
-        </p:style>
-      </p:cxnSp>
-    </p:spTree>
-  </p:cSld>
-  <p:clrMapOvr>
-    <a:masterClrMapping/>
-  </p:clrMapOvr>
-</p:sld>
-</file>
-
-<file path=ppt/slides/slide7.xml><?xml version="1.0" encoding="utf-8"?>
-<p:sld xmlns:a="http://schemas.openxmlformats.org/drawingml/2006/main" xmlns:r="http://schemas.openxmlformats.org/officeDocument/2006/relationships" xmlns:p="http://schemas.openxmlformats.org/presentationml/2006/main">
-  <p:cSld>
-    <p:spTree>
-      <p:nvGrpSpPr>
-        <p:cNvPr id="1" name="">
-          <a:extLst>
-            <a:ext uri="{FF2B5EF4-FFF2-40B4-BE49-F238E27FC236}">
-              <a16:creationId xmlns:a16="http://schemas.microsoft.com/office/drawing/2014/main" id="{83C4B354-070D-ECF7-6671-2F9BDACDB5BE}"/>
-            </a:ext>
-          </a:extLst>
-        </p:cNvPr>
-        <p:cNvGrpSpPr/>
-        <p:nvPr/>
-      </p:nvGrpSpPr>
-      <p:grpSpPr>
-        <a:xfrm>
-          <a:off x="0" y="0"/>
-          <a:ext cx="0" cy="0"/>
-          <a:chOff x="0" y="0"/>
-          <a:chExt cx="0" cy="0"/>
-        </a:xfrm>
-      </p:grpSpPr>
-      <p:sp>
-        <p:nvSpPr>
-          <p:cNvPr id="2" name="Title 1">
-            <a:extLst>
-              <a:ext uri="{FF2B5EF4-FFF2-40B4-BE49-F238E27FC236}">
-                <a16:creationId xmlns:a16="http://schemas.microsoft.com/office/drawing/2014/main" id="{31E2887C-B6AA-3BD3-4F50-CFEC1A04AE72}"/>
-              </a:ext>
-            </a:extLst>
-          </p:cNvPr>
-          <p:cNvSpPr>
-            <a:spLocks noGrp="1"/>
-          </p:cNvSpPr>
-          <p:nvPr>
-            <p:ph type="title"/>
-          </p:nvPr>
-        </p:nvSpPr>
-        <p:spPr>
-          <a:xfrm>
-            <a:off x="838200" y="365126"/>
-            <a:ext cx="10515600" cy="947308"/>
-          </a:xfrm>
-        </p:spPr>
-        <p:txBody>
-          <a:bodyPr/>
-          <a:lstStyle/>
-          <a:p>
-            <a:pPr algn="ctr"/>
-            <a:r>
-              <a:rPr lang="en-US" dirty="0">
-                <a:latin typeface="Aharoni" panose="02010803020104030203" pitchFamily="2" charset="-79"/>
-                <a:cs typeface="Aharoni" panose="02010803020104030203" pitchFamily="2" charset="-79"/>
-              </a:rPr>
-              <a:t>Becoming Familiar with Data</a:t>
-            </a:r>
-          </a:p>
-        </p:txBody>
-      </p:sp>
-      <p:pic>
-        <p:nvPicPr>
-          <p:cNvPr id="6" name="Content Placeholder 5">
-            <a:extLst>
-              <a:ext uri="{FF2B5EF4-FFF2-40B4-BE49-F238E27FC236}">
-                <a16:creationId xmlns:a16="http://schemas.microsoft.com/office/drawing/2014/main" id="{2DDE6A83-56B3-B975-427F-E1BD84D7906C}"/>
-              </a:ext>
-            </a:extLst>
-          </p:cNvPr>
-          <p:cNvPicPr>
-            <a:picLocks noGrp="1" noChangeAspect="1"/>
-          </p:cNvPicPr>
-          <p:nvPr>
-            <p:ph idx="1"/>
-          </p:nvPr>
-        </p:nvPicPr>
-        <p:blipFill>
-          <a:blip r:embed="rId2"/>
-          <a:stretch>
-            <a:fillRect/>
-          </a:stretch>
-        </p:blipFill>
-        <p:spPr>
-          <a:xfrm>
-            <a:off x="835571" y="1788434"/>
-            <a:ext cx="10515600" cy="892355"/>
-          </a:xfrm>
-          <a:prstGeom prst="rect">
-            <a:avLst/>
-          </a:prstGeom>
-        </p:spPr>
-      </p:pic>
-      <p:cxnSp>
-        <p:nvCxnSpPr>
-          <p:cNvPr id="5" name="Straight Connector 4">
-            <a:extLst>
-              <a:ext uri="{FF2B5EF4-FFF2-40B4-BE49-F238E27FC236}">
-                <a16:creationId xmlns:a16="http://schemas.microsoft.com/office/drawing/2014/main" id="{9D29858C-2190-683B-4A1E-27AC555C9B2D}"/>
-              </a:ext>
-            </a:extLst>
-          </p:cNvPr>
-          <p:cNvCxnSpPr/>
-          <p:nvPr/>
-        </p:nvCxnSpPr>
-        <p:spPr>
-          <a:xfrm>
-            <a:off x="838200" y="1161826"/>
-            <a:ext cx="10515600" cy="0"/>
-          </a:xfrm>
-          <a:prstGeom prst="line">
-            <a:avLst/>
-          </a:prstGeom>
-          <a:ln>
-            <a:solidFill>
-              <a:srgbClr val="C00000"/>
-            </a:solidFill>
-          </a:ln>
-        </p:spPr>
-        <p:style>
-          <a:lnRef idx="2">
-            <a:schemeClr val="accent1"/>
-          </a:lnRef>
-          <a:fillRef idx="0">
-            <a:schemeClr val="accent1"/>
-          </a:fillRef>
-          <a:effectRef idx="1">
-            <a:schemeClr val="accent1"/>
-          </a:effectRef>
-          <a:fontRef idx="minor">
-            <a:schemeClr val="tx1"/>
-          </a:fontRef>
-        </p:style>
-      </p:cxnSp>
-      <p:pic>
-        <p:nvPicPr>
-          <p:cNvPr id="8" name="Picture 7">
-            <a:extLst>
-              <a:ext uri="{FF2B5EF4-FFF2-40B4-BE49-F238E27FC236}">
-                <a16:creationId xmlns:a16="http://schemas.microsoft.com/office/drawing/2014/main" id="{9DDBAB87-50B3-B338-8981-AFF594215D70}"/>
-              </a:ext>
-            </a:extLst>
-          </p:cNvPr>
-          <p:cNvPicPr>
-            <a:picLocks noChangeAspect="1"/>
-          </p:cNvPicPr>
-          <p:nvPr/>
-        </p:nvPicPr>
-        <p:blipFill>
-          <a:blip r:embed="rId3"/>
-          <a:stretch>
-            <a:fillRect/>
-          </a:stretch>
-        </p:blipFill>
-        <p:spPr>
-          <a:xfrm>
-            <a:off x="835571" y="2795516"/>
-            <a:ext cx="10518229" cy="1746269"/>
-          </a:xfrm>
-          <a:prstGeom prst="rect">
-            <a:avLst/>
-          </a:prstGeom>
-        </p:spPr>
-      </p:pic>
-      <p:pic>
-        <p:nvPicPr>
-          <p:cNvPr id="10" name="Picture 9">
-            <a:extLst>
-              <a:ext uri="{FF2B5EF4-FFF2-40B4-BE49-F238E27FC236}">
-                <a16:creationId xmlns:a16="http://schemas.microsoft.com/office/drawing/2014/main" id="{31E88CA0-9CFD-8BAD-FAA0-498301BA5C85}"/>
-              </a:ext>
-            </a:extLst>
-          </p:cNvPr>
-          <p:cNvPicPr>
-            <a:picLocks noChangeAspect="1"/>
-          </p:cNvPicPr>
-          <p:nvPr/>
-        </p:nvPicPr>
-        <p:blipFill>
-          <a:blip r:embed="rId4"/>
-          <a:stretch>
-            <a:fillRect/>
-          </a:stretch>
-        </p:blipFill>
-        <p:spPr>
-          <a:xfrm>
-            <a:off x="835571" y="4674367"/>
-            <a:ext cx="10515601" cy="821372"/>
-          </a:xfrm>
-          <a:prstGeom prst="rect">
-            <a:avLst/>
-          </a:prstGeom>
-        </p:spPr>
-      </p:pic>
-      <p:sp>
-        <p:nvSpPr>
-          <p:cNvPr id="11" name="TextBox 10">
-            <a:extLst>
-              <a:ext uri="{FF2B5EF4-FFF2-40B4-BE49-F238E27FC236}">
-                <a16:creationId xmlns:a16="http://schemas.microsoft.com/office/drawing/2014/main" id="{24ABDF20-3F03-8B16-6A08-FFAF39B14D39}"/>
-              </a:ext>
-            </a:extLst>
-          </p:cNvPr>
-          <p:cNvSpPr txBox="1"/>
-          <p:nvPr/>
-        </p:nvSpPr>
-        <p:spPr>
-          <a:xfrm>
-            <a:off x="835571" y="1229679"/>
-            <a:ext cx="10515600" cy="461665"/>
-          </a:xfrm>
-          <a:prstGeom prst="rect">
-            <a:avLst/>
-          </a:prstGeom>
-          <a:noFill/>
-        </p:spPr>
-        <p:txBody>
-          <a:bodyPr wrap="square" rtlCol="0">
-            <a:spAutoFit/>
-          </a:bodyPr>
-          <a:lstStyle/>
-          <a:p>
-            <a:pPr marL="342900" indent="-342900">
-              <a:buFont typeface="Arial" panose="020B0604020202020204" pitchFamily="34" charset="0"/>
-              <a:buChar char="•"/>
-            </a:pPr>
-            <a:r>
-              <a:rPr lang="en-US" sz="2400" dirty="0">
-                <a:latin typeface="Times New Roman" panose="02020603050405020304" pitchFamily="18" charset="0"/>
-                <a:cs typeface="Times New Roman" panose="02020603050405020304" pitchFamily="18" charset="0"/>
-              </a:rPr>
-              <a:t>Run the code below. </a:t>
-            </a:r>
-          </a:p>
-        </p:txBody>
-      </p:sp>
-      <p:sp>
-        <p:nvSpPr>
-          <p:cNvPr id="12" name="TextBox 11">
-            <a:extLst>
-              <a:ext uri="{FF2B5EF4-FFF2-40B4-BE49-F238E27FC236}">
-                <a16:creationId xmlns:a16="http://schemas.microsoft.com/office/drawing/2014/main" id="{6338EB38-191C-017D-5A73-56E680DBCE2D}"/>
-              </a:ext>
-            </a:extLst>
-          </p:cNvPr>
-          <p:cNvSpPr txBox="1"/>
-          <p:nvPr/>
-        </p:nvSpPr>
-        <p:spPr>
-          <a:xfrm>
-            <a:off x="835571" y="5628321"/>
-            <a:ext cx="10515600" cy="461665"/>
-          </a:xfrm>
-          <a:prstGeom prst="rect">
-            <a:avLst/>
-          </a:prstGeom>
-          <a:noFill/>
-        </p:spPr>
-        <p:txBody>
-          <a:bodyPr wrap="square" rtlCol="0">
-            <a:spAutoFit/>
-          </a:bodyPr>
-          <a:lstStyle/>
-          <a:p>
-            <a:pPr marL="342900" indent="-342900">
-              <a:buFont typeface="Arial" panose="020B0604020202020204" pitchFamily="34" charset="0"/>
-              <a:buChar char="•"/>
-            </a:pPr>
-            <a:r>
-              <a:rPr lang="en-US" sz="2400" dirty="0">
-                <a:latin typeface="Times New Roman" panose="02020603050405020304" pitchFamily="18" charset="0"/>
-                <a:cs typeface="Times New Roman" panose="02020603050405020304" pitchFamily="18" charset="0"/>
-              </a:rPr>
-              <a:t>What does negative </a:t>
-            </a:r>
-            <a:r>
-              <a:rPr lang="en-US" sz="2400" dirty="0" err="1">
-                <a:latin typeface="Times New Roman" panose="02020603050405020304" pitchFamily="18" charset="0"/>
-                <a:cs typeface="Times New Roman" panose="02020603050405020304" pitchFamily="18" charset="0"/>
-              </a:rPr>
-              <a:t>pid</a:t>
-            </a:r>
-            <a:r>
-              <a:rPr lang="en-US" sz="2400" dirty="0">
-                <a:latin typeface="Times New Roman" panose="02020603050405020304" pitchFamily="18" charset="0"/>
-                <a:cs typeface="Times New Roman" panose="02020603050405020304" pitchFamily="18" charset="0"/>
-              </a:rPr>
-              <a:t> or gender mean? </a:t>
-            </a:r>
-          </a:p>
-        </p:txBody>
-      </p:sp>
-    </p:spTree>
-    <p:extLst>
-      <p:ext uri="{BB962C8B-B14F-4D97-AF65-F5344CB8AC3E}">
-        <p14:creationId xmlns:p14="http://schemas.microsoft.com/office/powerpoint/2010/main" val="2529798733"/>
-      </p:ext>
-    </p:extLst>
-  </p:cSld>
-  <p:clrMapOvr>
-    <a:masterClrMapping/>
-  </p:clrMapOvr>
-</p:sld>
-</file>
-
-<file path=ppt/slides/slide8.xml><?xml version="1.0" encoding="utf-8"?>
-<p:sld xmlns:a="http://schemas.openxmlformats.org/drawingml/2006/main" xmlns:r="http://schemas.openxmlformats.org/officeDocument/2006/relationships" xmlns:p="http://schemas.openxmlformats.org/presentationml/2006/main">
-  <p:cSld>
-    <p:spTree>
-      <p:nvGrpSpPr>
-        <p:cNvPr id="1" name="">
-          <a:extLst>
-            <a:ext uri="{FF2B5EF4-FFF2-40B4-BE49-F238E27FC236}">
-              <a16:creationId xmlns:a16="http://schemas.microsoft.com/office/drawing/2014/main" id="{21FA044D-7AB6-F78E-D712-3639857860A0}"/>
-            </a:ext>
-          </a:extLst>
-        </p:cNvPr>
-        <p:cNvGrpSpPr/>
-        <p:nvPr/>
-      </p:nvGrpSpPr>
-      <p:grpSpPr>
-        <a:xfrm>
-          <a:off x="0" y="0"/>
-          <a:ext cx="0" cy="0"/>
-          <a:chOff x="0" y="0"/>
-          <a:chExt cx="0" cy="0"/>
-        </a:xfrm>
-      </p:grpSpPr>
-      <p:sp>
-        <p:nvSpPr>
-          <p:cNvPr id="2" name="Title 1">
-            <a:extLst>
-              <a:ext uri="{FF2B5EF4-FFF2-40B4-BE49-F238E27FC236}">
-                <a16:creationId xmlns:a16="http://schemas.microsoft.com/office/drawing/2014/main" id="{F43626E1-47CE-CF6F-77E4-070F449C97E2}"/>
-              </a:ext>
-            </a:extLst>
-          </p:cNvPr>
-          <p:cNvSpPr>
-            <a:spLocks noGrp="1"/>
-          </p:cNvSpPr>
-          <p:nvPr>
-            <p:ph type="title"/>
-          </p:nvPr>
-        </p:nvSpPr>
-        <p:spPr>
-          <a:xfrm>
-            <a:off x="838200" y="365126"/>
-            <a:ext cx="10515600" cy="947308"/>
-          </a:xfrm>
-        </p:spPr>
-        <p:txBody>
-          <a:bodyPr>
-            <a:normAutofit/>
-          </a:bodyPr>
-          <a:lstStyle/>
-          <a:p>
-            <a:pPr algn="ctr"/>
-            <a:r>
-              <a:rPr lang="en-US" b="1" dirty="0">
-                <a:latin typeface="Aharoni" panose="02010803020104030203" pitchFamily="2" charset="-79"/>
-                <a:cs typeface="Aharoni" panose="02010803020104030203" pitchFamily="2" charset="-79"/>
-              </a:rPr>
-              <a:t>Fixing Gender</a:t>
-            </a:r>
-            <a:endParaRPr lang="en-US" dirty="0">
-              <a:latin typeface="Aharoni" panose="02010803020104030203" pitchFamily="2" charset="-79"/>
-              <a:cs typeface="Aharoni" panose="02010803020104030203" pitchFamily="2" charset="-79"/>
-            </a:endParaRPr>
-          </a:p>
-        </p:txBody>
-      </p:sp>
-      <p:pic>
-        <p:nvPicPr>
-          <p:cNvPr id="6" name="Content Placeholder 5">
-            <a:extLst>
-              <a:ext uri="{FF2B5EF4-FFF2-40B4-BE49-F238E27FC236}">
-                <a16:creationId xmlns:a16="http://schemas.microsoft.com/office/drawing/2014/main" id="{83C0425C-19B0-88DD-F535-688E683EDED6}"/>
-              </a:ext>
-            </a:extLst>
-          </p:cNvPr>
-          <p:cNvPicPr>
-            <a:picLocks noGrp="1" noChangeAspect="1"/>
-          </p:cNvPicPr>
-          <p:nvPr>
-            <p:ph idx="1"/>
-          </p:nvPr>
-        </p:nvPicPr>
-        <p:blipFill>
-          <a:blip r:embed="rId2"/>
-          <a:stretch>
-            <a:fillRect/>
-          </a:stretch>
-        </p:blipFill>
-        <p:spPr>
-          <a:xfrm>
-            <a:off x="838200" y="1363533"/>
-            <a:ext cx="10515600" cy="2641184"/>
-          </a:xfrm>
-          <a:prstGeom prst="rect">
-            <a:avLst/>
-          </a:prstGeom>
-        </p:spPr>
-      </p:pic>
-      <p:cxnSp>
-        <p:nvCxnSpPr>
-          <p:cNvPr id="5" name="Straight Connector 4">
-            <a:extLst>
-              <a:ext uri="{FF2B5EF4-FFF2-40B4-BE49-F238E27FC236}">
-                <a16:creationId xmlns:a16="http://schemas.microsoft.com/office/drawing/2014/main" id="{8CB031AC-8CA2-DB1E-D2C9-7EB849CA85BA}"/>
-              </a:ext>
-            </a:extLst>
-          </p:cNvPr>
-          <p:cNvCxnSpPr/>
-          <p:nvPr/>
-        </p:nvCxnSpPr>
-        <p:spPr>
-          <a:xfrm>
-            <a:off x="838200" y="1161826"/>
-            <a:ext cx="10515600" cy="0"/>
-          </a:xfrm>
-          <a:prstGeom prst="line">
-            <a:avLst/>
-          </a:prstGeom>
-          <a:ln>
-            <a:solidFill>
-              <a:srgbClr val="C00000"/>
-            </a:solidFill>
-          </a:ln>
-        </p:spPr>
-        <p:style>
-          <a:lnRef idx="2">
-            <a:schemeClr val="accent1"/>
-          </a:lnRef>
-          <a:fillRef idx="0">
-            <a:schemeClr val="accent1"/>
-          </a:fillRef>
-          <a:effectRef idx="1">
-            <a:schemeClr val="accent1"/>
-          </a:effectRef>
-          <a:fontRef idx="minor">
-            <a:schemeClr val="tx1"/>
-          </a:fontRef>
-        </p:style>
-      </p:cxnSp>
-      <p:sp>
-        <p:nvSpPr>
-          <p:cNvPr id="7" name="TextBox 6">
-            <a:extLst>
-              <a:ext uri="{FF2B5EF4-FFF2-40B4-BE49-F238E27FC236}">
-                <a16:creationId xmlns:a16="http://schemas.microsoft.com/office/drawing/2014/main" id="{A99FDCC0-A2F2-72C4-364E-20CFD34AD26C}"/>
-              </a:ext>
-            </a:extLst>
-          </p:cNvPr>
-          <p:cNvSpPr txBox="1"/>
-          <p:nvPr/>
-        </p:nvSpPr>
-        <p:spPr>
-          <a:xfrm>
-            <a:off x="838200" y="4294138"/>
-            <a:ext cx="10398232" cy="1200329"/>
-          </a:xfrm>
-          <a:prstGeom prst="rect">
-            <a:avLst/>
-          </a:prstGeom>
-          <a:noFill/>
-        </p:spPr>
-        <p:txBody>
-          <a:bodyPr wrap="square" rtlCol="0">
-            <a:spAutoFit/>
-          </a:bodyPr>
-          <a:lstStyle/>
-          <a:p>
-            <a:pPr marL="285750" indent="-285750">
-              <a:buFont typeface="Arial" panose="020B0604020202020204" pitchFamily="34" charset="0"/>
-              <a:buChar char="•"/>
-            </a:pPr>
-            <a:r>
-              <a:rPr lang="en-US" sz="2400" dirty="0">
-                <a:latin typeface="Times New Roman" panose="02020603050405020304" pitchFamily="18" charset="0"/>
-                <a:cs typeface="Times New Roman" panose="02020603050405020304" pitchFamily="18" charset="0"/>
-              </a:rPr>
-              <a:t>Note that we used the </a:t>
-            </a:r>
-            <a:r>
-              <a:rPr lang="en-US" sz="2400" dirty="0">
-                <a:latin typeface="Courier New" panose="02070309020205020404" pitchFamily="49" charset="0"/>
-                <a:cs typeface="Courier New" panose="02070309020205020404" pitchFamily="49" charset="0"/>
-              </a:rPr>
-              <a:t>labels</a:t>
-            </a:r>
-            <a:r>
-              <a:rPr lang="en-US" sz="2400" dirty="0">
-                <a:latin typeface="Times New Roman" panose="02020603050405020304" pitchFamily="18" charset="0"/>
-                <a:cs typeface="Times New Roman" panose="02020603050405020304" pitchFamily="18" charset="0"/>
-              </a:rPr>
-              <a:t> argument inside of factor to add labels to the values of </a:t>
-            </a:r>
-            <a:r>
-              <a:rPr lang="en-US" sz="2400" dirty="0">
-                <a:latin typeface="Courier New" panose="02070309020205020404" pitchFamily="49" charset="0"/>
-                <a:cs typeface="Courier New" panose="02070309020205020404" pitchFamily="49" charset="0"/>
-              </a:rPr>
-              <a:t>gender</a:t>
-            </a:r>
-            <a:r>
-              <a:rPr lang="en-US" sz="2400" dirty="0">
-                <a:latin typeface="Times New Roman" panose="02020603050405020304" pitchFamily="18" charset="0"/>
-                <a:cs typeface="Times New Roman" panose="02020603050405020304" pitchFamily="18" charset="0"/>
-              </a:rPr>
-              <a:t>.</a:t>
-            </a:r>
-          </a:p>
-          <a:p>
-            <a:pPr marL="285750" indent="-285750">
-              <a:buFont typeface="Arial" panose="020B0604020202020204" pitchFamily="34" charset="0"/>
-              <a:buChar char="•"/>
-            </a:pPr>
-            <a:endParaRPr lang="en-US" sz="2400" dirty="0">
-              <a:latin typeface="Times New Roman" panose="02020603050405020304" pitchFamily="18" charset="0"/>
-              <a:cs typeface="Times New Roman" panose="02020603050405020304" pitchFamily="18" charset="0"/>
-            </a:endParaRPr>
-          </a:p>
-        </p:txBody>
-      </p:sp>
-    </p:spTree>
-    <p:extLst>
-      <p:ext uri="{BB962C8B-B14F-4D97-AF65-F5344CB8AC3E}">
-        <p14:creationId xmlns:p14="http://schemas.microsoft.com/office/powerpoint/2010/main" val="222546741"/>
-      </p:ext>
-    </p:extLst>
-  </p:cSld>
-  <p:clrMapOvr>
-    <a:masterClrMapping/>
-  </p:clrMapOvr>
-</p:sld>
-</file>
-
-<file path=ppt/slides/slide9.xml><?xml version="1.0" encoding="utf-8"?>
-<p:sld xmlns:a="http://schemas.openxmlformats.org/drawingml/2006/main" xmlns:r="http://schemas.openxmlformats.org/officeDocument/2006/relationships" xmlns:p="http://schemas.openxmlformats.org/presentationml/2006/main">
-  <p:cSld>
-    <p:spTree>
-      <p:nvGrpSpPr>
-        <p:cNvPr id="1" name="">
-          <a:extLst>
-            <a:ext uri="{FF2B5EF4-FFF2-40B4-BE49-F238E27FC236}">
-              <a16:creationId xmlns:a16="http://schemas.microsoft.com/office/drawing/2014/main" id="{D232FFE9-FDEA-B8F8-FA5C-25CD17436E43}"/>
-            </a:ext>
-          </a:extLst>
-        </p:cNvPr>
-        <p:cNvGrpSpPr/>
-        <p:nvPr/>
-      </p:nvGrpSpPr>
-      <p:grpSpPr>
-        <a:xfrm>
-          <a:off x="0" y="0"/>
-          <a:ext cx="0" cy="0"/>
-          <a:chOff x="0" y="0"/>
-          <a:chExt cx="0" cy="0"/>
-        </a:xfrm>
-      </p:grpSpPr>
-      <p:sp>
-        <p:nvSpPr>
-          <p:cNvPr id="2" name="Title 1">
-            <a:extLst>
-              <a:ext uri="{FF2B5EF4-FFF2-40B4-BE49-F238E27FC236}">
-                <a16:creationId xmlns:a16="http://schemas.microsoft.com/office/drawing/2014/main" id="{FDB44ACD-11B6-336B-5B7C-9664E1CB5902}"/>
-              </a:ext>
-            </a:extLst>
-          </p:cNvPr>
-          <p:cNvSpPr>
-            <a:spLocks noGrp="1"/>
-          </p:cNvSpPr>
-          <p:nvPr>
-            <p:ph type="title"/>
-          </p:nvPr>
-        </p:nvSpPr>
-        <p:spPr>
-          <a:xfrm>
-            <a:off x="838200" y="365126"/>
-            <a:ext cx="10515600" cy="947308"/>
-          </a:xfrm>
-        </p:spPr>
-        <p:txBody>
-          <a:bodyPr/>
-          <a:lstStyle/>
-          <a:p>
-            <a:pPr algn="ctr"/>
-            <a:r>
-              <a:rPr lang="en-US" dirty="0">
-                <a:latin typeface="Aharoni" panose="02010803020104030203" pitchFamily="2" charset="-79"/>
-                <a:cs typeface="Aharoni" panose="02010803020104030203" pitchFamily="2" charset="-79"/>
-              </a:rPr>
-              <a:t>Fixing PID</a:t>
-            </a:r>
-          </a:p>
-        </p:txBody>
-      </p:sp>
-      <p:pic>
-        <p:nvPicPr>
-          <p:cNvPr id="6" name="Content Placeholder 5">
-            <a:extLst>
-              <a:ext uri="{FF2B5EF4-FFF2-40B4-BE49-F238E27FC236}">
-                <a16:creationId xmlns:a16="http://schemas.microsoft.com/office/drawing/2014/main" id="{25B8FD1B-1F63-EDB3-002F-813FD94E398A}"/>
-              </a:ext>
-            </a:extLst>
-          </p:cNvPr>
-          <p:cNvPicPr>
-            <a:picLocks noGrp="1" noChangeAspect="1"/>
-          </p:cNvPicPr>
-          <p:nvPr>
-            <p:ph idx="1"/>
-          </p:nvPr>
-        </p:nvPicPr>
-        <p:blipFill>
-          <a:blip r:embed="rId2"/>
-          <a:stretch>
-            <a:fillRect/>
-          </a:stretch>
-        </p:blipFill>
-        <p:spPr>
-          <a:xfrm>
-            <a:off x="838200" y="1312434"/>
-            <a:ext cx="10515600" cy="1141540"/>
-          </a:xfrm>
-          <a:prstGeom prst="rect">
-            <a:avLst/>
-          </a:prstGeom>
-        </p:spPr>
-      </p:pic>
-      <p:cxnSp>
-        <p:nvCxnSpPr>
-          <p:cNvPr id="5" name="Straight Connector 4">
-            <a:extLst>
-              <a:ext uri="{FF2B5EF4-FFF2-40B4-BE49-F238E27FC236}">
-                <a16:creationId xmlns:a16="http://schemas.microsoft.com/office/drawing/2014/main" id="{B0B316DC-201E-07F7-9805-FB5954E944B1}"/>
-              </a:ext>
-            </a:extLst>
-          </p:cNvPr>
-          <p:cNvCxnSpPr/>
-          <p:nvPr/>
-        </p:nvCxnSpPr>
-        <p:spPr>
-          <a:xfrm>
-            <a:off x="838200" y="1161826"/>
-            <a:ext cx="10515600" cy="0"/>
-          </a:xfrm>
-          <a:prstGeom prst="line">
-            <a:avLst/>
-          </a:prstGeom>
-          <a:ln>
-            <a:solidFill>
-              <a:srgbClr val="C00000"/>
-            </a:solidFill>
-          </a:ln>
-        </p:spPr>
-        <p:style>
-          <a:lnRef idx="2">
-            <a:schemeClr val="accent1"/>
-          </a:lnRef>
-          <a:fillRef idx="0">
-            <a:schemeClr val="accent1"/>
-          </a:fillRef>
-          <a:effectRef idx="1">
-            <a:schemeClr val="accent1"/>
-          </a:effectRef>
-          <a:fontRef idx="minor">
-            <a:schemeClr val="tx1"/>
-          </a:fontRef>
-        </p:style>
-      </p:cxnSp>
-      <p:pic>
-        <p:nvPicPr>
-          <p:cNvPr id="8" name="Picture 7">
-            <a:extLst>
-              <a:ext uri="{FF2B5EF4-FFF2-40B4-BE49-F238E27FC236}">
-                <a16:creationId xmlns:a16="http://schemas.microsoft.com/office/drawing/2014/main" id="{510C6F51-CA78-B7C3-20EA-FB5FA879EE4A}"/>
-              </a:ext>
-            </a:extLst>
-          </p:cNvPr>
-          <p:cNvPicPr>
-            <a:picLocks noChangeAspect="1"/>
-          </p:cNvPicPr>
-          <p:nvPr/>
-        </p:nvPicPr>
-        <p:blipFill>
-          <a:blip r:embed="rId3"/>
-          <a:stretch>
-            <a:fillRect/>
-          </a:stretch>
-        </p:blipFill>
-        <p:spPr>
-          <a:xfrm>
-            <a:off x="838199" y="2604580"/>
-            <a:ext cx="10515599" cy="3460661"/>
-          </a:xfrm>
-          <a:prstGeom prst="rect">
-            <a:avLst/>
-          </a:prstGeom>
-        </p:spPr>
-      </p:pic>
-      <p:sp>
-        <p:nvSpPr>
-          <p:cNvPr id="9" name="TextBox 8">
-            <a:extLst>
-              <a:ext uri="{FF2B5EF4-FFF2-40B4-BE49-F238E27FC236}">
-                <a16:creationId xmlns:a16="http://schemas.microsoft.com/office/drawing/2014/main" id="{022BF71E-6F98-BEAD-B448-4D5CA2E77EDF}"/>
-              </a:ext>
-            </a:extLst>
-          </p:cNvPr>
-          <p:cNvSpPr txBox="1"/>
-          <p:nvPr/>
-        </p:nvSpPr>
-        <p:spPr>
-          <a:xfrm>
-            <a:off x="838199" y="6126527"/>
-            <a:ext cx="10985805" cy="707886"/>
-          </a:xfrm>
-          <a:prstGeom prst="rect">
-            <a:avLst/>
-          </a:prstGeom>
-          <a:noFill/>
-        </p:spPr>
-        <p:txBody>
-          <a:bodyPr wrap="square" rtlCol="0">
-            <a:spAutoFit/>
-          </a:bodyPr>
-          <a:lstStyle/>
-          <a:p>
-            <a:pPr marL="285750" indent="-285750">
-              <a:buFont typeface="Arial" panose="020B0604020202020204" pitchFamily="34" charset="0"/>
-              <a:buChar char="•"/>
-            </a:pPr>
-            <a:r>
-              <a:rPr lang="en-US" sz="2000" dirty="0">
-                <a:latin typeface="Times New Roman" panose="02020603050405020304" pitchFamily="18" charset="0"/>
-                <a:cs typeface="Times New Roman" panose="02020603050405020304" pitchFamily="18" charset="0"/>
-              </a:rPr>
-              <a:t>Note that we reshaped the variable to remove “other” by only allowing for values 1-3 in the factor.</a:t>
-            </a:r>
-          </a:p>
-          <a:p>
-            <a:pPr marL="285750" indent="-285750">
-              <a:buFont typeface="Arial" panose="020B0604020202020204" pitchFamily="34" charset="0"/>
-              <a:buChar char="•"/>
-            </a:pPr>
-            <a:endParaRPr lang="en-US" sz="2000" dirty="0">
-              <a:latin typeface="Times New Roman" panose="02020603050405020304" pitchFamily="18" charset="0"/>
-              <a:cs typeface="Times New Roman" panose="02020603050405020304" pitchFamily="18" charset="0"/>
-            </a:endParaRPr>
-          </a:p>
-        </p:txBody>
-      </p:sp>
-    </p:spTree>
-    <p:extLst>
-      <p:ext uri="{BB962C8B-B14F-4D97-AF65-F5344CB8AC3E}">
-        <p14:creationId xmlns:p14="http://schemas.microsoft.com/office/powerpoint/2010/main" val="4184365916"/>
-      </p:ext>
-    </p:extLst>
   </p:cSld>
   <p:clrMapOvr>
     <a:masterClrMapping/>
